--- a/presentations/Tenneco_Intern_Project_Diego_de_Leon.pptx
+++ b/presentations/Tenneco_Intern_Project_Diego_de_Leon.pptx
@@ -806,7 +806,7 @@
           <a:lstStyle/>
           <a:p>
             <a:r>
-              <a:t>Eight weeks on the floor. Four skills I own unsupervised, twelve in progress. But the numbers are not the part I am proud of. The bottom three lines are. Two months ago I watched someone change consumables, now I do it alone. Two months ago I could not read a joint callout on a print, now I find the joint. And two months ago I was the intern who called the ANDON. Now I am the one who closes it.</a:t>
+              <a:t>Eight weeks on the floor. Four skills I own unsupervised, twelve in progress, and sixty percent of the time on the integration project. But the numbers are not the part I am proud of. The bottom three lines are. Two months ago I watched someone change consumables, now I do it alone. Two months ago I could not read a joint callout on a print, now I find the joint. And two months ago I was the intern who called in the ANDON. Now I am the one who closes it.</a:t>
             </a:r>
           </a:p>
         </p:txBody>
@@ -876,7 +876,7 @@
           <a:lstStyle/>
           <a:p>
             <a:r>
-              <a:t>So here is what I am asking for, and it is small. Four things. Give me two half-days for the level I session and the exam, and the theory stops being informal. Give me access to the parameter sheets and I will document ten validations, which closes level L. Give me supervised cell time and I will build one program in SKS, which opens level U. And give me a sponsor for one improvement idea and I leave you my first piece of level O evidence. None of this needs budget. It needs calendar.</a:t>
+              <a:t>So here is the ask, and it is small. Four things. Give me two half-days for the level I session and the exam, and the theory stops being informal. Give me access to the parameter sheets and I will document ten validations, which closes level L. Give me supervised cell time and I will build one program in SKS, which opens level U. And give me a sponsor for one improvement idea and I leave you my first piece of level O evidence. Every one of these produces a document you can audit. None of them needs budget. They need calendar.</a:t>
             </a:r>
           </a:p>
         </p:txBody>
@@ -946,7 +946,7 @@
           <a:lstStyle/>
           <a:p>
             <a:r>
-              <a:t>Three conclusions. First, I am genuinely capable at level L and I am being honest that level I is not validated. Second, learning on the floor made me faster at diagnosing problems than a classroom would have, it just did not generate paperwork. Third, I have fourteen weeks and a concrete plan for them. And if I go back to the value I picked: trust first, then the torch. That is what these two months taught me.</a:t>
+              <a:t>Three conclusions. First, I am genuinely capable at level L, and I am being honest that level I is not validated. Second, learning on the floor made me faster at diagnosing problems than a classroom would have. It just did not generate paperwork. Third, I have fourteen weeks and a concrete plan for them. And if I go back to the value I picked at the start: trust first, then the torch. That is what these two months taught me.</a:t>
             </a:r>
           </a:p>
         </p:txBody>
@@ -1086,7 +1086,7 @@
           <a:lstStyle/>
           <a:p>
             <a:r>
-              <a:t>The value I identify with is WIN. Not because it sounds ambitious, but because of how it actually works on the floor. Nobody hands a welding torch to an intern because of a title. You earn it. I earned mine by being the one who showed up when a cell went down, and the day the technicians started calling me instead of waiting for the engineer, that was the moment I felt I had won something real.</a:t>
+              <a:t>The value I identify with is WIN, and I want to explain why in one idea. On the floor, nobody lets an intern touch a welding cell because of a job title. You earn it. I earned mine by being the one who showed up when a cell went down, not by waiting for a training session to be scheduled. And the day the technicians started calling me instead of waiting for the engineer, that was the moment I felt I had won something real. Winning here is not about being right. It is about the line running.</a:t>
             </a:r>
           </a:p>
         </p:txBody>
@@ -1156,7 +1156,7 @@
           <a:lstStyle/>
           <a:p>
             <a:r>
-              <a:t>Before I walk you through anything, here is the whole presentation in three numbers, in case we run short on time. Four of the twenty three skills I do unsupervised, and none of them are formally validated. Sixty percent of my hours went to an integration project instead of to the matrix. And I need four things from you before January, none of which cost money. If you only remember one line from today, make it the one on the green bar: by January first I can be certified at levels I and L, if those four commitments get a date on a calendar.</a:t>
+              <a:t>Before anything else, here is the whole presentation in three numbers, in case we run short on time. Four of the twenty three skills I do unsupervised, and none of them are formally validated. Sixty percent of my hours went to an integration project instead of to the matrix. And I need four things from you before January, none of which cost money. If you only remember one line today, make it the green one: by January first I can be certified at levels I and L, if those four commitments get a date on a calendar.</a:t>
             </a:r>
           </a:p>
         </p:txBody>
@@ -1226,7 +1226,7 @@
           <a:lstStyle/>
           <a:p>
             <a:r>
-              <a:t>Quick context. We weld exhaust systems, robotic GMAW, mostly Yaskawa robots with SKS and Miller equipment. There is one Fanuc I have not touched yet. The line at the bottom matters more than it looks: my zone has few welding cells and they are stable. That is good for the plant, but it means I could not learn by waiting for them to fail.</a:t>
+              <a:t>Quick context. We weld exhaust systems, robotic GMAW, mostly Yaskawa robots with SKS and Miller equipment. There is one Fanuc I have not touched yet. The line at the bottom is the one that matters: my zone has few welding cells and they are stable. That is good news for the plant, but it means I could not learn by waiting for something to break. My hours went wherever the work was, and that is exactly why my progress looks the way it does on the next slides.</a:t>
             </a:r>
           </a:p>
         </p:txBody>
@@ -1296,7 +1296,7 @@
           <a:lstStyle/>
           <a:p>
             <a:r>
-              <a:t>This is the ILUO path the plant defines for a welding technician. Four levels, twenty three specific skills, forty hours. I is knowing the theory. L is doing it with support. U is doing it alone. O is teaching it and improving the process. Notice that twenty of the forty hours sit in level O. This program is not designed to certify one person. It is designed so that one person multiplies.</a:t>
+              <a:t>This is the path the plant defines for a welding technician. Four levels, twenty three skills, forty hours. I is knowing the theory. L is doing it with support. U is doing it alone. O is teaching it and improving the process. Two things worth noticing. First, each level assumes the one before it. Second, twenty of the forty hours sit in level O. This program is not designed to certify one person. It is designed so that one person multiplies.</a:t>
             </a:r>
           </a:p>
         </p:txBody>
@@ -1366,7 +1366,7 @@
           <a:lstStyle/>
           <a:p>
             <a:r>
-              <a:t>This is the honest picture. Each square is one skill. Four of the twenty three I execute with nobody standing next to me: consumable changes, essential variable adjustment, reading welding symbols, and closing ANDON orders. Twelve are in progress. Seven I have not started. And the line at the bottom is the part I want to be direct about. I know the level I content because I picked it up in the cell, but the theory session and the exam have not happened, so formally I am validated at zero. That is not a small detail and I am not going to hide it.</a:t>
+              <a:t>Each square is one skill. Four of the twenty three I execute with nobody standing next to me: consumable changes, which means contact tip, liner, nozzle, diffuser and rollers; essential variable adjustment, so current, wire feed, voltage and travel speed; reading welding symbols; and closing ANDON orders. Twelve are in progress. Seven I have not started. And then the line at the bottom, which is the part I want to be direct about. I know the level I content because I picked it up in the cell, but the theory session and the exam have not happened, so formally I am validated at zero. I am not going to hide that.</a:t>
             </a:r>
           </a:p>
         </p:txBody>
@@ -1436,7 +1436,7 @@
           <a:lstStyle/>
           <a:p>
             <a:r>
-              <a:t>Now the part that explains the previous slide. The plan assumed forty scheduled hours, classroom first, one level at a time. What happened was different. We went straight to the floor, we learned what the day demanded, and about sixty percent of my hours went into an integration project with my engineer, which is not on the welding matrix at all. I want to be clear about how I am framing this. It is not a gap in effort. It is a gap in structure, and structure is something we can fix in the time I have left.</a:t>
+              <a:t>This is what explains the previous slide. The plan assumed forty scheduled hours, classroom first, one level at a time. What happened was different. We went straight to the floor, we learned what the day demanded, and the levels got touched out of order. Sixty percent of my hours went into an integration project with my engineer, which is not on the welding matrix at all. I want to be careful about how I frame this. It is not a gap in effort. Every hour I worked was useful. It is a gap in structure, and structure is the part you can unblock.</a:t>
             </a:r>
           </a:p>
         </p:txBody>
@@ -1506,7 +1506,7 @@
           <a:lstStyle/>
           <a:p>
             <a:r>
-              <a:t>This is the project that took most of my time. Explain it here in your own words: what the integration is, what you own day to day, what it taught you that is not welding, and where it stands. Keep it to about ninety seconds. The reason it belongs in this presentation is that it is real engineering work — it just does not appear anywhere on the ILUO matrix.</a:t>
+              <a:t>This is the project that took most of my time, and I worked on it directly with my engineering lead. Explain it here in your own words: what the integration is, what you own day to day, what it taught you that is not welding, and where it stands right now. Keep it to about ninety seconds. The reason it belongs in this presentation is simple. It is real engineering work. It just does not appear anywhere on the ILUO matrix, so the scorecard you saw two slides ago cannot see it.</a:t>
             </a:r>
           </a:p>
         </p:txBody>
@@ -1576,7 +1576,7 @@
           <a:lstStyle/>
           <a:p>
             <a:r>
-              <a:t>Here is the same story on a calendar. The lime line is today, September twenty fifth. Everything to the left is what actually happened: level I content and level L execution built up on the floor, ANDON closings, and the integration project running alongside all of it. Everything to the right is what I am proposing. The level I exam in October, level L closed by the end of November, level U programming from October to December, and one level O improvement before I finish. Fourteen weeks left.</a:t>
+              <a:t>The same story on a calendar. The green line is today, September twenty fifth. Everything to its left actually happened: level I content and level L execution built up in the cell, ANDON orders closed, and the integration project running alongside all of it. Everything to the right is what I am proposing. The level I exam in October, level L closed by the end of November, level U programming from October to December, and one level O improvement before I finish. Level I needs a scheduled session and level U needs supervised cell time. Both are calendar items, not budget items.</a:t>
             </a:r>
           </a:p>
         </p:txBody>
@@ -15632,6 +15632,18 @@
   <p:clrMapOvr>
     <a:masterClrMapping/>
   </p:clrMapOvr>
+  <mc:AlternateContent xmlns:mc="http://schemas.openxmlformats.org/markup-compatibility/2006">
+    <mc:Choice xmlns:p159="http://schemas.microsoft.com/office/powerpoint/2015/09/main" Requires="p159">
+      <p:transition xmlns:p14="http://schemas.microsoft.com/office/powerpoint/2010/main" spd="slow" p14:dur="1250">
+        <p159:morph option="byObject"/>
+      </p:transition>
+    </mc:Choice>
+    <mc:Fallback>
+      <p:transition xmlns:p14="http://schemas.microsoft.com/office/powerpoint/2010/main" spd="slow">
+        <p:fade/>
+      </p:transition>
+    </mc:Fallback>
+  </mc:AlternateContent>
 </p:sld>
 </file>
 
@@ -15850,56 +15862,14 @@
       </p:sp>
       <p:sp>
         <p:nvSpPr>
-          <p:cNvPr id="7" name="TextBox 6"/>
-          <p:cNvSpPr txBox="1"/>
-          <p:nvPr/>
-        </p:nvSpPr>
-        <p:spPr>
-          <a:xfrm>
-            <a:off x="457200" y="1481328"/>
-            <a:ext cx="10607040" cy="310896"/>
-          </a:xfrm>
-          <a:prstGeom prst="rect">
-            <a:avLst/>
-          </a:prstGeom>
-          <a:noFill/>
-        </p:spPr>
-        <p:txBody>
-          <a:bodyPr wrap="square" lIns="0" rIns="0" tIns="0" bIns="0" anchor="t">
-            <a:spAutoFit/>
-          </a:bodyPr>
-          <a:lstStyle/>
-          <a:p>
-            <a:pPr algn="l">
-              <a:spcBef>
-                <a:spcPts val="0"/>
-              </a:spcBef>
-              <a:spcAft>
-                <a:spcPts val="0"/>
-              </a:spcAft>
-            </a:pPr>
-            <a:r>
-              <a:rPr sz="1300" b="0" i="0">
-                <a:solidFill>
-                  <a:srgbClr val="9FAFBA"/>
-                </a:solidFill>
-                <a:latin typeface="Segoe UI"/>
-              </a:rPr>
-              <a:t>Eight weeks, measured against the 23-skill matrix</a:t>
-            </a:r>
-          </a:p>
-        </p:txBody>
-      </p:sp>
-      <p:sp>
-        <p:nvSpPr>
-          <p:cNvPr id="8" name="Rectangle 7"/>
+          <p:cNvPr id="7" name="Rectangle 6"/>
           <p:cNvSpPr/>
           <p:nvPr/>
         </p:nvSpPr>
         <p:spPr>
           <a:xfrm>
-            <a:off x="457200" y="1901952"/>
-            <a:ext cx="2612898" cy="1554480"/>
+            <a:off x="457200" y="1956816"/>
+            <a:ext cx="2612898" cy="1463040"/>
           </a:xfrm>
           <a:prstGeom prst="rect">
             <a:avLst/>
@@ -15922,14 +15892,14 @@
       </p:sp>
       <p:sp>
         <p:nvSpPr>
-          <p:cNvPr id="9" name="TextBox 8"/>
+          <p:cNvPr id="8" name="TextBox 7"/>
           <p:cNvSpPr txBox="1"/>
           <p:nvPr/>
         </p:nvSpPr>
         <p:spPr>
           <a:xfrm>
-            <a:off x="731520" y="2103120"/>
-            <a:ext cx="2064257" cy="731520"/>
+            <a:off x="731520" y="2212848"/>
+            <a:ext cx="2064257" cy="914400"/>
           </a:xfrm>
           <a:prstGeom prst="rect">
             <a:avLst/>
@@ -15951,7 +15921,7 @@
               </a:spcAft>
             </a:pPr>
             <a:r>
-              <a:rPr sz="4000" b="1" i="0">
+              <a:rPr sz="3800" b="1" i="0">
                 <a:solidFill>
                   <a:srgbClr val="D5FB00"/>
                 </a:solidFill>
@@ -15966,14 +15936,14 @@
                 <a:spcPct val="114000"/>
               </a:lnSpc>
               <a:spcBef>
-                <a:spcPts val="800"/>
+                <a:spcPts val="1000"/>
               </a:spcBef>
               <a:spcAft>
                 <a:spcPts val="0"/>
               </a:spcAft>
             </a:pPr>
             <a:r>
-              <a:rPr sz="1200" b="0" i="0">
+              <a:rPr sz="1250" b="0" i="0">
                 <a:solidFill>
                   <a:srgbClr val="C6CDD1"/>
                 </a:solidFill>
@@ -15986,14 +15956,14 @@
       </p:sp>
       <p:sp>
         <p:nvSpPr>
-          <p:cNvPr id="10" name="Rectangle 9"/>
+          <p:cNvPr id="9" name="Rectangle 8"/>
           <p:cNvSpPr/>
           <p:nvPr/>
         </p:nvSpPr>
         <p:spPr>
           <a:xfrm>
-            <a:off x="3344418" y="1901952"/>
-            <a:ext cx="2612898" cy="1554480"/>
+            <a:off x="3344418" y="1956816"/>
+            <a:ext cx="2612898" cy="1463040"/>
           </a:xfrm>
           <a:prstGeom prst="rect">
             <a:avLst/>
@@ -16016,14 +15986,14 @@
       </p:sp>
       <p:sp>
         <p:nvSpPr>
-          <p:cNvPr id="11" name="TextBox 10"/>
+          <p:cNvPr id="10" name="TextBox 9"/>
           <p:cNvSpPr txBox="1"/>
           <p:nvPr/>
         </p:nvSpPr>
         <p:spPr>
           <a:xfrm>
-            <a:off x="3618738" y="2103120"/>
-            <a:ext cx="2064257" cy="731520"/>
+            <a:off x="3618738" y="2212848"/>
+            <a:ext cx="2064257" cy="914400"/>
           </a:xfrm>
           <a:prstGeom prst="rect">
             <a:avLst/>
@@ -16045,13 +16015,13 @@
               </a:spcAft>
             </a:pPr>
             <a:r>
-              <a:rPr sz="4000" b="1" i="0">
+              <a:rPr sz="3800" b="1" i="0">
                 <a:solidFill>
                   <a:srgbClr val="D5FB00"/>
                 </a:solidFill>
                 <a:latin typeface="Segoe UI"/>
               </a:rPr>
-              <a:t>4 / 23</a:t>
+              <a:t>4 of 23</a:t>
             </a:r>
           </a:p>
           <a:p>
@@ -16060,34 +16030,34 @@
                 <a:spcPct val="114000"/>
               </a:lnSpc>
               <a:spcBef>
-                <a:spcPts val="800"/>
+                <a:spcPts val="1000"/>
               </a:spcBef>
               <a:spcAft>
                 <a:spcPts val="0"/>
               </a:spcAft>
             </a:pPr>
             <a:r>
-              <a:rPr sz="1200" b="0" i="0">
+              <a:rPr sz="1250" b="0" i="0">
                 <a:solidFill>
                   <a:srgbClr val="C6CDD1"/>
                 </a:solidFill>
                 <a:latin typeface="Segoe UI"/>
               </a:rPr>
-              <a:t>skills unsupervised</a:t>
-            </a:r>
-          </a:p>
-        </p:txBody>
-      </p:sp>
-      <p:sp>
-        <p:nvSpPr>
-          <p:cNvPr id="12" name="Rectangle 11"/>
+              <a:t>unsupervised</a:t>
+            </a:r>
+          </a:p>
+        </p:txBody>
+      </p:sp>
+      <p:sp>
+        <p:nvSpPr>
+          <p:cNvPr id="11" name="Rectangle 10"/>
           <p:cNvSpPr/>
           <p:nvPr/>
         </p:nvSpPr>
         <p:spPr>
           <a:xfrm>
-            <a:off x="6231636" y="1901952"/>
-            <a:ext cx="2612898" cy="1554480"/>
+            <a:off x="6231636" y="1956816"/>
+            <a:ext cx="2612898" cy="1463040"/>
           </a:xfrm>
           <a:prstGeom prst="rect">
             <a:avLst/>
@@ -16110,14 +16080,14 @@
       </p:sp>
       <p:sp>
         <p:nvSpPr>
-          <p:cNvPr id="13" name="TextBox 12"/>
+          <p:cNvPr id="12" name="TextBox 11"/>
           <p:cNvSpPr txBox="1"/>
           <p:nvPr/>
         </p:nvSpPr>
         <p:spPr>
           <a:xfrm>
-            <a:off x="6505956" y="2103120"/>
-            <a:ext cx="2064257" cy="731520"/>
+            <a:off x="6505956" y="2212848"/>
+            <a:ext cx="2064257" cy="914400"/>
           </a:xfrm>
           <a:prstGeom prst="rect">
             <a:avLst/>
@@ -16139,13 +16109,13 @@
               </a:spcAft>
             </a:pPr>
             <a:r>
-              <a:rPr sz="4000" b="1" i="0">
+              <a:rPr sz="3800" b="1" i="0">
                 <a:solidFill>
                   <a:srgbClr val="D5FB00"/>
                 </a:solidFill>
                 <a:latin typeface="Segoe UI"/>
               </a:rPr>
-              <a:t>12 / 23</a:t>
+              <a:t>12</a:t>
             </a:r>
           </a:p>
           <a:p>
@@ -16154,34 +16124,34 @@
                 <a:spcPct val="114000"/>
               </a:lnSpc>
               <a:spcBef>
-                <a:spcPts val="800"/>
+                <a:spcPts val="1000"/>
               </a:spcBef>
               <a:spcAft>
                 <a:spcPts val="0"/>
               </a:spcAft>
             </a:pPr>
             <a:r>
-              <a:rPr sz="1200" b="0" i="0">
+              <a:rPr sz="1250" b="0" i="0">
                 <a:solidFill>
                   <a:srgbClr val="C6CDD1"/>
                 </a:solidFill>
                 <a:latin typeface="Segoe UI"/>
               </a:rPr>
-              <a:t>skills in progress</a:t>
-            </a:r>
-          </a:p>
-        </p:txBody>
-      </p:sp>
-      <p:sp>
-        <p:nvSpPr>
-          <p:cNvPr id="14" name="Rectangle 13"/>
+              <a:t>in progress</a:t>
+            </a:r>
+          </a:p>
+        </p:txBody>
+      </p:sp>
+      <p:sp>
+        <p:nvSpPr>
+          <p:cNvPr id="13" name="Rectangle 12"/>
           <p:cNvSpPr/>
           <p:nvPr/>
         </p:nvSpPr>
         <p:spPr>
           <a:xfrm>
-            <a:off x="9118854" y="1901952"/>
-            <a:ext cx="2612898" cy="1554480"/>
+            <a:off x="9118854" y="1956816"/>
+            <a:ext cx="2612898" cy="1463040"/>
           </a:xfrm>
           <a:prstGeom prst="rect">
             <a:avLst/>
@@ -16204,14 +16174,14 @@
       </p:sp>
       <p:sp>
         <p:nvSpPr>
-          <p:cNvPr id="15" name="TextBox 14"/>
+          <p:cNvPr id="14" name="TextBox 13"/>
           <p:cNvSpPr txBox="1"/>
           <p:nvPr/>
         </p:nvSpPr>
         <p:spPr>
           <a:xfrm>
-            <a:off x="9393174" y="2103120"/>
-            <a:ext cx="2064257" cy="731520"/>
+            <a:off x="9393174" y="2212848"/>
+            <a:ext cx="2064257" cy="914400"/>
           </a:xfrm>
           <a:prstGeom prst="rect">
             <a:avLst/>
@@ -16233,7 +16203,7 @@
               </a:spcAft>
             </a:pPr>
             <a:r>
-              <a:rPr sz="4000" b="1" i="0">
+              <a:rPr sz="3800" b="1" i="0">
                 <a:solidFill>
                   <a:srgbClr val="D5FB00"/>
                 </a:solidFill>
@@ -16248,20 +16218,62 @@
                 <a:spcPct val="114000"/>
               </a:lnSpc>
               <a:spcBef>
-                <a:spcPts val="800"/>
+                <a:spcPts val="1000"/>
               </a:spcBef>
               <a:spcAft>
                 <a:spcPts val="0"/>
               </a:spcAft>
             </a:pPr>
             <a:r>
-              <a:rPr sz="1200" b="0" i="0">
+              <a:rPr sz="1250" b="0" i="0">
                 <a:solidFill>
                   <a:srgbClr val="C6CDD1"/>
                 </a:solidFill>
                 <a:latin typeface="Segoe UI"/>
               </a:rPr>
-              <a:t>of my time on the integration project</a:t>
+              <a:t>on the integration project</a:t>
+            </a:r>
+          </a:p>
+        </p:txBody>
+      </p:sp>
+      <p:sp>
+        <p:nvSpPr>
+          <p:cNvPr id="15" name="TextBox 14"/>
+          <p:cNvSpPr txBox="1"/>
+          <p:nvPr/>
+        </p:nvSpPr>
+        <p:spPr>
+          <a:xfrm>
+            <a:off x="457200" y="3858768"/>
+            <a:ext cx="11274552" cy="274320"/>
+          </a:xfrm>
+          <a:prstGeom prst="rect">
+            <a:avLst/>
+          </a:prstGeom>
+          <a:noFill/>
+        </p:spPr>
+        <p:txBody>
+          <a:bodyPr wrap="square" lIns="0" rIns="0" tIns="0" bIns="0" anchor="t">
+            <a:spAutoFit/>
+          </a:bodyPr>
+          <a:lstStyle/>
+          <a:p>
+            <a:pPr algn="l">
+              <a:spcBef>
+                <a:spcPts val="0"/>
+              </a:spcBef>
+              <a:spcAft>
+                <a:spcPts val="0"/>
+              </a:spcAft>
+            </a:pPr>
+            <a:r>
+              <a:rPr sz="1000" b="1" i="0">
+                <a:solidFill>
+                  <a:srgbClr val="D5FB00"/>
+                </a:solidFill>
+                <a:latin typeface="Segoe UI"/>
+              </a:rPr>
+              <a:t>WHAT CHANGED IN EIGHT WEEKS</a:t>
             </a:r>
           </a:p>
         </p:txBody>
@@ -16274,8 +16286,8 @@
         </p:nvSpPr>
         <p:spPr>
           <a:xfrm>
-            <a:off x="457200" y="3877056"/>
-            <a:ext cx="11274552" cy="274320"/>
+            <a:off x="457200" y="4297680"/>
+            <a:ext cx="2468880" cy="274320"/>
           </a:xfrm>
           <a:prstGeom prst="rect">
             <a:avLst/>
@@ -16297,13 +16309,13 @@
               </a:spcAft>
             </a:pPr>
             <a:r>
-              <a:rPr sz="1000" b="1" i="0">
-                <a:solidFill>
-                  <a:srgbClr val="D5FB00"/>
+              <a:rPr sz="1350" b="1" i="0">
+                <a:solidFill>
+                  <a:srgbClr val="FFFFFF"/>
                 </a:solidFill>
                 <a:latin typeface="Segoe UI"/>
               </a:rPr>
-              <a:t>WHAT CHANGED IN EIGHT WEEKS</a:t>
+              <a:t>Consumable change</a:t>
             </a:r>
           </a:p>
         </p:txBody>
@@ -16316,8 +16328,8 @@
         </p:nvSpPr>
         <p:spPr>
           <a:xfrm>
-            <a:off x="457200" y="4297680"/>
-            <a:ext cx="2468880" cy="274320"/>
+            <a:off x="3017520" y="4297680"/>
+            <a:ext cx="3657600" cy="274320"/>
           </a:xfrm>
           <a:prstGeom prst="rect">
             <a:avLst/>
@@ -16339,49 +16351,7 @@
               </a:spcAft>
             </a:pPr>
             <a:r>
-              <a:rPr sz="1300" b="1" i="0">
-                <a:solidFill>
-                  <a:srgbClr val="FFFFFF"/>
-                </a:solidFill>
-                <a:latin typeface="Segoe UI"/>
-              </a:rPr>
-              <a:t>Consumable change</a:t>
-            </a:r>
-          </a:p>
-        </p:txBody>
-      </p:sp>
-      <p:sp>
-        <p:nvSpPr>
-          <p:cNvPr id="18" name="TextBox 17"/>
-          <p:cNvSpPr txBox="1"/>
-          <p:nvPr/>
-        </p:nvSpPr>
-        <p:spPr>
-          <a:xfrm>
-            <a:off x="3017520" y="4297680"/>
-            <a:ext cx="3657600" cy="274320"/>
-          </a:xfrm>
-          <a:prstGeom prst="rect">
-            <a:avLst/>
-          </a:prstGeom>
-          <a:noFill/>
-        </p:spPr>
-        <p:txBody>
-          <a:bodyPr wrap="square" lIns="0" rIns="0" tIns="0" bIns="0" anchor="t">
-            <a:spAutoFit/>
-          </a:bodyPr>
-          <a:lstStyle/>
-          <a:p>
-            <a:pPr algn="l">
-              <a:spcBef>
-                <a:spcPts val="0"/>
-              </a:spcBef>
-              <a:spcAft>
-                <a:spcPts val="0"/>
-              </a:spcAft>
-            </a:pPr>
-            <a:r>
-              <a:rPr sz="1250" b="0" i="0">
+              <a:rPr sz="1300" b="0" i="0">
                 <a:solidFill>
                   <a:srgbClr val="9FAFBA"/>
                 </a:solidFill>
@@ -16394,13 +16364,13 @@
       </p:sp>
       <p:sp>
         <p:nvSpPr>
-          <p:cNvPr id="19" name="Chevron 18"/>
+          <p:cNvPr id="18" name="Chevron 17"/>
           <p:cNvSpPr/>
           <p:nvPr/>
         </p:nvSpPr>
         <p:spPr>
           <a:xfrm>
-            <a:off x="6858000" y="4315968"/>
+            <a:off x="6858000" y="4325112"/>
             <a:ext cx="146304" cy="146304"/>
           </a:xfrm>
           <a:prstGeom prst="chevron">
@@ -16424,13 +16394,13 @@
       </p:sp>
       <p:sp>
         <p:nvSpPr>
-          <p:cNvPr id="20" name="Chevron 19"/>
+          <p:cNvPr id="19" name="Chevron 18"/>
           <p:cNvSpPr/>
           <p:nvPr/>
         </p:nvSpPr>
         <p:spPr>
           <a:xfrm>
-            <a:off x="6976872" y="4315968"/>
+            <a:off x="6976872" y="4325112"/>
             <a:ext cx="146304" cy="146304"/>
           </a:xfrm>
           <a:prstGeom prst="chevron">
@@ -16454,7 +16424,7 @@
       </p:sp>
       <p:sp>
         <p:nvSpPr>
-          <p:cNvPr id="21" name="TextBox 20"/>
+          <p:cNvPr id="20" name="TextBox 19"/>
           <p:cNvSpPr txBox="1"/>
           <p:nvPr/>
         </p:nvSpPr>
@@ -16483,7 +16453,7 @@
               </a:spcAft>
             </a:pPr>
             <a:r>
-              <a:rPr sz="1250" b="1" i="0">
+              <a:rPr sz="1300" b="1" i="0">
                 <a:solidFill>
                   <a:srgbClr val="D5FB00"/>
                 </a:solidFill>
@@ -16496,13 +16466,13 @@
       </p:sp>
       <p:sp>
         <p:nvSpPr>
-          <p:cNvPr id="22" name="Rectangle 21"/>
+          <p:cNvPr id="21" name="Rectangle 20"/>
           <p:cNvSpPr/>
           <p:nvPr/>
         </p:nvSpPr>
         <p:spPr>
           <a:xfrm>
-            <a:off x="457200" y="4754880"/>
+            <a:off x="457200" y="4773168"/>
             <a:ext cx="11274552" cy="7315"/>
           </a:xfrm>
           <a:prstGeom prst="rect">
@@ -16526,14 +16496,56 @@
       </p:sp>
       <p:sp>
         <p:nvSpPr>
+          <p:cNvPr id="22" name="TextBox 21"/>
+          <p:cNvSpPr txBox="1"/>
+          <p:nvPr/>
+        </p:nvSpPr>
+        <p:spPr>
+          <a:xfrm>
+            <a:off x="457200" y="5084064"/>
+            <a:ext cx="2468880" cy="274320"/>
+          </a:xfrm>
+          <a:prstGeom prst="rect">
+            <a:avLst/>
+          </a:prstGeom>
+          <a:noFill/>
+        </p:spPr>
+        <p:txBody>
+          <a:bodyPr wrap="square" lIns="0" rIns="0" tIns="0" bIns="0" anchor="t">
+            <a:spAutoFit/>
+          </a:bodyPr>
+          <a:lstStyle/>
+          <a:p>
+            <a:pPr algn="l">
+              <a:spcBef>
+                <a:spcPts val="0"/>
+              </a:spcBef>
+              <a:spcAft>
+                <a:spcPts val="0"/>
+              </a:spcAft>
+            </a:pPr>
+            <a:r>
+              <a:rPr sz="1350" b="1" i="0">
+                <a:solidFill>
+                  <a:srgbClr val="FFFFFF"/>
+                </a:solidFill>
+                <a:latin typeface="Segoe UI"/>
+              </a:rPr>
+              <a:t>Welding symbols</a:t>
+            </a:r>
+          </a:p>
+        </p:txBody>
+      </p:sp>
+      <p:sp>
+        <p:nvSpPr>
           <p:cNvPr id="23" name="TextBox 22"/>
           <p:cNvSpPr txBox="1"/>
           <p:nvPr/>
         </p:nvSpPr>
         <p:spPr>
           <a:xfrm>
-            <a:off x="457200" y="5065776"/>
-            <a:ext cx="2468880" cy="274320"/>
+            <a:off x="3017520" y="5084064"/>
+            <a:ext cx="3657600" cy="274320"/>
           </a:xfrm>
           <a:prstGeom prst="rect">
             <a:avLst/>
@@ -16555,49 +16567,7 @@
               </a:spcAft>
             </a:pPr>
             <a:r>
-              <a:rPr sz="1300" b="1" i="0">
-                <a:solidFill>
-                  <a:srgbClr val="FFFFFF"/>
-                </a:solidFill>
-                <a:latin typeface="Segoe UI"/>
-              </a:rPr>
-              <a:t>Welding symbols</a:t>
-            </a:r>
-          </a:p>
-        </p:txBody>
-      </p:sp>
-      <p:sp>
-        <p:nvSpPr>
-          <p:cNvPr id="24" name="TextBox 23"/>
-          <p:cNvSpPr txBox="1"/>
-          <p:nvPr/>
-        </p:nvSpPr>
-        <p:spPr>
-          <a:xfrm>
-            <a:off x="3017520" y="5065776"/>
-            <a:ext cx="3657600" cy="274320"/>
-          </a:xfrm>
-          <a:prstGeom prst="rect">
-            <a:avLst/>
-          </a:prstGeom>
-          <a:noFill/>
-        </p:spPr>
-        <p:txBody>
-          <a:bodyPr wrap="square" lIns="0" rIns="0" tIns="0" bIns="0" anchor="t">
-            <a:spAutoFit/>
-          </a:bodyPr>
-          <a:lstStyle/>
-          <a:p>
-            <a:pPr algn="l">
-              <a:spcBef>
-                <a:spcPts val="0"/>
-              </a:spcBef>
-              <a:spcAft>
-                <a:spcPts val="0"/>
-              </a:spcAft>
-            </a:pPr>
-            <a:r>
-              <a:rPr sz="1250" b="0" i="0">
+              <a:rPr sz="1300" b="0" i="0">
                 <a:solidFill>
                   <a:srgbClr val="9FAFBA"/>
                 </a:solidFill>
@@ -16610,13 +16580,13 @@
       </p:sp>
       <p:sp>
         <p:nvSpPr>
-          <p:cNvPr id="25" name="Chevron 24"/>
+          <p:cNvPr id="24" name="Chevron 23"/>
           <p:cNvSpPr/>
           <p:nvPr/>
         </p:nvSpPr>
         <p:spPr>
           <a:xfrm>
-            <a:off x="6858000" y="5084064"/>
+            <a:off x="6858000" y="5111496"/>
             <a:ext cx="146304" cy="146304"/>
           </a:xfrm>
           <a:prstGeom prst="chevron">
@@ -16640,13 +16610,13 @@
       </p:sp>
       <p:sp>
         <p:nvSpPr>
-          <p:cNvPr id="26" name="Chevron 25"/>
+          <p:cNvPr id="25" name="Chevron 24"/>
           <p:cNvSpPr/>
           <p:nvPr/>
         </p:nvSpPr>
         <p:spPr>
           <a:xfrm>
-            <a:off x="6976872" y="5084064"/>
+            <a:off x="6976872" y="5111496"/>
             <a:ext cx="146304" cy="146304"/>
           </a:xfrm>
           <a:prstGeom prst="chevron">
@@ -16670,13 +16640,13 @@
       </p:sp>
       <p:sp>
         <p:nvSpPr>
-          <p:cNvPr id="27" name="TextBox 26"/>
+          <p:cNvPr id="26" name="TextBox 25"/>
           <p:cNvSpPr txBox="1"/>
           <p:nvPr/>
         </p:nvSpPr>
         <p:spPr>
           <a:xfrm>
-            <a:off x="7479792" y="5065776"/>
+            <a:off x="7479792" y="5084064"/>
             <a:ext cx="4251960" cy="274320"/>
           </a:xfrm>
           <a:prstGeom prst="rect">
@@ -16699,7 +16669,7 @@
               </a:spcAft>
             </a:pPr>
             <a:r>
-              <a:rPr sz="1250" b="1" i="0">
+              <a:rPr sz="1300" b="1" i="0">
                 <a:solidFill>
                   <a:srgbClr val="D5FB00"/>
                 </a:solidFill>
@@ -16712,13 +16682,13 @@
       </p:sp>
       <p:sp>
         <p:nvSpPr>
-          <p:cNvPr id="28" name="Rectangle 27"/>
+          <p:cNvPr id="27" name="Rectangle 26"/>
           <p:cNvSpPr/>
           <p:nvPr/>
         </p:nvSpPr>
         <p:spPr>
           <a:xfrm>
-            <a:off x="457200" y="5522976"/>
+            <a:off x="457200" y="5559552"/>
             <a:ext cx="11274552" cy="7315"/>
           </a:xfrm>
           <a:prstGeom prst="rect">
@@ -16742,14 +16712,56 @@
       </p:sp>
       <p:sp>
         <p:nvSpPr>
+          <p:cNvPr id="28" name="TextBox 27"/>
+          <p:cNvSpPr txBox="1"/>
+          <p:nvPr/>
+        </p:nvSpPr>
+        <p:spPr>
+          <a:xfrm>
+            <a:off x="457200" y="5870448"/>
+            <a:ext cx="2468880" cy="274320"/>
+          </a:xfrm>
+          <a:prstGeom prst="rect">
+            <a:avLst/>
+          </a:prstGeom>
+          <a:noFill/>
+        </p:spPr>
+        <p:txBody>
+          <a:bodyPr wrap="square" lIns="0" rIns="0" tIns="0" bIns="0" anchor="t">
+            <a:spAutoFit/>
+          </a:bodyPr>
+          <a:lstStyle/>
+          <a:p>
+            <a:pPr algn="l">
+              <a:spcBef>
+                <a:spcPts val="0"/>
+              </a:spcBef>
+              <a:spcAft>
+                <a:spcPts val="0"/>
+              </a:spcAft>
+            </a:pPr>
+            <a:r>
+              <a:rPr sz="1350" b="1" i="0">
+                <a:solidFill>
+                  <a:srgbClr val="FFFFFF"/>
+                </a:solidFill>
+                <a:latin typeface="Segoe UI"/>
+              </a:rPr>
+              <a:t>ANDON</a:t>
+            </a:r>
+          </a:p>
+        </p:txBody>
+      </p:sp>
+      <p:sp>
+        <p:nvSpPr>
           <p:cNvPr id="29" name="TextBox 28"/>
           <p:cNvSpPr txBox="1"/>
           <p:nvPr/>
         </p:nvSpPr>
         <p:spPr>
           <a:xfrm>
-            <a:off x="457200" y="5833872"/>
-            <a:ext cx="2468880" cy="274320"/>
+            <a:off x="3017520" y="5870448"/>
+            <a:ext cx="3657600" cy="274320"/>
           </a:xfrm>
           <a:prstGeom prst="rect">
             <a:avLst/>
@@ -16771,49 +16783,7 @@
               </a:spcAft>
             </a:pPr>
             <a:r>
-              <a:rPr sz="1300" b="1" i="0">
-                <a:solidFill>
-                  <a:srgbClr val="FFFFFF"/>
-                </a:solidFill>
-                <a:latin typeface="Segoe UI"/>
-              </a:rPr>
-              <a:t>ANDON</a:t>
-            </a:r>
-          </a:p>
-        </p:txBody>
-      </p:sp>
-      <p:sp>
-        <p:nvSpPr>
-          <p:cNvPr id="30" name="TextBox 29"/>
-          <p:cNvSpPr txBox="1"/>
-          <p:nvPr/>
-        </p:nvSpPr>
-        <p:spPr>
-          <a:xfrm>
-            <a:off x="3017520" y="5833872"/>
-            <a:ext cx="3657600" cy="274320"/>
-          </a:xfrm>
-          <a:prstGeom prst="rect">
-            <a:avLst/>
-          </a:prstGeom>
-          <a:noFill/>
-        </p:spPr>
-        <p:txBody>
-          <a:bodyPr wrap="square" lIns="0" rIns="0" tIns="0" bIns="0" anchor="t">
-            <a:spAutoFit/>
-          </a:bodyPr>
-          <a:lstStyle/>
-          <a:p>
-            <a:pPr algn="l">
-              <a:spcBef>
-                <a:spcPts val="0"/>
-              </a:spcBef>
-              <a:spcAft>
-                <a:spcPts val="0"/>
-              </a:spcAft>
-            </a:pPr>
-            <a:r>
-              <a:rPr sz="1250" b="0" i="0">
+              <a:rPr sz="1300" b="0" i="0">
                 <a:solidFill>
                   <a:srgbClr val="9FAFBA"/>
                 </a:solidFill>
@@ -16826,13 +16796,13 @@
       </p:sp>
       <p:sp>
         <p:nvSpPr>
-          <p:cNvPr id="31" name="Chevron 30"/>
+          <p:cNvPr id="30" name="Chevron 29"/>
           <p:cNvSpPr/>
           <p:nvPr/>
         </p:nvSpPr>
         <p:spPr>
           <a:xfrm>
-            <a:off x="6858000" y="5852159"/>
+            <a:off x="6858000" y="5897880"/>
             <a:ext cx="146304" cy="146304"/>
           </a:xfrm>
           <a:prstGeom prst="chevron">
@@ -16856,13 +16826,13 @@
       </p:sp>
       <p:sp>
         <p:nvSpPr>
-          <p:cNvPr id="32" name="Chevron 31"/>
+          <p:cNvPr id="31" name="Chevron 30"/>
           <p:cNvSpPr/>
           <p:nvPr/>
         </p:nvSpPr>
         <p:spPr>
           <a:xfrm>
-            <a:off x="6976872" y="5852159"/>
+            <a:off x="6976872" y="5897880"/>
             <a:ext cx="146304" cy="146304"/>
           </a:xfrm>
           <a:prstGeom prst="chevron">
@@ -16886,13 +16856,13 @@
       </p:sp>
       <p:sp>
         <p:nvSpPr>
-          <p:cNvPr id="33" name="TextBox 32"/>
+          <p:cNvPr id="32" name="TextBox 31"/>
           <p:cNvSpPr txBox="1"/>
           <p:nvPr/>
         </p:nvSpPr>
         <p:spPr>
           <a:xfrm>
-            <a:off x="7479792" y="5833872"/>
+            <a:off x="7479792" y="5870448"/>
             <a:ext cx="4251960" cy="274320"/>
           </a:xfrm>
           <a:prstGeom prst="rect">
@@ -16915,7 +16885,7 @@
               </a:spcAft>
             </a:pPr>
             <a:r>
-              <a:rPr sz="1250" b="1" i="0">
+              <a:rPr sz="1300" b="1" i="0">
                 <a:solidFill>
                   <a:srgbClr val="D5FB00"/>
                 </a:solidFill>
@@ -16931,6 +16901,18 @@
   <p:clrMapOvr>
     <a:masterClrMapping/>
   </p:clrMapOvr>
+  <mc:AlternateContent xmlns:mc="http://schemas.openxmlformats.org/markup-compatibility/2006">
+    <mc:Choice xmlns:p159="http://schemas.microsoft.com/office/powerpoint/2015/09/main" Requires="p159">
+      <p:transition xmlns:p14="http://schemas.microsoft.com/office/powerpoint/2010/main" spd="slow" p14:dur="1250">
+        <p159:morph option="byObject"/>
+      </p:transition>
+    </mc:Choice>
+    <mc:Fallback>
+      <p:transition xmlns:p14="http://schemas.microsoft.com/office/powerpoint/2010/main" spd="slow">
+        <p:fade/>
+      </p:transition>
+    </mc:Fallback>
+  </mc:AlternateContent>
 </p:sld>
 </file>
 
@@ -17142,7 +17124,7 @@
                 </a:solidFill>
                 <a:latin typeface="Segoe UI"/>
               </a:rPr>
-              <a:t>Four commitments, no budget — only calendar</a:t>
+              <a:t>Four commitments, and none of them cost money</a:t>
             </a:r>
           </a:p>
         </p:txBody>
@@ -17155,8 +17137,8 @@
         </p:nvSpPr>
         <p:spPr>
           <a:xfrm>
-            <a:off x="457200" y="1481328"/>
-            <a:ext cx="10607040" cy="310896"/>
+            <a:off x="1078992" y="2103120"/>
+            <a:ext cx="4754880" cy="237744"/>
           </a:xfrm>
           <a:prstGeom prst="rect">
             <a:avLst/>
@@ -17178,13 +17160,13 @@
               </a:spcAft>
             </a:pPr>
             <a:r>
-              <a:rPr sz="1300" b="0" i="0">
-                <a:solidFill>
-                  <a:srgbClr val="6E7C87"/>
+              <a:rPr sz="900" b="1" i="0">
+                <a:solidFill>
+                  <a:srgbClr val="0033A0"/>
                 </a:solidFill>
                 <a:latin typeface="Segoe UI"/>
               </a:rPr>
-              <a:t>Each one produces a document you can audit</a:t>
+              <a:t>COMMITMENT</a:t>
             </a:r>
           </a:p>
         </p:txBody>
@@ -17197,8 +17179,8 @@
         </p:nvSpPr>
         <p:spPr>
           <a:xfrm>
-            <a:off x="1078992" y="2103120"/>
-            <a:ext cx="3657600" cy="237744"/>
+            <a:off x="6217920" y="2103120"/>
+            <a:ext cx="3291840" cy="237744"/>
           </a:xfrm>
           <a:prstGeom prst="rect">
             <a:avLst/>
@@ -17226,7 +17208,7 @@
                 </a:solidFill>
                 <a:latin typeface="Segoe UI"/>
               </a:rPr>
-              <a:t>COMMITMENT</a:t>
+              <a:t>WHAT I NEED</a:t>
             </a:r>
           </a:p>
         </p:txBody>
@@ -17239,8 +17221,8 @@
         </p:nvSpPr>
         <p:spPr>
           <a:xfrm>
-            <a:off x="4846320" y="2103120"/>
-            <a:ext cx="3108960" cy="237744"/>
+            <a:off x="9966960" y="2103120"/>
+            <a:ext cx="1737360" cy="237744"/>
           </a:xfrm>
           <a:prstGeom prst="rect">
             <a:avLst/>
@@ -17268,48 +17250,6 @@
                 </a:solidFill>
                 <a:latin typeface="Segoe UI"/>
               </a:rPr>
-              <a:t>WHAT IT UNLOCKS</a:t>
-            </a:r>
-          </a:p>
-        </p:txBody>
-      </p:sp>
-      <p:sp>
-        <p:nvSpPr>
-          <p:cNvPr id="10" name="TextBox 9"/>
-          <p:cNvSpPr txBox="1"/>
-          <p:nvPr/>
-        </p:nvSpPr>
-        <p:spPr>
-          <a:xfrm>
-            <a:off x="8138160" y="2103120"/>
-            <a:ext cx="1371600" cy="237744"/>
-          </a:xfrm>
-          <a:prstGeom prst="rect">
-            <a:avLst/>
-          </a:prstGeom>
-          <a:noFill/>
-        </p:spPr>
-        <p:txBody>
-          <a:bodyPr wrap="square" lIns="0" rIns="0" tIns="0" bIns="0" anchor="t">
-            <a:spAutoFit/>
-          </a:bodyPr>
-          <a:lstStyle/>
-          <a:p>
-            <a:pPr algn="l">
-              <a:spcBef>
-                <a:spcPts val="0"/>
-              </a:spcBef>
-              <a:spcAft>
-                <a:spcPts val="0"/>
-              </a:spcAft>
-            </a:pPr>
-            <a:r>
-              <a:rPr sz="900" b="1" i="0">
-                <a:solidFill>
-                  <a:srgbClr val="0033A0"/>
-                </a:solidFill>
-                <a:latin typeface="Segoe UI"/>
-              </a:rPr>
               <a:t>WHEN</a:t>
             </a:r>
           </a:p>
@@ -17317,56 +17257,14 @@
       </p:sp>
       <p:sp>
         <p:nvSpPr>
-          <p:cNvPr id="11" name="TextBox 10"/>
-          <p:cNvSpPr txBox="1"/>
-          <p:nvPr/>
-        </p:nvSpPr>
-        <p:spPr>
-          <a:xfrm>
-            <a:off x="9601200" y="2103120"/>
-            <a:ext cx="2194560" cy="237744"/>
-          </a:xfrm>
-          <a:prstGeom prst="rect">
-            <a:avLst/>
-          </a:prstGeom>
-          <a:noFill/>
-        </p:spPr>
-        <p:txBody>
-          <a:bodyPr wrap="square" lIns="0" rIns="0" tIns="0" bIns="0" anchor="t">
-            <a:spAutoFit/>
-          </a:bodyPr>
-          <a:lstStyle/>
-          <a:p>
-            <a:pPr algn="l">
-              <a:spcBef>
-                <a:spcPts val="0"/>
-              </a:spcBef>
-              <a:spcAft>
-                <a:spcPts val="0"/>
-              </a:spcAft>
-            </a:pPr>
-            <a:r>
-              <a:rPr sz="900" b="1" i="0">
-                <a:solidFill>
-                  <a:srgbClr val="0033A0"/>
-                </a:solidFill>
-                <a:latin typeface="Segoe UI"/>
-              </a:rPr>
-              <a:t>WHAT I NEED</a:t>
-            </a:r>
-          </a:p>
-        </p:txBody>
-      </p:sp>
-      <p:sp>
-        <p:nvSpPr>
-          <p:cNvPr id="12" name="Rectangle 11"/>
+          <p:cNvPr id="10" name="Rectangle 9"/>
           <p:cNvSpPr/>
           <p:nvPr/>
         </p:nvSpPr>
         <p:spPr>
           <a:xfrm>
-            <a:off x="457200" y="2368296"/>
-            <a:ext cx="11274552" cy="859536"/>
+            <a:off x="457200" y="2331720"/>
+            <a:ext cx="11274552" cy="896112"/>
           </a:xfrm>
           <a:prstGeom prst="rect">
             <a:avLst/>
@@ -17389,7 +17287,7 @@
       </p:sp>
       <p:sp>
         <p:nvSpPr>
-          <p:cNvPr id="13" name="Oval 12"/>
+          <p:cNvPr id="11" name="Oval 10"/>
           <p:cNvSpPr/>
           <p:nvPr/>
         </p:nvSpPr>
@@ -17435,14 +17333,14 @@
       </p:sp>
       <p:sp>
         <p:nvSpPr>
-          <p:cNvPr id="14" name="TextBox 13"/>
+          <p:cNvPr id="12" name="TextBox 11"/>
           <p:cNvSpPr txBox="1"/>
           <p:nvPr/>
         </p:nvSpPr>
         <p:spPr>
           <a:xfrm>
-            <a:off x="1078992" y="2560320"/>
-            <a:ext cx="3611880" cy="566928"/>
+            <a:off x="1078992" y="2450592"/>
+            <a:ext cx="4754880" cy="731520"/>
           </a:xfrm>
           <a:prstGeom prst="rect">
             <a:avLst/>
@@ -17450,7 +17348,7 @@
           <a:noFill/>
         </p:spPr>
         <p:txBody>
-          <a:bodyPr wrap="square" lIns="0" rIns="0" tIns="0" bIns="0" anchor="ctr">
+          <a:bodyPr wrap="square" lIns="0" rIns="0" tIns="0" bIns="0" anchor="t">
             <a:spAutoFit/>
           </a:bodyPr>
           <a:lstStyle/>
@@ -17467,27 +17365,46 @@
               </a:spcAft>
             </a:pPr>
             <a:r>
-              <a:rPr sz="1300" b="1" i="0">
+              <a:rPr sz="1400" b="1" i="0">
                 <a:solidFill>
                   <a:srgbClr val="051C2C"/>
                 </a:solidFill>
                 <a:latin typeface="Segoe UI"/>
               </a:rPr>
-              <a:t>Sit the Level I theory session and the written exam</a:t>
-            </a:r>
-          </a:p>
-        </p:txBody>
-      </p:sp>
-      <p:sp>
-        <p:nvSpPr>
-          <p:cNvPr id="15" name="TextBox 14"/>
+              <a:t>Level I theory session and written exam</a:t>
+            </a:r>
+          </a:p>
+          <a:p>
+            <a:pPr>
+              <a:spcBef>
+                <a:spcPts val="400"/>
+              </a:spcBef>
+              <a:spcAft>
+                <a:spcPts val="0"/>
+              </a:spcAft>
+            </a:pPr>
+            <a:r>
+              <a:rPr sz="1100" b="0" i="0">
+                <a:solidFill>
+                  <a:srgbClr val="0033A0"/>
+                </a:solidFill>
+                <a:latin typeface="Segoe UI"/>
+              </a:rPr>
+              <a:t>Validates Level I</a:t>
+            </a:r>
+          </a:p>
+        </p:txBody>
+      </p:sp>
+      <p:sp>
+        <p:nvSpPr>
+          <p:cNvPr id="13" name="TextBox 12"/>
           <p:cNvSpPr txBox="1"/>
           <p:nvPr/>
         </p:nvSpPr>
         <p:spPr>
           <a:xfrm>
-            <a:off x="4846320" y="2560320"/>
-            <a:ext cx="3108960" cy="566928"/>
+            <a:off x="6217920" y="2578608"/>
+            <a:ext cx="3291840" cy="457200"/>
           </a:xfrm>
           <a:prstGeom prst="rect">
             <a:avLst/>
@@ -17512,27 +17429,27 @@
               </a:spcAft>
             </a:pPr>
             <a:r>
-              <a:rPr sz="1250" b="0" i="0">
-                <a:solidFill>
-                  <a:srgbClr val="051C2C"/>
+              <a:rPr sz="1300" b="0" i="0">
+                <a:solidFill>
+                  <a:srgbClr val="6E7C87"/>
                 </a:solidFill>
                 <a:latin typeface="Segoe UI"/>
               </a:rPr>
-              <a:t>Level I formally validated</a:t>
-            </a:r>
-          </a:p>
-        </p:txBody>
-      </p:sp>
-      <p:sp>
-        <p:nvSpPr>
-          <p:cNvPr id="16" name="TextBox 15"/>
+              <a:t>Two half-days on the calendar</a:t>
+            </a:r>
+          </a:p>
+        </p:txBody>
+      </p:sp>
+      <p:sp>
+        <p:nvSpPr>
+          <p:cNvPr id="14" name="TextBox 13"/>
           <p:cNvSpPr txBox="1"/>
           <p:nvPr/>
         </p:nvSpPr>
         <p:spPr>
           <a:xfrm>
-            <a:off x="8138160" y="2560320"/>
-            <a:ext cx="1371600" cy="566928"/>
+            <a:off x="9966960" y="2578608"/>
+            <a:ext cx="1737360" cy="457200"/>
           </a:xfrm>
           <a:prstGeom prst="rect">
             <a:avLst/>
@@ -17546,9 +17463,6 @@
           <a:lstStyle/>
           <a:p>
             <a:pPr algn="l">
-              <a:lnSpc>
-                <a:spcPct val="114000"/>
-              </a:lnSpc>
               <a:spcBef>
                 <a:spcPts val="0"/>
               </a:spcBef>
@@ -17557,7 +17471,7 @@
               </a:spcAft>
             </a:pPr>
             <a:r>
-              <a:rPr sz="1250" b="1" i="0">
+              <a:rPr sz="1300" b="1" i="0">
                 <a:solidFill>
                   <a:srgbClr val="0033A0"/>
                 </a:solidFill>
@@ -17570,58 +17484,13 @@
       </p:sp>
       <p:sp>
         <p:nvSpPr>
-          <p:cNvPr id="17" name="TextBox 16"/>
-          <p:cNvSpPr txBox="1"/>
-          <p:nvPr/>
-        </p:nvSpPr>
-        <p:spPr>
-          <a:xfrm>
-            <a:off x="9601200" y="2560320"/>
-            <a:ext cx="2194560" cy="566928"/>
-          </a:xfrm>
-          <a:prstGeom prst="rect">
-            <a:avLst/>
-          </a:prstGeom>
-          <a:noFill/>
-        </p:spPr>
-        <p:txBody>
-          <a:bodyPr wrap="square" lIns="0" rIns="0" tIns="0" bIns="0" anchor="ctr">
-            <a:spAutoFit/>
-          </a:bodyPr>
-          <a:lstStyle/>
-          <a:p>
-            <a:pPr algn="l">
-              <a:lnSpc>
-                <a:spcPct val="114000"/>
-              </a:lnSpc>
-              <a:spcBef>
-                <a:spcPts val="0"/>
-              </a:spcBef>
-              <a:spcAft>
-                <a:spcPts val="0"/>
-              </a:spcAft>
-            </a:pPr>
-            <a:r>
-              <a:rPr sz="1200" b="0" i="0">
-                <a:solidFill>
-                  <a:srgbClr val="6E7C87"/>
-                </a:solidFill>
-                <a:latin typeface="Segoe UI"/>
-              </a:rPr>
-              <a:t>Two half-days scheduled</a:t>
-            </a:r>
-          </a:p>
-        </p:txBody>
-      </p:sp>
-      <p:sp>
-        <p:nvSpPr>
-          <p:cNvPr id="18" name="Oval 17"/>
+          <p:cNvPr id="15" name="Oval 14"/>
           <p:cNvSpPr/>
           <p:nvPr/>
         </p:nvSpPr>
         <p:spPr>
           <a:xfrm>
-            <a:off x="566928" y="3465576"/>
+            <a:off x="566928" y="3474720"/>
             <a:ext cx="365760" cy="365760"/>
           </a:xfrm>
           <a:prstGeom prst="ellipse">
@@ -17661,14 +17530,14 @@
       </p:sp>
       <p:sp>
         <p:nvSpPr>
-          <p:cNvPr id="19" name="TextBox 18"/>
+          <p:cNvPr id="16" name="TextBox 15"/>
           <p:cNvSpPr txBox="1"/>
           <p:nvPr/>
         </p:nvSpPr>
         <p:spPr>
           <a:xfrm>
-            <a:off x="1078992" y="3465576"/>
-            <a:ext cx="3611880" cy="566928"/>
+            <a:off x="1078992" y="3364992"/>
+            <a:ext cx="4754880" cy="731520"/>
           </a:xfrm>
           <a:prstGeom prst="rect">
             <a:avLst/>
@@ -17676,7 +17545,7 @@
           <a:noFill/>
         </p:spPr>
         <p:txBody>
-          <a:bodyPr wrap="square" lIns="0" rIns="0" tIns="0" bIns="0" anchor="ctr">
+          <a:bodyPr wrap="square" lIns="0" rIns="0" tIns="0" bIns="0" anchor="t">
             <a:spAutoFit/>
           </a:bodyPr>
           <a:lstStyle/>
@@ -17693,27 +17562,46 @@
               </a:spcAft>
             </a:pPr>
             <a:r>
-              <a:rPr sz="1300" b="1" i="0">
+              <a:rPr sz="1400" b="1" i="0">
                 <a:solidFill>
                   <a:srgbClr val="051C2C"/>
                 </a:solidFill>
                 <a:latin typeface="Segoe UI"/>
               </a:rPr>
-              <a:t>Document 10 parameter validations against the WPS</a:t>
-            </a:r>
-          </a:p>
-        </p:txBody>
-      </p:sp>
-      <p:sp>
-        <p:nvSpPr>
-          <p:cNvPr id="20" name="TextBox 19"/>
+              <a:t>Document parameter validations vs. the WPS</a:t>
+            </a:r>
+          </a:p>
+          <a:p>
+            <a:pPr>
+              <a:spcBef>
+                <a:spcPts val="400"/>
+              </a:spcBef>
+              <a:spcAft>
+                <a:spcPts val="0"/>
+              </a:spcAft>
+            </a:pPr>
+            <a:r>
+              <a:rPr sz="1100" b="0" i="0">
+                <a:solidFill>
+                  <a:srgbClr val="0033A0"/>
+                </a:solidFill>
+                <a:latin typeface="Segoe UI"/>
+              </a:rPr>
+              <a:t>Closes Level L</a:t>
+            </a:r>
+          </a:p>
+        </p:txBody>
+      </p:sp>
+      <p:sp>
+        <p:nvSpPr>
+          <p:cNvPr id="17" name="TextBox 16"/>
           <p:cNvSpPr txBox="1"/>
           <p:nvPr/>
         </p:nvSpPr>
         <p:spPr>
           <a:xfrm>
-            <a:off x="4846320" y="3465576"/>
-            <a:ext cx="3108960" cy="566928"/>
+            <a:off x="6217920" y="3493008"/>
+            <a:ext cx="3291840" cy="457200"/>
           </a:xfrm>
           <a:prstGeom prst="rect">
             <a:avLst/>
@@ -17738,27 +17626,27 @@
               </a:spcAft>
             </a:pPr>
             <a:r>
-              <a:rPr sz="1250" b="0" i="0">
-                <a:solidFill>
-                  <a:srgbClr val="051C2C"/>
+              <a:rPr sz="1300" b="0" i="0">
+                <a:solidFill>
+                  <a:srgbClr val="6E7C87"/>
                 </a:solidFill>
                 <a:latin typeface="Segoe UI"/>
               </a:rPr>
-              <a:t>Closes Level L</a:t>
-            </a:r>
-          </a:p>
-        </p:txBody>
-      </p:sp>
-      <p:sp>
-        <p:nvSpPr>
-          <p:cNvPr id="21" name="TextBox 20"/>
+              <a:t>Access to the parameter sheets</a:t>
+            </a:r>
+          </a:p>
+        </p:txBody>
+      </p:sp>
+      <p:sp>
+        <p:nvSpPr>
+          <p:cNvPr id="18" name="TextBox 17"/>
           <p:cNvSpPr txBox="1"/>
           <p:nvPr/>
         </p:nvSpPr>
         <p:spPr>
           <a:xfrm>
-            <a:off x="8138160" y="3465576"/>
-            <a:ext cx="1371600" cy="566928"/>
+            <a:off x="9966960" y="3493008"/>
+            <a:ext cx="1737360" cy="457200"/>
           </a:xfrm>
           <a:prstGeom prst="rect">
             <a:avLst/>
@@ -17772,9 +17660,6 @@
           <a:lstStyle/>
           <a:p>
             <a:pPr algn="l">
-              <a:lnSpc>
-                <a:spcPct val="114000"/>
-              </a:lnSpc>
               <a:spcBef>
                 <a:spcPts val="0"/>
               </a:spcBef>
@@ -17783,7 +17668,7 @@
               </a:spcAft>
             </a:pPr>
             <a:r>
-              <a:rPr sz="1250" b="1" i="0">
+              <a:rPr sz="1300" b="1" i="0">
                 <a:solidFill>
                   <a:srgbClr val="0033A0"/>
                 </a:solidFill>
@@ -17796,59 +17681,14 @@
       </p:sp>
       <p:sp>
         <p:nvSpPr>
-          <p:cNvPr id="22" name="TextBox 21"/>
-          <p:cNvSpPr txBox="1"/>
-          <p:nvPr/>
-        </p:nvSpPr>
-        <p:spPr>
-          <a:xfrm>
-            <a:off x="9601200" y="3465576"/>
-            <a:ext cx="2194560" cy="566928"/>
-          </a:xfrm>
-          <a:prstGeom prst="rect">
-            <a:avLst/>
-          </a:prstGeom>
-          <a:noFill/>
-        </p:spPr>
-        <p:txBody>
-          <a:bodyPr wrap="square" lIns="0" rIns="0" tIns="0" bIns="0" anchor="ctr">
-            <a:spAutoFit/>
-          </a:bodyPr>
-          <a:lstStyle/>
-          <a:p>
-            <a:pPr algn="l">
-              <a:lnSpc>
-                <a:spcPct val="114000"/>
-              </a:lnSpc>
-              <a:spcBef>
-                <a:spcPts val="0"/>
-              </a:spcBef>
-              <a:spcAft>
-                <a:spcPts val="0"/>
-              </a:spcAft>
-            </a:pPr>
-            <a:r>
-              <a:rPr sz="1200" b="0" i="0">
-                <a:solidFill>
-                  <a:srgbClr val="6E7C87"/>
-                </a:solidFill>
-                <a:latin typeface="Segoe UI"/>
-              </a:rPr>
-              <a:t>Access to parameter sheets</a:t>
-            </a:r>
-          </a:p>
-        </p:txBody>
-      </p:sp>
-      <p:sp>
-        <p:nvSpPr>
-          <p:cNvPr id="23" name="Rectangle 22"/>
+          <p:cNvPr id="19" name="Rectangle 18"/>
           <p:cNvSpPr/>
           <p:nvPr/>
         </p:nvSpPr>
         <p:spPr>
           <a:xfrm>
-            <a:off x="457200" y="4178808"/>
-            <a:ext cx="11274552" cy="859536"/>
+            <a:off x="457200" y="4160520"/>
+            <a:ext cx="11274552" cy="896112"/>
           </a:xfrm>
           <a:prstGeom prst="rect">
             <a:avLst/>
@@ -17871,13 +17711,13 @@
       </p:sp>
       <p:sp>
         <p:nvSpPr>
-          <p:cNvPr id="24" name="Oval 23"/>
+          <p:cNvPr id="20" name="Oval 19"/>
           <p:cNvSpPr/>
           <p:nvPr/>
         </p:nvSpPr>
         <p:spPr>
           <a:xfrm>
-            <a:off x="566928" y="4370832"/>
+            <a:off x="566928" y="4389120"/>
             <a:ext cx="365760" cy="365760"/>
           </a:xfrm>
           <a:prstGeom prst="ellipse">
@@ -17917,14 +17757,14 @@
       </p:sp>
       <p:sp>
         <p:nvSpPr>
-          <p:cNvPr id="25" name="TextBox 24"/>
+          <p:cNvPr id="21" name="TextBox 20"/>
           <p:cNvSpPr txBox="1"/>
           <p:nvPr/>
         </p:nvSpPr>
         <p:spPr>
           <a:xfrm>
-            <a:off x="1078992" y="4370832"/>
-            <a:ext cx="3611880" cy="566928"/>
+            <a:off x="1078992" y="4279392"/>
+            <a:ext cx="4754880" cy="731520"/>
           </a:xfrm>
           <a:prstGeom prst="rect">
             <a:avLst/>
@@ -17932,7 +17772,7 @@
           <a:noFill/>
         </p:spPr>
         <p:txBody>
-          <a:bodyPr wrap="square" lIns="0" rIns="0" tIns="0" bIns="0" anchor="ctr">
+          <a:bodyPr wrap="square" lIns="0" rIns="0" tIns="0" bIns="0" anchor="t">
             <a:spAutoFit/>
           </a:bodyPr>
           <a:lstStyle/>
@@ -17949,7 +17789,7 @@
               </a:spcAft>
             </a:pPr>
             <a:r>
-              <a:rPr sz="1300" b="1" i="0">
+              <a:rPr sz="1400" b="1" i="0">
                 <a:solidFill>
                   <a:srgbClr val="051C2C"/>
                 </a:solidFill>
@@ -17958,18 +17798,37 @@
               <a:t>Create one welding program in SKS, supervised</a:t>
             </a:r>
           </a:p>
-        </p:txBody>
-      </p:sp>
-      <p:sp>
-        <p:nvSpPr>
-          <p:cNvPr id="26" name="TextBox 25"/>
+          <a:p>
+            <a:pPr>
+              <a:spcBef>
+                <a:spcPts val="400"/>
+              </a:spcBef>
+              <a:spcAft>
+                <a:spcPts val="0"/>
+              </a:spcAft>
+            </a:pPr>
+            <a:r>
+              <a:rPr sz="1100" b="0" i="0">
+                <a:solidFill>
+                  <a:srgbClr val="0033A0"/>
+                </a:solidFill>
+                <a:latin typeface="Segoe UI"/>
+              </a:rPr>
+              <a:t>Opens Level U</a:t>
+            </a:r>
+          </a:p>
+        </p:txBody>
+      </p:sp>
+      <p:sp>
+        <p:nvSpPr>
+          <p:cNvPr id="22" name="TextBox 21"/>
           <p:cNvSpPr txBox="1"/>
           <p:nvPr/>
         </p:nvSpPr>
         <p:spPr>
           <a:xfrm>
-            <a:off x="4846320" y="4370832"/>
-            <a:ext cx="3108960" cy="566928"/>
+            <a:off x="6217920" y="4407407"/>
+            <a:ext cx="3291840" cy="457200"/>
           </a:xfrm>
           <a:prstGeom prst="rect">
             <a:avLst/>
@@ -17994,27 +17853,27 @@
               </a:spcAft>
             </a:pPr>
             <a:r>
-              <a:rPr sz="1250" b="0" i="0">
-                <a:solidFill>
-                  <a:srgbClr val="051C2C"/>
+              <a:rPr sz="1300" b="0" i="0">
+                <a:solidFill>
+                  <a:srgbClr val="6E7C87"/>
                 </a:solidFill>
                 <a:latin typeface="Segoe UI"/>
               </a:rPr>
-              <a:t>Opens Level U</a:t>
-            </a:r>
-          </a:p>
-        </p:txBody>
-      </p:sp>
-      <p:sp>
-        <p:nvSpPr>
-          <p:cNvPr id="27" name="TextBox 26"/>
+              <a:t>Cell time and supervision</a:t>
+            </a:r>
+          </a:p>
+        </p:txBody>
+      </p:sp>
+      <p:sp>
+        <p:nvSpPr>
+          <p:cNvPr id="23" name="TextBox 22"/>
           <p:cNvSpPr txBox="1"/>
           <p:nvPr/>
         </p:nvSpPr>
         <p:spPr>
           <a:xfrm>
-            <a:off x="8138160" y="4370832"/>
-            <a:ext cx="1371600" cy="566928"/>
+            <a:off x="9966960" y="4407407"/>
+            <a:ext cx="1737360" cy="457200"/>
           </a:xfrm>
           <a:prstGeom prst="rect">
             <a:avLst/>
@@ -18028,9 +17887,6 @@
           <a:lstStyle/>
           <a:p>
             <a:pPr algn="l">
-              <a:lnSpc>
-                <a:spcPct val="114000"/>
-              </a:lnSpc>
               <a:spcBef>
                 <a:spcPts val="0"/>
               </a:spcBef>
@@ -18039,7 +17895,7 @@
               </a:spcAft>
             </a:pPr>
             <a:r>
-              <a:rPr sz="1250" b="1" i="0">
+              <a:rPr sz="1300" b="1" i="0">
                 <a:solidFill>
                   <a:srgbClr val="0033A0"/>
                 </a:solidFill>
@@ -18052,58 +17908,13 @@
       </p:sp>
       <p:sp>
         <p:nvSpPr>
-          <p:cNvPr id="28" name="TextBox 27"/>
-          <p:cNvSpPr txBox="1"/>
-          <p:nvPr/>
-        </p:nvSpPr>
-        <p:spPr>
-          <a:xfrm>
-            <a:off x="9601200" y="4370832"/>
-            <a:ext cx="2194560" cy="566928"/>
-          </a:xfrm>
-          <a:prstGeom prst="rect">
-            <a:avLst/>
-          </a:prstGeom>
-          <a:noFill/>
-        </p:spPr>
-        <p:txBody>
-          <a:bodyPr wrap="square" lIns="0" rIns="0" tIns="0" bIns="0" anchor="ctr">
-            <a:spAutoFit/>
-          </a:bodyPr>
-          <a:lstStyle/>
-          <a:p>
-            <a:pPr algn="l">
-              <a:lnSpc>
-                <a:spcPct val="114000"/>
-              </a:lnSpc>
-              <a:spcBef>
-                <a:spcPts val="0"/>
-              </a:spcBef>
-              <a:spcAft>
-                <a:spcPts val="0"/>
-              </a:spcAft>
-            </a:pPr>
-            <a:r>
-              <a:rPr sz="1200" b="0" i="0">
-                <a:solidFill>
-                  <a:srgbClr val="6E7C87"/>
-                </a:solidFill>
-                <a:latin typeface="Segoe UI"/>
-              </a:rPr>
-              <a:t>Cell time and supervision</a:t>
-            </a:r>
-          </a:p>
-        </p:txBody>
-      </p:sp>
-      <p:sp>
-        <p:nvSpPr>
-          <p:cNvPr id="29" name="Oval 28"/>
+          <p:cNvPr id="24" name="Oval 23"/>
           <p:cNvSpPr/>
           <p:nvPr/>
         </p:nvSpPr>
         <p:spPr>
           <a:xfrm>
-            <a:off x="566928" y="5276088"/>
+            <a:off x="566928" y="5303520"/>
             <a:ext cx="365760" cy="365760"/>
           </a:xfrm>
           <a:prstGeom prst="ellipse">
@@ -18143,14 +17954,14 @@
       </p:sp>
       <p:sp>
         <p:nvSpPr>
-          <p:cNvPr id="30" name="TextBox 29"/>
+          <p:cNvPr id="25" name="TextBox 24"/>
           <p:cNvSpPr txBox="1"/>
           <p:nvPr/>
         </p:nvSpPr>
         <p:spPr>
           <a:xfrm>
-            <a:off x="1078992" y="5276088"/>
-            <a:ext cx="3611880" cy="566928"/>
+            <a:off x="1078992" y="5193792"/>
+            <a:ext cx="4754880" cy="731520"/>
           </a:xfrm>
           <a:prstGeom prst="rect">
             <a:avLst/>
@@ -18158,7 +17969,7 @@
           <a:noFill/>
         </p:spPr>
         <p:txBody>
-          <a:bodyPr wrap="square" lIns="0" rIns="0" tIns="0" bIns="0" anchor="ctr">
+          <a:bodyPr wrap="square" lIns="0" rIns="0" tIns="0" bIns="0" anchor="t">
             <a:spAutoFit/>
           </a:bodyPr>
           <a:lstStyle/>
@@ -18175,7 +17986,7 @@
               </a:spcAft>
             </a:pPr>
             <a:r>
-              <a:rPr sz="1300" b="1" i="0">
+              <a:rPr sz="1400" b="1" i="0">
                 <a:solidFill>
                   <a:srgbClr val="051C2C"/>
                 </a:solidFill>
@@ -18184,18 +17995,37 @@
               <a:t>Take one improvement idea to implementation</a:t>
             </a:r>
           </a:p>
-        </p:txBody>
-      </p:sp>
-      <p:sp>
-        <p:nvSpPr>
-          <p:cNvPr id="31" name="TextBox 30"/>
+          <a:p>
+            <a:pPr>
+              <a:spcBef>
+                <a:spcPts val="400"/>
+              </a:spcBef>
+              <a:spcAft>
+                <a:spcPts val="0"/>
+              </a:spcAft>
+            </a:pPr>
+            <a:r>
+              <a:rPr sz="1100" b="0" i="0">
+                <a:solidFill>
+                  <a:srgbClr val="0033A0"/>
+                </a:solidFill>
+                <a:latin typeface="Segoe UI"/>
+              </a:rPr>
+              <a:t>First Level O evidence</a:t>
+            </a:r>
+          </a:p>
+        </p:txBody>
+      </p:sp>
+      <p:sp>
+        <p:nvSpPr>
+          <p:cNvPr id="26" name="TextBox 25"/>
           <p:cNvSpPr txBox="1"/>
           <p:nvPr/>
         </p:nvSpPr>
         <p:spPr>
           <a:xfrm>
-            <a:off x="4846320" y="5276088"/>
-            <a:ext cx="3108960" cy="566928"/>
+            <a:off x="6217920" y="5321807"/>
+            <a:ext cx="3291840" cy="457200"/>
           </a:xfrm>
           <a:prstGeom prst="rect">
             <a:avLst/>
@@ -18220,27 +18050,27 @@
               </a:spcAft>
             </a:pPr>
             <a:r>
-              <a:rPr sz="1250" b="0" i="0">
-                <a:solidFill>
-                  <a:srgbClr val="051C2C"/>
+              <a:rPr sz="1300" b="0" i="0">
+                <a:solidFill>
+                  <a:srgbClr val="6E7C87"/>
                 </a:solidFill>
                 <a:latin typeface="Segoe UI"/>
               </a:rPr>
-              <a:t>First Level O evidence</a:t>
-            </a:r>
-          </a:p>
-        </p:txBody>
-      </p:sp>
-      <p:sp>
-        <p:nvSpPr>
-          <p:cNvPr id="32" name="TextBox 31"/>
+              <a:t>A sponsor for the idea</a:t>
+            </a:r>
+          </a:p>
+        </p:txBody>
+      </p:sp>
+      <p:sp>
+        <p:nvSpPr>
+          <p:cNvPr id="27" name="TextBox 26"/>
           <p:cNvSpPr txBox="1"/>
           <p:nvPr/>
         </p:nvSpPr>
         <p:spPr>
           <a:xfrm>
-            <a:off x="8138160" y="5276088"/>
-            <a:ext cx="1371600" cy="566928"/>
+            <a:off x="9966960" y="5321807"/>
+            <a:ext cx="1737360" cy="457200"/>
           </a:xfrm>
           <a:prstGeom prst="rect">
             <a:avLst/>
@@ -18254,9 +18084,6 @@
           <a:lstStyle/>
           <a:p>
             <a:pPr algn="l">
-              <a:lnSpc>
-                <a:spcPct val="114000"/>
-              </a:lnSpc>
               <a:spcBef>
                 <a:spcPts val="0"/>
               </a:spcBef>
@@ -18265,7 +18092,7 @@
               </a:spcAft>
             </a:pPr>
             <a:r>
-              <a:rPr sz="1250" b="1" i="0">
+              <a:rPr sz="1300" b="1" i="0">
                 <a:solidFill>
                   <a:srgbClr val="0033A0"/>
                 </a:solidFill>
@@ -18278,58 +18105,13 @@
       </p:sp>
       <p:sp>
         <p:nvSpPr>
-          <p:cNvPr id="33" name="TextBox 32"/>
+          <p:cNvPr id="28" name="TextBox 27"/>
           <p:cNvSpPr txBox="1"/>
           <p:nvPr/>
         </p:nvSpPr>
         <p:spPr>
           <a:xfrm>
-            <a:off x="9601200" y="5276088"/>
-            <a:ext cx="2194560" cy="566928"/>
-          </a:xfrm>
-          <a:prstGeom prst="rect">
-            <a:avLst/>
-          </a:prstGeom>
-          <a:noFill/>
-        </p:spPr>
-        <p:txBody>
-          <a:bodyPr wrap="square" lIns="0" rIns="0" tIns="0" bIns="0" anchor="ctr">
-            <a:spAutoFit/>
-          </a:bodyPr>
-          <a:lstStyle/>
-          <a:p>
-            <a:pPr algn="l">
-              <a:lnSpc>
-                <a:spcPct val="114000"/>
-              </a:lnSpc>
-              <a:spcBef>
-                <a:spcPts val="0"/>
-              </a:spcBef>
-              <a:spcAft>
-                <a:spcPts val="0"/>
-              </a:spcAft>
-            </a:pPr>
-            <a:r>
-              <a:rPr sz="1200" b="0" i="0">
-                <a:solidFill>
-                  <a:srgbClr val="6E7C87"/>
-                </a:solidFill>
-                <a:latin typeface="Segoe UI"/>
-              </a:rPr>
-              <a:t>A sponsor for the idea</a:t>
-            </a:r>
-          </a:p>
-        </p:txBody>
-      </p:sp>
-      <p:sp>
-        <p:nvSpPr>
-          <p:cNvPr id="34" name="TextBox 33"/>
-          <p:cNvSpPr txBox="1"/>
-          <p:nvPr/>
-        </p:nvSpPr>
-        <p:spPr>
-          <a:xfrm>
-            <a:off x="457200" y="6144768"/>
+            <a:off x="457200" y="6199632"/>
             <a:ext cx="11274552" cy="274320"/>
           </a:xfrm>
           <a:prstGeom prst="rect">
@@ -18352,7 +18134,7 @@
               </a:spcAft>
             </a:pPr>
             <a:r>
-              <a:rPr sz="1300" b="1" i="0">
+              <a:rPr sz="1400" b="1" i="0">
                 <a:solidFill>
                   <a:srgbClr val="051C2C"/>
                 </a:solidFill>
@@ -18368,6 +18150,18 @@
   <p:clrMapOvr>
     <a:masterClrMapping/>
   </p:clrMapOvr>
+  <mc:AlternateContent xmlns:mc="http://schemas.openxmlformats.org/markup-compatibility/2006">
+    <mc:Choice xmlns:p159="http://schemas.microsoft.com/office/powerpoint/2015/09/main" Requires="p159">
+      <p:transition xmlns:p14="http://schemas.microsoft.com/office/powerpoint/2010/main" spd="slow" p14:dur="1250">
+        <p159:morph option="byObject"/>
+      </p:transition>
+    </mc:Choice>
+    <mc:Fallback>
+      <p:transition xmlns:p14="http://schemas.microsoft.com/office/powerpoint/2010/main" spd="slow">
+        <p:fade/>
+      </p:transition>
+    </mc:Fallback>
+  </mc:AlternateContent>
 </p:sld>
 </file>
 
@@ -18592,8 +18386,8 @@
         </p:nvSpPr>
         <p:spPr>
           <a:xfrm>
-            <a:off x="457200" y="1481328"/>
-            <a:ext cx="10607040" cy="310896"/>
+            <a:off x="457200" y="2066543"/>
+            <a:ext cx="822960" cy="457200"/>
           </a:xfrm>
           <a:prstGeom prst="rect">
             <a:avLst/>
@@ -18615,13 +18409,13 @@
               </a:spcAft>
             </a:pPr>
             <a:r>
-              <a:rPr sz="1300" b="0" i="0">
-                <a:solidFill>
-                  <a:srgbClr val="9FAFBA"/>
+              <a:rPr sz="2800" b="1" i="0">
+                <a:solidFill>
+                  <a:srgbClr val="D5FB00"/>
                 </a:solidFill>
                 <a:latin typeface="Segoe UI"/>
               </a:rPr>
-              <a:t>Three things I want you to take away</a:t>
+              <a:t>01</a:t>
             </a:r>
           </a:p>
         </p:txBody>
@@ -18634,8 +18428,8 @@
         </p:nvSpPr>
         <p:spPr>
           <a:xfrm>
-            <a:off x="457200" y="1975104"/>
-            <a:ext cx="731520" cy="457200"/>
+            <a:off x="1389888" y="2121408"/>
+            <a:ext cx="9875520" cy="457200"/>
           </a:xfrm>
           <a:prstGeom prst="rect">
             <a:avLst/>
@@ -18657,13 +18451,13 @@
               </a:spcAft>
             </a:pPr>
             <a:r>
-              <a:rPr sz="2600" b="1" i="0">
-                <a:solidFill>
-                  <a:srgbClr val="D5FB00"/>
+              <a:rPr sz="2200" b="1" i="0">
+                <a:solidFill>
+                  <a:srgbClr val="FFFFFF"/>
                 </a:solidFill>
                 <a:latin typeface="Segoe UI"/>
               </a:rPr>
-              <a:t>01</a:t>
+              <a:t>I am real at Level L, and honest about Level I.</a:t>
             </a:r>
           </a:p>
         </p:txBody>
@@ -18676,8 +18470,8 @@
         </p:nvSpPr>
         <p:spPr>
           <a:xfrm>
-            <a:off x="1298448" y="1993392"/>
-            <a:ext cx="9692640" cy="457200"/>
+            <a:off x="457200" y="3200400"/>
+            <a:ext cx="822960" cy="457200"/>
           </a:xfrm>
           <a:prstGeom prst="rect">
             <a:avLst/>
@@ -18699,35 +18493,13 @@
               </a:spcAft>
             </a:pPr>
             <a:r>
-              <a:rPr sz="2000" b="1" i="0">
-                <a:solidFill>
-                  <a:srgbClr val="FFFFFF"/>
+              <a:rPr sz="2800" b="1" i="0">
+                <a:solidFill>
+                  <a:srgbClr val="D5FB00"/>
                 </a:solidFill>
                 <a:latin typeface="Segoe UI"/>
               </a:rPr>
-              <a:t>I am real at Level L, and honest about Level I.</a:t>
-            </a:r>
-          </a:p>
-          <a:p>
-            <a:pPr>
-              <a:lnSpc>
-                <a:spcPct val="120000"/>
-              </a:lnSpc>
-              <a:spcBef>
-                <a:spcPts val="700"/>
-              </a:spcBef>
-              <a:spcAft>
-                <a:spcPts val="0"/>
-              </a:spcAft>
-            </a:pPr>
-            <a:r>
-              <a:rPr sz="1350" b="0" i="0">
-                <a:solidFill>
-                  <a:srgbClr val="C6CDD1"/>
-                </a:solidFill>
-                <a:latin typeface="Segoe UI"/>
-              </a:rPr>
-              <a:t>Four skills I execute with nobody watching. But nothing is formally validated yet, and that is the gap that actually matters.</a:t>
+              <a:t>02</a:t>
             </a:r>
           </a:p>
         </p:txBody>
@@ -18740,8 +18512,8 @@
         </p:nvSpPr>
         <p:spPr>
           <a:xfrm>
-            <a:off x="457200" y="3401568"/>
-            <a:ext cx="731520" cy="457200"/>
+            <a:off x="1389888" y="3255264"/>
+            <a:ext cx="9875520" cy="457200"/>
           </a:xfrm>
           <a:prstGeom prst="rect">
             <a:avLst/>
@@ -18763,13 +18535,13 @@
               </a:spcAft>
             </a:pPr>
             <a:r>
-              <a:rPr sz="2600" b="1" i="0">
-                <a:solidFill>
-                  <a:srgbClr val="D5FB00"/>
+              <a:rPr sz="2200" b="1" i="0">
+                <a:solidFill>
+                  <a:srgbClr val="FFFFFF"/>
                 </a:solidFill>
                 <a:latin typeface="Segoe UI"/>
               </a:rPr>
-              <a:t>02</a:t>
+              <a:t>The floor taught me faster than the schedule would have.</a:t>
             </a:r>
           </a:p>
         </p:txBody>
@@ -18782,8 +18554,8 @@
         </p:nvSpPr>
         <p:spPr>
           <a:xfrm>
-            <a:off x="1298448" y="3419856"/>
-            <a:ext cx="9692640" cy="457200"/>
+            <a:off x="457200" y="4334256"/>
+            <a:ext cx="822960" cy="457200"/>
           </a:xfrm>
           <a:prstGeom prst="rect">
             <a:avLst/>
@@ -18805,35 +18577,13 @@
               </a:spcAft>
             </a:pPr>
             <a:r>
-              <a:rPr sz="2000" b="1" i="0">
-                <a:solidFill>
-                  <a:srgbClr val="FFFFFF"/>
+              <a:rPr sz="2800" b="1" i="0">
+                <a:solidFill>
+                  <a:srgbClr val="D5FB00"/>
                 </a:solidFill>
                 <a:latin typeface="Segoe UI"/>
               </a:rPr>
-              <a:t>The floor taught me faster than the schedule would have.</a:t>
-            </a:r>
-          </a:p>
-          <a:p>
-            <a:pPr>
-              <a:lnSpc>
-                <a:spcPct val="120000"/>
-              </a:lnSpc>
-              <a:spcBef>
-                <a:spcPts val="700"/>
-              </a:spcBef>
-              <a:spcAft>
-                <a:spcPts val="0"/>
-              </a:spcAft>
-            </a:pPr>
-            <a:r>
-              <a:rPr sz="1350" b="0" i="0">
-                <a:solidFill>
-                  <a:srgbClr val="C6CDD1"/>
-                </a:solidFill>
-                <a:latin typeface="Segoe UI"/>
-              </a:rPr>
-              <a:t>Demand-driven learning built troubleshooting judgment a classroom does not give you. It just did not produce paperwork.</a:t>
+              <a:t>03</a:t>
             </a:r>
           </a:p>
         </p:txBody>
@@ -18846,8 +18596,8 @@
         </p:nvSpPr>
         <p:spPr>
           <a:xfrm>
-            <a:off x="457200" y="4828032"/>
-            <a:ext cx="731520" cy="457200"/>
+            <a:off x="1389888" y="4389120"/>
+            <a:ext cx="9875520" cy="457200"/>
           </a:xfrm>
           <a:prstGeom prst="rect">
             <a:avLst/>
@@ -18869,49 +18619,7 @@
               </a:spcAft>
             </a:pPr>
             <a:r>
-              <a:rPr sz="2600" b="1" i="0">
-                <a:solidFill>
-                  <a:srgbClr val="D5FB00"/>
-                </a:solidFill>
-                <a:latin typeface="Segoe UI"/>
-              </a:rPr>
-              <a:t>03</a:t>
-            </a:r>
-          </a:p>
-        </p:txBody>
-      </p:sp>
-      <p:sp>
-        <p:nvSpPr>
-          <p:cNvPr id="13" name="TextBox 12"/>
-          <p:cNvSpPr txBox="1"/>
-          <p:nvPr/>
-        </p:nvSpPr>
-        <p:spPr>
-          <a:xfrm>
-            <a:off x="1298448" y="4846320"/>
-            <a:ext cx="9692640" cy="457200"/>
-          </a:xfrm>
-          <a:prstGeom prst="rect">
-            <a:avLst/>
-          </a:prstGeom>
-          <a:noFill/>
-        </p:spPr>
-        <p:txBody>
-          <a:bodyPr wrap="square" lIns="0" rIns="0" tIns="0" bIns="0" anchor="t">
-            <a:spAutoFit/>
-          </a:bodyPr>
-          <a:lstStyle/>
-          <a:p>
-            <a:pPr algn="l">
-              <a:spcBef>
-                <a:spcPts val="0"/>
-              </a:spcBef>
-              <a:spcAft>
-                <a:spcPts val="0"/>
-              </a:spcAft>
-            </a:pPr>
-            <a:r>
-              <a:rPr sz="2000" b="1" i="0">
+              <a:rPr sz="2200" b="1" i="0">
                 <a:solidFill>
                   <a:srgbClr val="FFFFFF"/>
                 </a:solidFill>
@@ -18920,39 +18628,17 @@
               <a:t>Fourteen weeks left, and a plan for them.</a:t>
             </a:r>
           </a:p>
-          <a:p>
-            <a:pPr>
-              <a:lnSpc>
-                <a:spcPct val="120000"/>
-              </a:lnSpc>
-              <a:spcBef>
-                <a:spcPts val="700"/>
-              </a:spcBef>
-              <a:spcAft>
-                <a:spcPts val="0"/>
-              </a:spcAft>
-            </a:pPr>
-            <a:r>
-              <a:rPr sz="1350" b="0" i="0">
-                <a:solidFill>
-                  <a:srgbClr val="C6CDD1"/>
-                </a:solidFill>
-                <a:latin typeface="Segoe UI"/>
-              </a:rPr>
-              <a:t>The four commitments take me from informally capable to formally certified before January 1.</a:t>
-            </a:r>
-          </a:p>
-        </p:txBody>
-      </p:sp>
-      <p:sp>
-        <p:nvSpPr>
-          <p:cNvPr id="14" name="Rectangle 13"/>
+        </p:txBody>
+      </p:sp>
+      <p:sp>
+        <p:nvSpPr>
+          <p:cNvPr id="13" name="Rectangle 12"/>
           <p:cNvSpPr/>
           <p:nvPr/>
         </p:nvSpPr>
         <p:spPr>
           <a:xfrm>
-            <a:off x="457200" y="5870448"/>
+            <a:off x="457200" y="5687568"/>
             <a:ext cx="11274552" cy="18288"/>
           </a:xfrm>
           <a:prstGeom prst="rect">
@@ -18976,13 +18662,13 @@
       </p:sp>
       <p:sp>
         <p:nvSpPr>
-          <p:cNvPr id="15" name="TextBox 14"/>
+          <p:cNvPr id="14" name="TextBox 13"/>
           <p:cNvSpPr txBox="1"/>
           <p:nvPr/>
         </p:nvSpPr>
         <p:spPr>
           <a:xfrm>
-            <a:off x="457200" y="6053328"/>
+            <a:off x="457200" y="5907024"/>
             <a:ext cx="11274552" cy="310896"/>
           </a:xfrm>
           <a:prstGeom prst="rect">
@@ -19005,7 +18691,7 @@
               </a:spcAft>
             </a:pPr>
             <a:r>
-              <a:rPr sz="1500" b="1" i="1">
+              <a:rPr sz="1700" b="1" i="1">
                 <a:solidFill>
                   <a:srgbClr val="D5FB00"/>
                 </a:solidFill>
@@ -19021,6 +18707,18 @@
   <p:clrMapOvr>
     <a:masterClrMapping/>
   </p:clrMapOvr>
+  <mc:AlternateContent xmlns:mc="http://schemas.openxmlformats.org/markup-compatibility/2006">
+    <mc:Choice xmlns:p159="http://schemas.microsoft.com/office/powerpoint/2015/09/main" Requires="p159">
+      <p:transition xmlns:p14="http://schemas.microsoft.com/office/powerpoint/2010/main" spd="slow" p14:dur="1250">
+        <p159:morph option="byObject"/>
+      </p:transition>
+    </mc:Choice>
+    <mc:Fallback>
+      <p:transition xmlns:p14="http://schemas.microsoft.com/office/powerpoint/2010/main" spd="slow">
+        <p:fade/>
+      </p:transition>
+    </mc:Fallback>
+  </mc:AlternateContent>
 </p:sld>
 </file>
 
@@ -19184,6 +18882,18 @@
   <p:clrMapOvr>
     <a:masterClrMapping/>
   </p:clrMapOvr>
+  <mc:AlternateContent xmlns:mc="http://schemas.openxmlformats.org/markup-compatibility/2006">
+    <mc:Choice xmlns:p159="http://schemas.microsoft.com/office/powerpoint/2015/09/main" Requires="p159">
+      <p:transition xmlns:p14="http://schemas.microsoft.com/office/powerpoint/2010/main" spd="slow" p14:dur="1250">
+        <p159:morph option="byObject"/>
+      </p:transition>
+    </mc:Choice>
+    <mc:Fallback>
+      <p:transition xmlns:p14="http://schemas.microsoft.com/office/powerpoint/2010/main" spd="slow">
+        <p:fade/>
+      </p:transition>
+    </mc:Fallback>
+  </mc:AlternateContent>
 </p:sld>
 </file>
 
@@ -19353,7 +19063,7 @@
                 </a:solidFill>
                 <a:latin typeface="Segoe UI"/>
               </a:rPr>
-              <a:t>THE VALUE I IDENTIFY WITH</a:t>
+              <a:t>OUR VALUES</a:t>
             </a:r>
           </a:p>
         </p:txBody>
@@ -19366,8 +19076,8 @@
         </p:nvSpPr>
         <p:spPr>
           <a:xfrm>
-            <a:off x="457200" y="932688"/>
-            <a:ext cx="11338560" cy="457200"/>
+            <a:off x="457200" y="1444752"/>
+            <a:ext cx="7315200" cy="1463040"/>
           </a:xfrm>
           <a:prstGeom prst="rect">
             <a:avLst/>
@@ -19389,13 +19099,13 @@
               </a:spcAft>
             </a:pPr>
             <a:r>
-              <a:rPr sz="3000" b="1" i="0">
+              <a:rPr sz="10800" b="1" i="0">
                 <a:solidFill>
                   <a:srgbClr val="D5FB00"/>
                 </a:solidFill>
                 <a:latin typeface="Segoe UI"/>
               </a:rPr>
-              <a:t>WIN: trust comes before access</a:t>
+              <a:t>WIN</a:t>
             </a:r>
           </a:p>
         </p:txBody>
@@ -19408,8 +19118,8 @@
         </p:nvSpPr>
         <p:spPr>
           <a:xfrm>
-            <a:off x="457200" y="1481328"/>
-            <a:ext cx="10607040" cy="310896"/>
+            <a:off x="512064" y="3200400"/>
+            <a:ext cx="9509760" cy="365760"/>
           </a:xfrm>
           <a:prstGeom prst="rect">
             <a:avLst/>
@@ -19431,9 +19141,9 @@
               </a:spcAft>
             </a:pPr>
             <a:r>
-              <a:rPr sz="1300" b="0" i="0">
-                <a:solidFill>
-                  <a:srgbClr val="9FAFBA"/>
+              <a:rPr sz="1700" b="0" i="1">
+                <a:solidFill>
+                  <a:srgbClr val="C6CDD1"/>
                 </a:solidFill>
                 <a:latin typeface="Segoe UI"/>
               </a:rPr>
@@ -19444,385 +19154,13 @@
       </p:sp>
       <p:sp>
         <p:nvSpPr>
-          <p:cNvPr id="8" name="Chevron 7"/>
+          <p:cNvPr id="8" name="Rectangle 7"/>
           <p:cNvSpPr/>
           <p:nvPr/>
         </p:nvSpPr>
         <p:spPr>
           <a:xfrm>
-            <a:off x="502920" y="2322576"/>
-            <a:ext cx="182880" cy="182880"/>
-          </a:xfrm>
-          <a:prstGeom prst="chevron">
-            <a:avLst/>
-          </a:prstGeom>
-          <a:solidFill>
-            <a:srgbClr val="D5FB00"/>
-          </a:solidFill>
-          <a:ln>
-            <a:noFill/>
-          </a:ln>
-          <a:effectLst/>
-        </p:spPr>
-        <p:txBody>
-          <a:bodyPr rtlCol="0" anchor="ctr" wrap="square" lIns="0" rIns="0" tIns="0" bIns="0"/>
-          <a:lstStyle/>
-          <a:p>
-            <a:pPr algn="ctr"/>
-          </a:p>
-        </p:txBody>
-      </p:sp>
-      <p:sp>
-        <p:nvSpPr>
-          <p:cNvPr id="9" name="Chevron 8"/>
-          <p:cNvSpPr/>
-          <p:nvPr/>
-        </p:nvSpPr>
-        <p:spPr>
-          <a:xfrm>
-            <a:off x="640080" y="2322576"/>
-            <a:ext cx="182880" cy="182880"/>
-          </a:xfrm>
-          <a:prstGeom prst="chevron">
-            <a:avLst/>
-          </a:prstGeom>
-          <a:solidFill>
-            <a:srgbClr val="D5FB00"/>
-          </a:solidFill>
-          <a:ln>
-            <a:noFill/>
-          </a:ln>
-          <a:effectLst/>
-        </p:spPr>
-        <p:txBody>
-          <a:bodyPr rtlCol="0" anchor="ctr" wrap="square" lIns="0" rIns="0" tIns="0" bIns="0"/>
-          <a:lstStyle/>
-          <a:p>
-            <a:pPr algn="ctr"/>
-          </a:p>
-        </p:txBody>
-      </p:sp>
-      <p:sp>
-        <p:nvSpPr>
-          <p:cNvPr id="10" name="TextBox 9"/>
-          <p:cNvSpPr txBox="1"/>
-          <p:nvPr/>
-        </p:nvSpPr>
-        <p:spPr>
-          <a:xfrm>
-            <a:off x="1005840" y="2286000"/>
-            <a:ext cx="8595360" cy="365760"/>
-          </a:xfrm>
-          <a:prstGeom prst="rect">
-            <a:avLst/>
-          </a:prstGeom>
-          <a:noFill/>
-        </p:spPr>
-        <p:txBody>
-          <a:bodyPr wrap="square" lIns="0" rIns="0" tIns="0" bIns="0" anchor="t">
-            <a:spAutoFit/>
-          </a:bodyPr>
-          <a:lstStyle/>
-          <a:p>
-            <a:pPr algn="l">
-              <a:spcBef>
-                <a:spcPts val="0"/>
-              </a:spcBef>
-              <a:spcAft>
-                <a:spcPts val="0"/>
-              </a:spcAft>
-            </a:pPr>
-            <a:r>
-              <a:rPr sz="1900" b="1" i="0">
-                <a:solidFill>
-                  <a:srgbClr val="D5FB00"/>
-                </a:solidFill>
-                <a:latin typeface="Segoe UI"/>
-              </a:rPr>
-              <a:t>Nobody hands you the torch</a:t>
-            </a:r>
-          </a:p>
-          <a:p>
-            <a:pPr>
-              <a:lnSpc>
-                <a:spcPct val="120000"/>
-              </a:lnSpc>
-              <a:spcBef>
-                <a:spcPts val="600"/>
-              </a:spcBef>
-              <a:spcAft>
-                <a:spcPts val="0"/>
-              </a:spcAft>
-            </a:pPr>
-            <a:r>
-              <a:rPr sz="1350" b="0" i="0">
-                <a:solidFill>
-                  <a:srgbClr val="C6CDD1"/>
-                </a:solidFill>
-                <a:latin typeface="Segoe UI"/>
-              </a:rPr>
-              <a:t>On the floor nobody lets you touch a welding cell because of a job title. You get there by being useful first, and by being useful again the next day.</a:t>
-            </a:r>
-          </a:p>
-        </p:txBody>
-      </p:sp>
-      <p:sp>
-        <p:nvSpPr>
-          <p:cNvPr id="11" name="Chevron 10"/>
-          <p:cNvSpPr/>
-          <p:nvPr/>
-        </p:nvSpPr>
-        <p:spPr>
-          <a:xfrm>
-            <a:off x="502920" y="3621024"/>
-            <a:ext cx="182880" cy="182880"/>
-          </a:xfrm>
-          <a:prstGeom prst="chevron">
-            <a:avLst/>
-          </a:prstGeom>
-          <a:solidFill>
-            <a:srgbClr val="D5FB00"/>
-          </a:solidFill>
-          <a:ln>
-            <a:noFill/>
-          </a:ln>
-          <a:effectLst/>
-        </p:spPr>
-        <p:txBody>
-          <a:bodyPr rtlCol="0" anchor="ctr" wrap="square" lIns="0" rIns="0" tIns="0" bIns="0"/>
-          <a:lstStyle/>
-          <a:p>
-            <a:pPr algn="ctr"/>
-          </a:p>
-        </p:txBody>
-      </p:sp>
-      <p:sp>
-        <p:nvSpPr>
-          <p:cNvPr id="12" name="Chevron 11"/>
-          <p:cNvSpPr/>
-          <p:nvPr/>
-        </p:nvSpPr>
-        <p:spPr>
-          <a:xfrm>
-            <a:off x="640080" y="3621024"/>
-            <a:ext cx="182880" cy="182880"/>
-          </a:xfrm>
-          <a:prstGeom prst="chevron">
-            <a:avLst/>
-          </a:prstGeom>
-          <a:solidFill>
-            <a:srgbClr val="D5FB00"/>
-          </a:solidFill>
-          <a:ln>
-            <a:noFill/>
-          </a:ln>
-          <a:effectLst/>
-        </p:spPr>
-        <p:txBody>
-          <a:bodyPr rtlCol="0" anchor="ctr" wrap="square" lIns="0" rIns="0" tIns="0" bIns="0"/>
-          <a:lstStyle/>
-          <a:p>
-            <a:pPr algn="ctr"/>
-          </a:p>
-        </p:txBody>
-      </p:sp>
-      <p:sp>
-        <p:nvSpPr>
-          <p:cNvPr id="13" name="TextBox 12"/>
-          <p:cNvSpPr txBox="1"/>
-          <p:nvPr/>
-        </p:nvSpPr>
-        <p:spPr>
-          <a:xfrm>
-            <a:off x="1005840" y="3584448"/>
-            <a:ext cx="8595360" cy="365760"/>
-          </a:xfrm>
-          <a:prstGeom prst="rect">
-            <a:avLst/>
-          </a:prstGeom>
-          <a:noFill/>
-        </p:spPr>
-        <p:txBody>
-          <a:bodyPr wrap="square" lIns="0" rIns="0" tIns="0" bIns="0" anchor="t">
-            <a:spAutoFit/>
-          </a:bodyPr>
-          <a:lstStyle/>
-          <a:p>
-            <a:pPr algn="l">
-              <a:spcBef>
-                <a:spcPts val="0"/>
-              </a:spcBef>
-              <a:spcAft>
-                <a:spcPts val="0"/>
-              </a:spcAft>
-            </a:pPr>
-            <a:r>
-              <a:rPr sz="1900" b="1" i="0">
-                <a:solidFill>
-                  <a:srgbClr val="D5FB00"/>
-                </a:solidFill>
-                <a:latin typeface="Segoe UI"/>
-              </a:rPr>
-              <a:t>I learned by answering, not by asking</a:t>
-            </a:r>
-          </a:p>
-          <a:p>
-            <a:pPr>
-              <a:lnSpc>
-                <a:spcPct val="120000"/>
-              </a:lnSpc>
-              <a:spcBef>
-                <a:spcPts val="600"/>
-              </a:spcBef>
-              <a:spcAft>
-                <a:spcPts val="0"/>
-              </a:spcAft>
-            </a:pPr>
-            <a:r>
-              <a:rPr sz="1350" b="0" i="0">
-                <a:solidFill>
-                  <a:srgbClr val="C6CDD1"/>
-                </a:solidFill>
-                <a:latin typeface="Segoe UI"/>
-              </a:rPr>
-              <a:t>Most of what I know came from being the one who showed up when a cell went down — not from waiting for a training session to be scheduled.</a:t>
-            </a:r>
-          </a:p>
-        </p:txBody>
-      </p:sp>
-      <p:sp>
-        <p:nvSpPr>
-          <p:cNvPr id="14" name="Chevron 13"/>
-          <p:cNvSpPr/>
-          <p:nvPr/>
-        </p:nvSpPr>
-        <p:spPr>
-          <a:xfrm>
-            <a:off x="502920" y="4919472"/>
-            <a:ext cx="182880" cy="182880"/>
-          </a:xfrm>
-          <a:prstGeom prst="chevron">
-            <a:avLst/>
-          </a:prstGeom>
-          <a:solidFill>
-            <a:srgbClr val="D5FB00"/>
-          </a:solidFill>
-          <a:ln>
-            <a:noFill/>
-          </a:ln>
-          <a:effectLst/>
-        </p:spPr>
-        <p:txBody>
-          <a:bodyPr rtlCol="0" anchor="ctr" wrap="square" lIns="0" rIns="0" tIns="0" bIns="0"/>
-          <a:lstStyle/>
-          <a:p>
-            <a:pPr algn="ctr"/>
-          </a:p>
-        </p:txBody>
-      </p:sp>
-      <p:sp>
-        <p:nvSpPr>
-          <p:cNvPr id="15" name="Chevron 14"/>
-          <p:cNvSpPr/>
-          <p:nvPr/>
-        </p:nvSpPr>
-        <p:spPr>
-          <a:xfrm>
-            <a:off x="640080" y="4919472"/>
-            <a:ext cx="182880" cy="182880"/>
-          </a:xfrm>
-          <a:prstGeom prst="chevron">
-            <a:avLst/>
-          </a:prstGeom>
-          <a:solidFill>
-            <a:srgbClr val="D5FB00"/>
-          </a:solidFill>
-          <a:ln>
-            <a:noFill/>
-          </a:ln>
-          <a:effectLst/>
-        </p:spPr>
-        <p:txBody>
-          <a:bodyPr rtlCol="0" anchor="ctr" wrap="square" lIns="0" rIns="0" tIns="0" bIns="0"/>
-          <a:lstStyle/>
-          <a:p>
-            <a:pPr algn="ctr"/>
-          </a:p>
-        </p:txBody>
-      </p:sp>
-      <p:sp>
-        <p:nvSpPr>
-          <p:cNvPr id="16" name="TextBox 15"/>
-          <p:cNvSpPr txBox="1"/>
-          <p:nvPr/>
-        </p:nvSpPr>
-        <p:spPr>
-          <a:xfrm>
-            <a:off x="1005840" y="4882896"/>
-            <a:ext cx="8595360" cy="365760"/>
-          </a:xfrm>
-          <a:prstGeom prst="rect">
-            <a:avLst/>
-          </a:prstGeom>
-          <a:noFill/>
-        </p:spPr>
-        <p:txBody>
-          <a:bodyPr wrap="square" lIns="0" rIns="0" tIns="0" bIns="0" anchor="t">
-            <a:spAutoFit/>
-          </a:bodyPr>
-          <a:lstStyle/>
-          <a:p>
-            <a:pPr algn="l">
-              <a:spcBef>
-                <a:spcPts val="0"/>
-              </a:spcBef>
-              <a:spcAft>
-                <a:spcPts val="0"/>
-              </a:spcAft>
-            </a:pPr>
-            <a:r>
-              <a:rPr sz="1900" b="1" i="0">
-                <a:solidFill>
-                  <a:srgbClr val="D5FB00"/>
-                </a:solidFill>
-                <a:latin typeface="Segoe UI"/>
-              </a:rPr>
-              <a:t>Winning means the line runs</a:t>
-            </a:r>
-          </a:p>
-          <a:p>
-            <a:pPr>
-              <a:lnSpc>
-                <a:spcPct val="120000"/>
-              </a:lnSpc>
-              <a:spcBef>
-                <a:spcPts val="600"/>
-              </a:spcBef>
-              <a:spcAft>
-                <a:spcPts val="0"/>
-              </a:spcAft>
-            </a:pPr>
-            <a:r>
-              <a:rPr sz="1350" b="0" i="0">
-                <a:solidFill>
-                  <a:srgbClr val="C6CDD1"/>
-                </a:solidFill>
-                <a:latin typeface="Segoe UI"/>
-              </a:rPr>
-              <a:t>My progress only counts if the cell keeps welding. That is the scoreboard I use on myself, and it is the one this plant is paid on.</a:t>
-            </a:r>
-          </a:p>
-        </p:txBody>
-      </p:sp>
-      <p:sp>
-        <p:nvSpPr>
-          <p:cNvPr id="17" name="Rectangle 16"/>
-          <p:cNvSpPr/>
-          <p:nvPr/>
-        </p:nvSpPr>
-        <p:spPr>
-          <a:xfrm>
-            <a:off x="457200" y="5870448"/>
+            <a:off x="457200" y="4114800"/>
             <a:ext cx="11274552" cy="18288"/>
           </a:xfrm>
           <a:prstGeom prst="rect">
@@ -19846,14 +19184,14 @@
       </p:sp>
       <p:sp>
         <p:nvSpPr>
-          <p:cNvPr id="18" name="TextBox 17"/>
+          <p:cNvPr id="9" name="TextBox 8"/>
           <p:cNvSpPr txBox="1"/>
           <p:nvPr/>
         </p:nvSpPr>
         <p:spPr>
           <a:xfrm>
-            <a:off x="457200" y="6053328"/>
-            <a:ext cx="11274552" cy="292608"/>
+            <a:off x="512064" y="4535424"/>
+            <a:ext cx="10424160" cy="822960"/>
           </a:xfrm>
           <a:prstGeom prst="rect">
             <a:avLst/>
@@ -19875,13 +19213,32 @@
               </a:spcAft>
             </a:pPr>
             <a:r>
-              <a:rPr sz="1500" b="1" i="1">
-                <a:solidFill>
-                  <a:srgbClr val="D5FB00"/>
+              <a:rPr sz="2600" b="1" i="0">
+                <a:solidFill>
+                  <a:srgbClr val="FFFFFF"/>
                 </a:solidFill>
                 <a:latin typeface="Segoe UI"/>
               </a:rPr>
-              <a:t>Trust is the only currency an intern actually has.</a:t>
+              <a:t>Nobody hands an intern a welding torch.</a:t>
+            </a:r>
+          </a:p>
+          <a:p>
+            <a:pPr>
+              <a:spcBef>
+                <a:spcPts val="600"/>
+              </a:spcBef>
+              <a:spcAft>
+                <a:spcPts val="0"/>
+              </a:spcAft>
+            </a:pPr>
+            <a:r>
+              <a:rPr sz="2600" b="1" i="0">
+                <a:solidFill>
+                  <a:srgbClr val="D5FB00"/>
+                </a:solidFill>
+                <a:latin typeface="Segoe UI"/>
+              </a:rPr>
+              <a:t>You earn it.</a:t>
             </a:r>
           </a:p>
         </p:txBody>
@@ -19891,6 +19248,18 @@
   <p:clrMapOvr>
     <a:masterClrMapping/>
   </p:clrMapOvr>
+  <mc:AlternateContent xmlns:mc="http://schemas.openxmlformats.org/markup-compatibility/2006">
+    <mc:Choice xmlns:p159="http://schemas.microsoft.com/office/powerpoint/2015/09/main" Requires="p159">
+      <p:transition xmlns:p14="http://schemas.microsoft.com/office/powerpoint/2010/main" spd="slow" p14:dur="1250">
+        <p159:morph option="byObject"/>
+      </p:transition>
+    </mc:Choice>
+    <mc:Fallback>
+      <p:transition xmlns:p14="http://schemas.microsoft.com/office/powerpoint/2010/main" spd="slow">
+        <p:fade/>
+      </p:transition>
+    </mc:Fallback>
+  </mc:AlternateContent>
 </p:sld>
 </file>
 
@@ -20109,56 +19478,14 @@
       </p:sp>
       <p:sp>
         <p:nvSpPr>
-          <p:cNvPr id="7" name="TextBox 6"/>
-          <p:cNvSpPr txBox="1"/>
-          <p:nvPr/>
-        </p:nvSpPr>
-        <p:spPr>
-          <a:xfrm>
-            <a:off x="457200" y="1481328"/>
-            <a:ext cx="10607040" cy="310896"/>
-          </a:xfrm>
-          <a:prstGeom prst="rect">
-            <a:avLst/>
-          </a:prstGeom>
-          <a:noFill/>
-        </p:spPr>
-        <p:txBody>
-          <a:bodyPr wrap="square" lIns="0" rIns="0" tIns="0" bIns="0" anchor="t">
-            <a:spAutoFit/>
-          </a:bodyPr>
-          <a:lstStyle/>
-          <a:p>
-            <a:pPr algn="l">
-              <a:spcBef>
-                <a:spcPts val="0"/>
-              </a:spcBef>
-              <a:spcAft>
-                <a:spcPts val="0"/>
-              </a:spcAft>
-            </a:pPr>
-            <a:r>
-              <a:rPr sz="1300" b="0" i="0">
-                <a:solidFill>
-                  <a:srgbClr val="6E7C87"/>
-                </a:solidFill>
-                <a:latin typeface="Segoe UI"/>
-              </a:rPr>
-              <a:t>The whole presentation in three numbers</a:t>
-            </a:r>
-          </a:p>
-        </p:txBody>
-      </p:sp>
-      <p:sp>
-        <p:nvSpPr>
-          <p:cNvPr id="8" name="Rectangle 7"/>
+          <p:cNvPr id="7" name="Rectangle 6"/>
           <p:cNvSpPr/>
           <p:nvPr/>
         </p:nvSpPr>
         <p:spPr>
           <a:xfrm>
-            <a:off x="457200" y="2139696"/>
-            <a:ext cx="3611880" cy="2578608"/>
+            <a:off x="457200" y="2048256"/>
+            <a:ext cx="3611880" cy="2103120"/>
           </a:xfrm>
           <a:prstGeom prst="rect">
             <a:avLst/>
@@ -20181,14 +19508,14 @@
       </p:sp>
       <p:sp>
         <p:nvSpPr>
-          <p:cNvPr id="9" name="TextBox 8"/>
+          <p:cNvPr id="8" name="TextBox 7"/>
           <p:cNvSpPr txBox="1"/>
           <p:nvPr/>
         </p:nvSpPr>
         <p:spPr>
           <a:xfrm>
-            <a:off x="786384" y="2414016"/>
-            <a:ext cx="2953512" cy="1920240"/>
+            <a:off x="786384" y="2340864"/>
+            <a:ext cx="2953512" cy="1554480"/>
           </a:xfrm>
           <a:prstGeom prst="rect">
             <a:avLst/>
@@ -20222,7 +19549,7 @@
           <a:p>
             <a:pPr>
               <a:spcBef>
-                <a:spcPts val="800"/>
+                <a:spcPts val="1000"/>
               </a:spcBef>
               <a:spcAft>
                 <a:spcPts val="0"/>
@@ -20235,7 +19562,7 @@
                 </a:solidFill>
                 <a:latin typeface="Segoe UI"/>
               </a:rPr>
-              <a:t>4 / 23</a:t>
+              <a:t>4 of 23</a:t>
             </a:r>
           </a:p>
           <a:p>
@@ -20244,34 +19571,34 @@
                 <a:spcPct val="120000"/>
               </a:lnSpc>
               <a:spcBef>
-                <a:spcPts val="1200"/>
+                <a:spcPts val="1400"/>
               </a:spcBef>
               <a:spcAft>
                 <a:spcPts val="0"/>
               </a:spcAft>
             </a:pPr>
             <a:r>
-              <a:rPr sz="1300" b="0" i="0">
+              <a:rPr sz="1400" b="0" i="0">
                 <a:solidFill>
                   <a:srgbClr val="C6CDD1"/>
                 </a:solidFill>
                 <a:latin typeface="Segoe UI"/>
               </a:rPr>
-              <a:t>skills I execute unsupervised. Twelve more are in progress — and none of it is formally validated yet.</a:t>
-            </a:r>
-          </a:p>
-        </p:txBody>
-      </p:sp>
-      <p:sp>
-        <p:nvSpPr>
-          <p:cNvPr id="10" name="Rectangle 9"/>
+              <a:t>skills I run unsupervised</a:t>
+            </a:r>
+          </a:p>
+        </p:txBody>
+      </p:sp>
+      <p:sp>
+        <p:nvSpPr>
+          <p:cNvPr id="9" name="Rectangle 8"/>
           <p:cNvSpPr/>
           <p:nvPr/>
         </p:nvSpPr>
         <p:spPr>
           <a:xfrm>
-            <a:off x="4288536" y="2139696"/>
-            <a:ext cx="3611880" cy="2578608"/>
+            <a:off x="4288536" y="2048256"/>
+            <a:ext cx="3611880" cy="2103120"/>
           </a:xfrm>
           <a:prstGeom prst="rect">
             <a:avLst/>
@@ -20294,14 +19621,14 @@
       </p:sp>
       <p:sp>
         <p:nvSpPr>
-          <p:cNvPr id="11" name="TextBox 10"/>
+          <p:cNvPr id="10" name="TextBox 9"/>
           <p:cNvSpPr txBox="1"/>
           <p:nvPr/>
         </p:nvSpPr>
         <p:spPr>
           <a:xfrm>
-            <a:off x="4617720" y="2414016"/>
-            <a:ext cx="2953512" cy="1920240"/>
+            <a:off x="4617720" y="2340864"/>
+            <a:ext cx="2953512" cy="1554480"/>
           </a:xfrm>
           <a:prstGeom prst="rect">
             <a:avLst/>
@@ -20335,7 +19662,7 @@
           <a:p>
             <a:pPr>
               <a:spcBef>
-                <a:spcPts val="800"/>
+                <a:spcPts val="1000"/>
               </a:spcBef>
               <a:spcAft>
                 <a:spcPts val="0"/>
@@ -20357,34 +19684,34 @@
                 <a:spcPct val="120000"/>
               </a:lnSpc>
               <a:spcBef>
-                <a:spcPts val="1200"/>
+                <a:spcPts val="1400"/>
               </a:spcBef>
               <a:spcAft>
                 <a:spcPts val="0"/>
               </a:spcAft>
             </a:pPr>
             <a:r>
-              <a:rPr sz="1300" b="0" i="0">
+              <a:rPr sz="1400" b="0" i="0">
                 <a:solidFill>
                   <a:srgbClr val="C6CDD1"/>
                 </a:solidFill>
                 <a:latin typeface="Segoe UI"/>
               </a:rPr>
-              <a:t>of my hours went into an integration project, not into the welding matrix. Learning ran on demand, not on schedule.</a:t>
-            </a:r>
-          </a:p>
-        </p:txBody>
-      </p:sp>
-      <p:sp>
-        <p:nvSpPr>
-          <p:cNvPr id="12" name="Rectangle 11"/>
+              <a:t>of my hours went to an integration project</a:t>
+            </a:r>
+          </a:p>
+        </p:txBody>
+      </p:sp>
+      <p:sp>
+        <p:nvSpPr>
+          <p:cNvPr id="11" name="Rectangle 10"/>
           <p:cNvSpPr/>
           <p:nvPr/>
         </p:nvSpPr>
         <p:spPr>
           <a:xfrm>
-            <a:off x="8119872" y="2139696"/>
-            <a:ext cx="3611880" cy="2578608"/>
+            <a:off x="8119872" y="2048256"/>
+            <a:ext cx="3611880" cy="2103120"/>
           </a:xfrm>
           <a:prstGeom prst="rect">
             <a:avLst/>
@@ -20407,14 +19734,14 @@
       </p:sp>
       <p:sp>
         <p:nvSpPr>
-          <p:cNvPr id="13" name="TextBox 12"/>
+          <p:cNvPr id="12" name="TextBox 11"/>
           <p:cNvSpPr txBox="1"/>
           <p:nvPr/>
         </p:nvSpPr>
         <p:spPr>
           <a:xfrm>
-            <a:off x="8449056" y="2414016"/>
-            <a:ext cx="2953512" cy="1920240"/>
+            <a:off x="8449056" y="2340864"/>
+            <a:ext cx="2953512" cy="1554480"/>
           </a:xfrm>
           <a:prstGeom prst="rect">
             <a:avLst/>
@@ -20448,7 +19775,7 @@
           <a:p>
             <a:pPr>
               <a:spcBef>
-                <a:spcPts val="800"/>
+                <a:spcPts val="1000"/>
               </a:spcBef>
               <a:spcAft>
                 <a:spcPts val="0"/>
@@ -20470,34 +19797,34 @@
                 <a:spcPct val="120000"/>
               </a:lnSpc>
               <a:spcBef>
-                <a:spcPts val="1200"/>
+                <a:spcPts val="1400"/>
               </a:spcBef>
               <a:spcAft>
                 <a:spcPts val="0"/>
               </a:spcAft>
             </a:pPr>
             <a:r>
-              <a:rPr sz="1300" b="0" i="0">
+              <a:rPr sz="1400" b="0" i="0">
                 <a:solidFill>
                   <a:srgbClr val="C6CDD1"/>
                 </a:solidFill>
                 <a:latin typeface="Segoe UI"/>
               </a:rPr>
-              <a:t>commitments before January 1. None of them cost money. Every one of them costs calendar.</a:t>
-            </a:r>
-          </a:p>
-        </p:txBody>
-      </p:sp>
-      <p:sp>
-        <p:nvSpPr>
-          <p:cNvPr id="14" name="Rectangle 13"/>
+              <a:t>commitments, and none of them cost money</a:t>
+            </a:r>
+          </a:p>
+        </p:txBody>
+      </p:sp>
+      <p:sp>
+        <p:nvSpPr>
+          <p:cNvPr id="13" name="Rectangle 12"/>
           <p:cNvSpPr/>
           <p:nvPr/>
         </p:nvSpPr>
         <p:spPr>
           <a:xfrm>
-            <a:off x="457200" y="4992624"/>
-            <a:ext cx="11274552" cy="914400"/>
+            <a:off x="457200" y="4626864"/>
+            <a:ext cx="11274552" cy="1005840"/>
           </a:xfrm>
           <a:prstGeom prst="rect">
             <a:avLst/>
@@ -20520,14 +19847,14 @@
       </p:sp>
       <p:sp>
         <p:nvSpPr>
-          <p:cNvPr id="15" name="TextBox 14"/>
+          <p:cNvPr id="14" name="TextBox 13"/>
           <p:cNvSpPr txBox="1"/>
           <p:nvPr/>
         </p:nvSpPr>
         <p:spPr>
           <a:xfrm>
-            <a:off x="841248" y="5175504"/>
-            <a:ext cx="10515600" cy="548640"/>
+            <a:off x="841248" y="4828032"/>
+            <a:ext cx="10515600" cy="640080"/>
           </a:xfrm>
           <a:prstGeom prst="rect">
             <a:avLst/>
@@ -20549,55 +19876,13 @@
               </a:spcAft>
             </a:pPr>
             <a:r>
-              <a:rPr sz="1600" b="1" i="0">
+              <a:rPr sz="2000" b="1" i="0">
                 <a:solidFill>
                   <a:srgbClr val="051C2C"/>
                 </a:solidFill>
                 <a:latin typeface="Segoe UI"/>
               </a:rPr>
-              <a:t>By January 1 I can be certified at Levels I and L — if those four get a date.</a:t>
-            </a:r>
-          </a:p>
-        </p:txBody>
-      </p:sp>
-      <p:sp>
-        <p:nvSpPr>
-          <p:cNvPr id="16" name="TextBox 15"/>
-          <p:cNvSpPr txBox="1"/>
-          <p:nvPr/>
-        </p:nvSpPr>
-        <p:spPr>
-          <a:xfrm>
-            <a:off x="457200" y="6181344"/>
-            <a:ext cx="11274552" cy="274320"/>
-          </a:xfrm>
-          <a:prstGeom prst="rect">
-            <a:avLst/>
-          </a:prstGeom>
-          <a:noFill/>
-        </p:spPr>
-        <p:txBody>
-          <a:bodyPr wrap="square" lIns="0" rIns="0" tIns="0" bIns="0" anchor="t">
-            <a:spAutoFit/>
-          </a:bodyPr>
-          <a:lstStyle/>
-          <a:p>
-            <a:pPr algn="l">
-              <a:spcBef>
-                <a:spcPts val="0"/>
-              </a:spcBef>
-              <a:spcAft>
-                <a:spcPts val="0"/>
-              </a:spcAft>
-            </a:pPr>
-            <a:r>
-              <a:rPr sz="1250" b="0" i="0">
-                <a:solidFill>
-                  <a:srgbClr val="6E7C87"/>
-                </a:solidFill>
-                <a:latin typeface="Segoe UI"/>
-              </a:rPr>
-              <a:t>Everything after this slide is the evidence behind those three numbers.</a:t>
+              <a:t>By January 1 I can be certified at Levels I and L.</a:t>
             </a:r>
           </a:p>
         </p:txBody>
@@ -20607,6 +19892,18 @@
   <p:clrMapOvr>
     <a:masterClrMapping/>
   </p:clrMapOvr>
+  <mc:AlternateContent xmlns:mc="http://schemas.openxmlformats.org/markup-compatibility/2006">
+    <mc:Choice xmlns:p159="http://schemas.microsoft.com/office/powerpoint/2015/09/main" Requires="p159">
+      <p:transition xmlns:p14="http://schemas.microsoft.com/office/powerpoint/2010/main" spd="slow" p14:dur="1250">
+        <p159:morph option="byObject"/>
+      </p:transition>
+    </mc:Choice>
+    <mc:Fallback>
+      <p:transition xmlns:p14="http://schemas.microsoft.com/office/powerpoint/2010/main" spd="slow">
+        <p:fade/>
+      </p:transition>
+    </mc:Fallback>
+  </mc:AlternateContent>
 </p:sld>
 </file>
 
@@ -20825,56 +20122,14 @@
       </p:sp>
       <p:sp>
         <p:nvSpPr>
-          <p:cNvPr id="7" name="TextBox 6"/>
-          <p:cNvSpPr txBox="1"/>
-          <p:nvPr/>
-        </p:nvSpPr>
-        <p:spPr>
-          <a:xfrm>
-            <a:off x="457200" y="1481328"/>
-            <a:ext cx="10607040" cy="310896"/>
-          </a:xfrm>
-          <a:prstGeom prst="rect">
-            <a:avLst/>
-          </a:prstGeom>
-          <a:noFill/>
-        </p:spPr>
-        <p:txBody>
-          <a:bodyPr wrap="square" lIns="0" rIns="0" tIns="0" bIns="0" anchor="t">
-            <a:spAutoFit/>
-          </a:bodyPr>
-          <a:lstStyle/>
-          <a:p>
-            <a:pPr algn="l">
-              <a:spcBef>
-                <a:spcPts val="0"/>
-              </a:spcBef>
-              <a:spcAft>
-                <a:spcPts val="0"/>
-              </a:spcAft>
-            </a:pPr>
-            <a:r>
-              <a:rPr sz="1300" b="0" i="0">
-                <a:solidFill>
-                  <a:srgbClr val="6E7C87"/>
-                </a:solidFill>
-                <a:latin typeface="Segoe UI"/>
-              </a:rPr>
-              <a:t>Robotic GMAW — exhaust systems</a:t>
-            </a:r>
-          </a:p>
-        </p:txBody>
-      </p:sp>
-      <p:sp>
-        <p:nvSpPr>
-          <p:cNvPr id="8" name="Rectangle 7"/>
+          <p:cNvPr id="7" name="Rectangle 6"/>
           <p:cNvSpPr/>
           <p:nvPr/>
         </p:nvSpPr>
         <p:spPr>
           <a:xfrm>
-            <a:off x="457200" y="2267712"/>
-            <a:ext cx="2612898" cy="2176272"/>
+            <a:off x="457200" y="2103120"/>
+            <a:ext cx="2612898" cy="1828800"/>
           </a:xfrm>
           <a:prstGeom prst="rect">
             <a:avLst/>
@@ -20897,14 +20152,14 @@
       </p:sp>
       <p:sp>
         <p:nvSpPr>
-          <p:cNvPr id="9" name="TextBox 8"/>
+          <p:cNvPr id="8" name="TextBox 7"/>
           <p:cNvSpPr txBox="1"/>
           <p:nvPr/>
         </p:nvSpPr>
         <p:spPr>
           <a:xfrm>
-            <a:off x="731520" y="2560320"/>
-            <a:ext cx="2064257" cy="274320"/>
+            <a:off x="731520" y="2432304"/>
+            <a:ext cx="2064257" cy="1188720"/>
           </a:xfrm>
           <a:prstGeom prst="rect">
             <a:avLst/>
@@ -20938,10 +20193,10 @@
           <a:p>
             <a:pPr>
               <a:lnSpc>
-                <a:spcPct val="105000"/>
+                <a:spcPct val="108000"/>
               </a:lnSpc>
               <a:spcBef>
-                <a:spcPts val="1000"/>
+                <a:spcPts val="1200"/>
               </a:spcBef>
               <a:spcAft>
                 <a:spcPts val="0"/>
@@ -20957,40 +20212,18 @@
               <a:t>Exhaust systems</a:t>
             </a:r>
           </a:p>
-          <a:p>
-            <a:pPr>
-              <a:lnSpc>
-                <a:spcPct val="115000"/>
-              </a:lnSpc>
-              <a:spcBef>
-                <a:spcPts val="1000"/>
-              </a:spcBef>
-              <a:spcAft>
-                <a:spcPts val="0"/>
-              </a:spcAft>
-            </a:pPr>
-            <a:r>
-              <a:rPr sz="1150" b="0" i="0">
-                <a:solidFill>
-                  <a:srgbClr val="6E7C87"/>
-                </a:solidFill>
-                <a:latin typeface="Segoe UI"/>
-              </a:rPr>
-              <a:t>Clean Air business unit</a:t>
-            </a:r>
-          </a:p>
-        </p:txBody>
-      </p:sp>
-      <p:sp>
-        <p:nvSpPr>
-          <p:cNvPr id="10" name="Rectangle 9"/>
+        </p:txBody>
+      </p:sp>
+      <p:sp>
+        <p:nvSpPr>
+          <p:cNvPr id="9" name="Rectangle 8"/>
           <p:cNvSpPr/>
           <p:nvPr/>
         </p:nvSpPr>
         <p:spPr>
           <a:xfrm>
-            <a:off x="3344418" y="2267712"/>
-            <a:ext cx="2612898" cy="2176272"/>
+            <a:off x="3344418" y="2103120"/>
+            <a:ext cx="2612898" cy="1828800"/>
           </a:xfrm>
           <a:prstGeom prst="rect">
             <a:avLst/>
@@ -21013,14 +20246,14 @@
       </p:sp>
       <p:sp>
         <p:nvSpPr>
-          <p:cNvPr id="11" name="TextBox 10"/>
+          <p:cNvPr id="10" name="TextBox 9"/>
           <p:cNvSpPr txBox="1"/>
           <p:nvPr/>
         </p:nvSpPr>
         <p:spPr>
           <a:xfrm>
-            <a:off x="3618738" y="2560320"/>
-            <a:ext cx="2064257" cy="274320"/>
+            <a:off x="3618738" y="2432304"/>
+            <a:ext cx="2064257" cy="1188720"/>
           </a:xfrm>
           <a:prstGeom prst="rect">
             <a:avLst/>
@@ -21054,10 +20287,10 @@
           <a:p>
             <a:pPr>
               <a:lnSpc>
-                <a:spcPct val="105000"/>
+                <a:spcPct val="108000"/>
               </a:lnSpc>
               <a:spcBef>
-                <a:spcPts val="1000"/>
+                <a:spcPts val="1200"/>
               </a:spcBef>
               <a:spcAft>
                 <a:spcPts val="0"/>
@@ -21070,43 +20303,21 @@
                 </a:solidFill>
                 <a:latin typeface="Segoe UI"/>
               </a:rPr>
-              <a:t>GMAW</a:t>
-            </a:r>
-          </a:p>
-          <a:p>
-            <a:pPr>
-              <a:lnSpc>
-                <a:spcPct val="115000"/>
-              </a:lnSpc>
-              <a:spcBef>
-                <a:spcPts val="1000"/>
-              </a:spcBef>
-              <a:spcAft>
-                <a:spcPts val="0"/>
-              </a:spcAft>
-            </a:pPr>
-            <a:r>
-              <a:rPr sz="1150" b="0" i="0">
-                <a:solidFill>
-                  <a:srgbClr val="6E7C87"/>
-                </a:solidFill>
-                <a:latin typeface="Segoe UI"/>
-              </a:rPr>
-              <a:t>MIG / MAG · robotic cells</a:t>
-            </a:r>
-          </a:p>
-        </p:txBody>
-      </p:sp>
-      <p:sp>
-        <p:nvSpPr>
-          <p:cNvPr id="12" name="Rectangle 11"/>
+              <a:t>GMAW (MIG/MAG)</a:t>
+            </a:r>
+          </a:p>
+        </p:txBody>
+      </p:sp>
+      <p:sp>
+        <p:nvSpPr>
+          <p:cNvPr id="11" name="Rectangle 10"/>
           <p:cNvSpPr/>
           <p:nvPr/>
         </p:nvSpPr>
         <p:spPr>
           <a:xfrm>
-            <a:off x="6231636" y="2267712"/>
-            <a:ext cx="2612898" cy="2176272"/>
+            <a:off x="6231636" y="2103120"/>
+            <a:ext cx="2612898" cy="1828800"/>
           </a:xfrm>
           <a:prstGeom prst="rect">
             <a:avLst/>
@@ -21129,14 +20340,14 @@
       </p:sp>
       <p:sp>
         <p:nvSpPr>
-          <p:cNvPr id="13" name="TextBox 12"/>
+          <p:cNvPr id="12" name="TextBox 11"/>
           <p:cNvSpPr txBox="1"/>
           <p:nvPr/>
         </p:nvSpPr>
         <p:spPr>
           <a:xfrm>
-            <a:off x="6505956" y="2560320"/>
-            <a:ext cx="2064257" cy="274320"/>
+            <a:off x="6505956" y="2432304"/>
+            <a:ext cx="2064257" cy="1188720"/>
           </a:xfrm>
           <a:prstGeom prst="rect">
             <a:avLst/>
@@ -21170,10 +20381,10 @@
           <a:p>
             <a:pPr>
               <a:lnSpc>
-                <a:spcPct val="105000"/>
+                <a:spcPct val="108000"/>
               </a:lnSpc>
               <a:spcBef>
-                <a:spcPts val="1000"/>
+                <a:spcPts val="1200"/>
               </a:spcBef>
               <a:spcAft>
                 <a:spcPts val="0"/>
@@ -21189,40 +20400,18 @@
               <a:t>Yaskawa</a:t>
             </a:r>
           </a:p>
-          <a:p>
-            <a:pPr>
-              <a:lnSpc>
-                <a:spcPct val="115000"/>
-              </a:lnSpc>
-              <a:spcBef>
-                <a:spcPts val="1000"/>
-              </a:spcBef>
-              <a:spcAft>
-                <a:spcPts val="0"/>
-              </a:spcAft>
-            </a:pPr>
-            <a:r>
-              <a:rPr sz="1150" b="0" i="0">
-                <a:solidFill>
-                  <a:srgbClr val="6E7C87"/>
-                </a:solidFill>
-                <a:latin typeface="Segoe UI"/>
-              </a:rPr>
-              <a:t>Most of the cells · one Fanuc</a:t>
-            </a:r>
-          </a:p>
-        </p:txBody>
-      </p:sp>
-      <p:sp>
-        <p:nvSpPr>
-          <p:cNvPr id="14" name="Rectangle 13"/>
+        </p:txBody>
+      </p:sp>
+      <p:sp>
+        <p:nvSpPr>
+          <p:cNvPr id="13" name="Rectangle 12"/>
           <p:cNvSpPr/>
           <p:nvPr/>
         </p:nvSpPr>
         <p:spPr>
           <a:xfrm>
-            <a:off x="9118854" y="2267712"/>
-            <a:ext cx="2612898" cy="2176272"/>
+            <a:off x="9118854" y="2103120"/>
+            <a:ext cx="2612898" cy="1828800"/>
           </a:xfrm>
           <a:prstGeom prst="rect">
             <a:avLst/>
@@ -21245,14 +20434,14 @@
       </p:sp>
       <p:sp>
         <p:nvSpPr>
-          <p:cNvPr id="15" name="TextBox 14"/>
+          <p:cNvPr id="14" name="TextBox 13"/>
           <p:cNvSpPr txBox="1"/>
           <p:nvPr/>
         </p:nvSpPr>
         <p:spPr>
           <a:xfrm>
-            <a:off x="9393174" y="2560320"/>
-            <a:ext cx="2064257" cy="274320"/>
+            <a:off x="9393174" y="2432304"/>
+            <a:ext cx="2064257" cy="1188720"/>
           </a:xfrm>
           <a:prstGeom prst="rect">
             <a:avLst/>
@@ -21286,10 +20475,10 @@
           <a:p>
             <a:pPr>
               <a:lnSpc>
-                <a:spcPct val="105000"/>
+                <a:spcPct val="108000"/>
               </a:lnSpc>
               <a:spcBef>
-                <a:spcPts val="1000"/>
+                <a:spcPts val="1200"/>
               </a:spcBef>
               <a:spcAft>
                 <a:spcPts val="0"/>
@@ -21302,43 +20491,21 @@
                 </a:solidFill>
                 <a:latin typeface="Segoe UI"/>
               </a:rPr>
-              <a:t>SKS · Miller</a:t>
-            </a:r>
-          </a:p>
-          <a:p>
-            <a:pPr>
-              <a:lnSpc>
-                <a:spcPct val="115000"/>
-              </a:lnSpc>
-              <a:spcBef>
-                <a:spcPts val="1000"/>
-              </a:spcBef>
-              <a:spcAft>
-                <a:spcPts val="0"/>
-              </a:spcAft>
-            </a:pPr>
-            <a:r>
-              <a:rPr sz="1150" b="0" i="0">
-                <a:solidFill>
-                  <a:srgbClr val="6E7C87"/>
-                </a:solidFill>
-                <a:latin typeface="Segoe UI"/>
-              </a:rPr>
-              <a:t>Welding systems and controls</a:t>
-            </a:r>
-          </a:p>
-        </p:txBody>
-      </p:sp>
-      <p:sp>
-        <p:nvSpPr>
-          <p:cNvPr id="16" name="Rectangle 15"/>
+              <a:t>SKS, Miller</a:t>
+            </a:r>
+          </a:p>
+        </p:txBody>
+      </p:sp>
+      <p:sp>
+        <p:nvSpPr>
+          <p:cNvPr id="15" name="Rectangle 14"/>
           <p:cNvSpPr/>
           <p:nvPr/>
         </p:nvSpPr>
         <p:spPr>
           <a:xfrm>
-            <a:off x="457200" y="4864608"/>
-            <a:ext cx="11274552" cy="1042415"/>
+            <a:off x="457200" y="4443984"/>
+            <a:ext cx="11274552" cy="1188720"/>
           </a:xfrm>
           <a:prstGeom prst="rect">
             <a:avLst/>
@@ -21361,13 +20528,13 @@
       </p:sp>
       <p:sp>
         <p:nvSpPr>
-          <p:cNvPr id="17" name="TextBox 16"/>
+          <p:cNvPr id="16" name="TextBox 15"/>
           <p:cNvSpPr txBox="1"/>
           <p:nvPr/>
         </p:nvSpPr>
         <p:spPr>
           <a:xfrm>
-            <a:off x="841248" y="5084064"/>
+            <a:off x="841248" y="4718304"/>
             <a:ext cx="10515600" cy="640080"/>
           </a:xfrm>
           <a:prstGeom prst="rect">
@@ -21390,32 +20557,13 @@
               </a:spcAft>
             </a:pPr>
             <a:r>
-              <a:rPr sz="1500" b="1" i="0">
+              <a:rPr sz="2000" b="1" i="0">
                 <a:solidFill>
                   <a:srgbClr val="D5FB00"/>
                 </a:solidFill>
                 <a:latin typeface="Segoe UI"/>
               </a:rPr>
               <a:t>So I could not learn by waiting for a breakdown.</a:t>
-            </a:r>
-          </a:p>
-          <a:p>
-            <a:pPr>
-              <a:spcBef>
-                <a:spcPts val="600"/>
-              </a:spcBef>
-              <a:spcAft>
-                <a:spcPts val="0"/>
-              </a:spcAft>
-            </a:pPr>
-            <a:r>
-              <a:rPr sz="1300" b="0" i="0">
-                <a:solidFill>
-                  <a:srgbClr val="FFFFFF"/>
-                </a:solidFill>
-                <a:latin typeface="Segoe UI"/>
-              </a:rPr>
-              <a:t>My hours went wherever the work was — which is exactly why my ILUO progress looks the way it does.</a:t>
             </a:r>
           </a:p>
         </p:txBody>
@@ -21425,6 +20573,18 @@
   <p:clrMapOvr>
     <a:masterClrMapping/>
   </p:clrMapOvr>
+  <mc:AlternateContent xmlns:mc="http://schemas.openxmlformats.org/markup-compatibility/2006">
+    <mc:Choice xmlns:p159="http://schemas.microsoft.com/office/powerpoint/2015/09/main" Requires="p159">
+      <p:transition xmlns:p14="http://schemas.microsoft.com/office/powerpoint/2010/main" spd="slow" p14:dur="1250">
+        <p159:morph option="byObject"/>
+      </p:transition>
+    </mc:Choice>
+    <mc:Fallback>
+      <p:transition xmlns:p14="http://schemas.microsoft.com/office/powerpoint/2010/main" spd="slow">
+        <p:fade/>
+      </p:transition>
+    </mc:Fallback>
+  </mc:AlternateContent>
 </p:sld>
 </file>
 
@@ -21643,56 +20803,14 @@
       </p:sp>
       <p:sp>
         <p:nvSpPr>
-          <p:cNvPr id="7" name="TextBox 6"/>
-          <p:cNvSpPr txBox="1"/>
-          <p:nvPr/>
-        </p:nvSpPr>
-        <p:spPr>
-          <a:xfrm>
-            <a:off x="457200" y="1481328"/>
-            <a:ext cx="10607040" cy="310896"/>
-          </a:xfrm>
-          <a:prstGeom prst="rect">
-            <a:avLst/>
-          </a:prstGeom>
-          <a:noFill/>
-        </p:spPr>
-        <p:txBody>
-          <a:bodyPr wrap="square" lIns="0" rIns="0" tIns="0" bIns="0" anchor="t">
-            <a:spAutoFit/>
-          </a:bodyPr>
-          <a:lstStyle/>
-          <a:p>
-            <a:pPr algn="l">
-              <a:spcBef>
-                <a:spcPts val="0"/>
-              </a:spcBef>
-              <a:spcAft>
-                <a:spcPts val="0"/>
-              </a:spcAft>
-            </a:pPr>
-            <a:r>
-              <a:rPr sz="1300" b="0" i="0">
-                <a:solidFill>
-                  <a:srgbClr val="6E7C87"/>
-                </a:solidFill>
-                <a:latin typeface="Segoe UI"/>
-              </a:rPr>
-              <a:t>23 skills  ·  40 hours  ·  a gate at every level</a:t>
-            </a:r>
-          </a:p>
-        </p:txBody>
-      </p:sp>
-      <p:sp>
-        <p:nvSpPr>
-          <p:cNvPr id="8" name="Rectangle 7"/>
+          <p:cNvPr id="7" name="Rectangle 6"/>
           <p:cNvSpPr/>
           <p:nvPr/>
         </p:nvSpPr>
         <p:spPr>
           <a:xfrm>
-            <a:off x="457200" y="2139696"/>
-            <a:ext cx="2612898" cy="3145536"/>
+            <a:off x="457200" y="2048256"/>
+            <a:ext cx="2612898" cy="2798064"/>
           </a:xfrm>
           <a:prstGeom prst="rect">
             <a:avLst/>
@@ -21715,14 +20833,14 @@
       </p:sp>
       <p:sp>
         <p:nvSpPr>
-          <p:cNvPr id="9" name="Oval 8"/>
+          <p:cNvPr id="8" name="!!iluo_I"/>
           <p:cNvSpPr/>
           <p:nvPr/>
         </p:nvSpPr>
         <p:spPr>
           <a:xfrm>
-            <a:off x="731520" y="2432304"/>
-            <a:ext cx="658368" cy="658368"/>
+            <a:off x="731520" y="2340864"/>
+            <a:ext cx="713232" cy="713232"/>
           </a:xfrm>
           <a:prstGeom prst="ellipse">
             <a:avLst/>
@@ -21748,7 +20866,7 @@
               </a:spcAft>
             </a:pPr>
             <a:r>
-              <a:rPr sz="2600" b="1" i="0">
+              <a:rPr sz="2800" b="1" i="0">
                 <a:solidFill>
                   <a:srgbClr val="051C2C"/>
                 </a:solidFill>
@@ -21761,14 +20879,14 @@
       </p:sp>
       <p:sp>
         <p:nvSpPr>
-          <p:cNvPr id="10" name="TextBox 9"/>
+          <p:cNvPr id="9" name="TextBox 8"/>
           <p:cNvSpPr txBox="1"/>
           <p:nvPr/>
         </p:nvSpPr>
         <p:spPr>
           <a:xfrm>
             <a:off x="731520" y="3346704"/>
-            <a:ext cx="2064257" cy="274320"/>
+            <a:ext cx="2064257" cy="1280160"/>
           </a:xfrm>
           <a:prstGeom prst="rect">
             <a:avLst/>
@@ -21790,7 +20908,7 @@
               </a:spcAft>
             </a:pPr>
             <a:r>
-              <a:rPr sz="1800" b="1" i="0">
+              <a:rPr sz="1900" b="1" i="0">
                 <a:solidFill>
                   <a:srgbClr val="FFFFFF"/>
                 </a:solidFill>
@@ -21805,14 +20923,14 @@
                 <a:spcPct val="115000"/>
               </a:lnSpc>
               <a:spcBef>
-                <a:spcPts val="600"/>
+                <a:spcPts val="800"/>
               </a:spcBef>
               <a:spcAft>
                 <a:spcPts val="0"/>
               </a:spcAft>
             </a:pPr>
             <a:r>
-              <a:rPr sz="1300" b="0" i="0">
+              <a:rPr sz="1350" b="0" i="0">
                 <a:solidFill>
                   <a:srgbClr val="C6CDD1"/>
                 </a:solidFill>
@@ -21831,7 +20949,7 @@
               </a:spcAft>
             </a:pPr>
             <a:r>
-              <a:rPr sz="1250" b="1" i="0">
+              <a:rPr sz="1300" b="1" i="0">
                 <a:solidFill>
                   <a:srgbClr val="D5FB00"/>
                 </a:solidFill>
@@ -21840,39 +20958,17 @@
               <a:t>9 skills · 4 h</a:t>
             </a:r>
           </a:p>
-          <a:p>
-            <a:pPr>
-              <a:lnSpc>
-                <a:spcPct val="115000"/>
-              </a:lnSpc>
-              <a:spcBef>
-                <a:spcPts val="500"/>
-              </a:spcBef>
-              <a:spcAft>
-                <a:spcPts val="0"/>
-              </a:spcAft>
-            </a:pPr>
-            <a:r>
-              <a:rPr sz="1100" b="0" i="0">
-                <a:solidFill>
-                  <a:srgbClr val="9FAFBA"/>
-                </a:solidFill>
-                <a:latin typeface="Segoe UI"/>
-              </a:rPr>
-              <a:t>Written exam, min. 8.0</a:t>
-            </a:r>
-          </a:p>
-        </p:txBody>
-      </p:sp>
-      <p:sp>
-        <p:nvSpPr>
-          <p:cNvPr id="11" name="Chevron 10"/>
+        </p:txBody>
+      </p:sp>
+      <p:sp>
+        <p:nvSpPr>
+          <p:cNvPr id="10" name="Chevron 9"/>
           <p:cNvSpPr/>
           <p:nvPr/>
         </p:nvSpPr>
         <p:spPr>
           <a:xfrm>
-            <a:off x="3106674" y="3602736"/>
+            <a:off x="3106674" y="3529584"/>
             <a:ext cx="201168" cy="201168"/>
           </a:xfrm>
           <a:prstGeom prst="chevron">
@@ -21896,14 +20992,14 @@
       </p:sp>
       <p:sp>
         <p:nvSpPr>
-          <p:cNvPr id="12" name="Rectangle 11"/>
+          <p:cNvPr id="11" name="Rectangle 10"/>
           <p:cNvSpPr/>
           <p:nvPr/>
         </p:nvSpPr>
         <p:spPr>
           <a:xfrm>
-            <a:off x="3344418" y="2139696"/>
-            <a:ext cx="2612898" cy="3145536"/>
+            <a:off x="3344418" y="2048256"/>
+            <a:ext cx="2612898" cy="2798064"/>
           </a:xfrm>
           <a:prstGeom prst="rect">
             <a:avLst/>
@@ -21926,14 +21022,14 @@
       </p:sp>
       <p:sp>
         <p:nvSpPr>
-          <p:cNvPr id="13" name="Oval 12"/>
+          <p:cNvPr id="12" name="!!iluo_L"/>
           <p:cNvSpPr/>
           <p:nvPr/>
         </p:nvSpPr>
         <p:spPr>
           <a:xfrm>
-            <a:off x="3618738" y="2432304"/>
-            <a:ext cx="658368" cy="658368"/>
+            <a:off x="3618738" y="2340864"/>
+            <a:ext cx="713232" cy="713232"/>
           </a:xfrm>
           <a:prstGeom prst="ellipse">
             <a:avLst/>
@@ -21959,7 +21055,7 @@
               </a:spcAft>
             </a:pPr>
             <a:r>
-              <a:rPr sz="2600" b="1" i="0">
+              <a:rPr sz="2800" b="1" i="0">
                 <a:solidFill>
                   <a:srgbClr val="051C2C"/>
                 </a:solidFill>
@@ -21972,14 +21068,14 @@
       </p:sp>
       <p:sp>
         <p:nvSpPr>
-          <p:cNvPr id="14" name="TextBox 13"/>
+          <p:cNvPr id="13" name="TextBox 12"/>
           <p:cNvSpPr txBox="1"/>
           <p:nvPr/>
         </p:nvSpPr>
         <p:spPr>
           <a:xfrm>
             <a:off x="3618738" y="3346704"/>
-            <a:ext cx="2064257" cy="274320"/>
+            <a:ext cx="2064257" cy="1280160"/>
           </a:xfrm>
           <a:prstGeom prst="rect">
             <a:avLst/>
@@ -22001,7 +21097,7 @@
               </a:spcAft>
             </a:pPr>
             <a:r>
-              <a:rPr sz="1800" b="1" i="0">
+              <a:rPr sz="1900" b="1" i="0">
                 <a:solidFill>
                   <a:srgbClr val="FFFFFF"/>
                 </a:solidFill>
@@ -22016,14 +21112,14 @@
                 <a:spcPct val="115000"/>
               </a:lnSpc>
               <a:spcBef>
-                <a:spcPts val="600"/>
+                <a:spcPts val="800"/>
               </a:spcBef>
               <a:spcAft>
                 <a:spcPts val="0"/>
               </a:spcAft>
             </a:pPr>
             <a:r>
-              <a:rPr sz="1300" b="0" i="0">
+              <a:rPr sz="1350" b="0" i="0">
                 <a:solidFill>
                   <a:srgbClr val="C6CDD1"/>
                 </a:solidFill>
@@ -22042,7 +21138,7 @@
               </a:spcAft>
             </a:pPr>
             <a:r>
-              <a:rPr sz="1250" b="1" i="0">
+              <a:rPr sz="1300" b="1" i="0">
                 <a:solidFill>
                   <a:srgbClr val="D5FB00"/>
                 </a:solidFill>
@@ -22051,39 +21147,17 @@
               <a:t>5 skills · 8 h</a:t>
             </a:r>
           </a:p>
-          <a:p>
-            <a:pPr>
-              <a:lnSpc>
-                <a:spcPct val="115000"/>
-              </a:lnSpc>
-              <a:spcBef>
-                <a:spcPts val="500"/>
-              </a:spcBef>
-              <a:spcAft>
-                <a:spcPts val="0"/>
-              </a:spcAft>
-            </a:pPr>
-            <a:r>
-              <a:rPr sz="1100" b="0" i="0">
-                <a:solidFill>
-                  <a:srgbClr val="9FAFBA"/>
-                </a:solidFill>
-                <a:latin typeface="Segoe UI"/>
-              </a:rPr>
-              <a:t>Validation on the floor</a:t>
-            </a:r>
-          </a:p>
-        </p:txBody>
-      </p:sp>
-      <p:sp>
-        <p:nvSpPr>
-          <p:cNvPr id="15" name="Chevron 14"/>
+        </p:txBody>
+      </p:sp>
+      <p:sp>
+        <p:nvSpPr>
+          <p:cNvPr id="14" name="Chevron 13"/>
           <p:cNvSpPr/>
           <p:nvPr/>
         </p:nvSpPr>
         <p:spPr>
           <a:xfrm>
-            <a:off x="5993892" y="3602736"/>
+            <a:off x="5993892" y="3529584"/>
             <a:ext cx="201168" cy="201168"/>
           </a:xfrm>
           <a:prstGeom prst="chevron">
@@ -22107,14 +21181,14 @@
       </p:sp>
       <p:sp>
         <p:nvSpPr>
-          <p:cNvPr id="16" name="Rectangle 15"/>
+          <p:cNvPr id="15" name="Rectangle 14"/>
           <p:cNvSpPr/>
           <p:nvPr/>
         </p:nvSpPr>
         <p:spPr>
           <a:xfrm>
-            <a:off x="6231636" y="2139696"/>
-            <a:ext cx="2612898" cy="3145536"/>
+            <a:off x="6231636" y="2048256"/>
+            <a:ext cx="2612898" cy="2798064"/>
           </a:xfrm>
           <a:prstGeom prst="rect">
             <a:avLst/>
@@ -22137,14 +21211,14 @@
       </p:sp>
       <p:sp>
         <p:nvSpPr>
-          <p:cNvPr id="17" name="Oval 16"/>
+          <p:cNvPr id="16" name="!!iluo_U"/>
           <p:cNvSpPr/>
           <p:nvPr/>
         </p:nvSpPr>
         <p:spPr>
           <a:xfrm>
-            <a:off x="6505956" y="2432304"/>
-            <a:ext cx="658368" cy="658368"/>
+            <a:off x="6505956" y="2340864"/>
+            <a:ext cx="713232" cy="713232"/>
           </a:xfrm>
           <a:prstGeom prst="ellipse">
             <a:avLst/>
@@ -22170,7 +21244,7 @@
               </a:spcAft>
             </a:pPr>
             <a:r>
-              <a:rPr sz="2600" b="1" i="0">
+              <a:rPr sz="2800" b="1" i="0">
                 <a:solidFill>
                   <a:srgbClr val="051C2C"/>
                 </a:solidFill>
@@ -22183,14 +21257,14 @@
       </p:sp>
       <p:sp>
         <p:nvSpPr>
-          <p:cNvPr id="18" name="TextBox 17"/>
+          <p:cNvPr id="17" name="TextBox 16"/>
           <p:cNvSpPr txBox="1"/>
           <p:nvPr/>
         </p:nvSpPr>
         <p:spPr>
           <a:xfrm>
             <a:off x="6505956" y="3346704"/>
-            <a:ext cx="2064257" cy="274320"/>
+            <a:ext cx="2064257" cy="1280160"/>
           </a:xfrm>
           <a:prstGeom prst="rect">
             <a:avLst/>
@@ -22212,7 +21286,7 @@
               </a:spcAft>
             </a:pPr>
             <a:r>
-              <a:rPr sz="1800" b="1" i="0">
+              <a:rPr sz="1900" b="1" i="0">
                 <a:solidFill>
                   <a:srgbClr val="FFFFFF"/>
                 </a:solidFill>
@@ -22227,14 +21301,14 @@
                 <a:spcPct val="115000"/>
               </a:lnSpc>
               <a:spcBef>
-                <a:spcPts val="600"/>
+                <a:spcPts val="800"/>
               </a:spcBef>
               <a:spcAft>
                 <a:spcPts val="0"/>
               </a:spcAft>
             </a:pPr>
             <a:r>
-              <a:rPr sz="1300" b="0" i="0">
+              <a:rPr sz="1350" b="0" i="0">
                 <a:solidFill>
                   <a:srgbClr val="C6CDD1"/>
                 </a:solidFill>
@@ -22253,7 +21327,7 @@
               </a:spcAft>
             </a:pPr>
             <a:r>
-              <a:rPr sz="1250" b="1" i="0">
+              <a:rPr sz="1300" b="1" i="0">
                 <a:solidFill>
                   <a:srgbClr val="D5FB00"/>
                 </a:solidFill>
@@ -22262,39 +21336,17 @@
               <a:t>3 skills · 8 h</a:t>
             </a:r>
           </a:p>
-          <a:p>
-            <a:pPr>
-              <a:lnSpc>
-                <a:spcPct val="115000"/>
-              </a:lnSpc>
-              <a:spcBef>
-                <a:spcPts val="500"/>
-              </a:spcBef>
-              <a:spcAft>
-                <a:spcPts val="0"/>
-              </a:spcAft>
-            </a:pPr>
-            <a:r>
-              <a:rPr sz="1100" b="0" i="0">
-                <a:solidFill>
-                  <a:srgbClr val="9FAFBA"/>
-                </a:solidFill>
-                <a:latin typeface="Segoe UI"/>
-              </a:rPr>
-              <a:t>Practical exam</a:t>
-            </a:r>
-          </a:p>
-        </p:txBody>
-      </p:sp>
-      <p:sp>
-        <p:nvSpPr>
-          <p:cNvPr id="19" name="Chevron 18"/>
+        </p:txBody>
+      </p:sp>
+      <p:sp>
+        <p:nvSpPr>
+          <p:cNvPr id="18" name="Chevron 17"/>
           <p:cNvSpPr/>
           <p:nvPr/>
         </p:nvSpPr>
         <p:spPr>
           <a:xfrm>
-            <a:off x="8881109" y="3602736"/>
+            <a:off x="8881109" y="3529584"/>
             <a:ext cx="201168" cy="201168"/>
           </a:xfrm>
           <a:prstGeom prst="chevron">
@@ -22318,14 +21370,14 @@
       </p:sp>
       <p:sp>
         <p:nvSpPr>
-          <p:cNvPr id="20" name="Rectangle 19"/>
+          <p:cNvPr id="19" name="Rectangle 18"/>
           <p:cNvSpPr/>
           <p:nvPr/>
         </p:nvSpPr>
         <p:spPr>
           <a:xfrm>
-            <a:off x="9118854" y="2139696"/>
-            <a:ext cx="2612898" cy="3145536"/>
+            <a:off x="9118854" y="2048256"/>
+            <a:ext cx="2612898" cy="2798064"/>
           </a:xfrm>
           <a:prstGeom prst="rect">
             <a:avLst/>
@@ -22348,14 +21400,14 @@
       </p:sp>
       <p:sp>
         <p:nvSpPr>
-          <p:cNvPr id="21" name="Oval 20"/>
+          <p:cNvPr id="20" name="!!iluo_O"/>
           <p:cNvSpPr/>
           <p:nvPr/>
         </p:nvSpPr>
         <p:spPr>
           <a:xfrm>
-            <a:off x="9393174" y="2432304"/>
-            <a:ext cx="658368" cy="658368"/>
+            <a:off x="9393174" y="2340864"/>
+            <a:ext cx="713232" cy="713232"/>
           </a:xfrm>
           <a:prstGeom prst="ellipse">
             <a:avLst/>
@@ -22381,7 +21433,7 @@
               </a:spcAft>
             </a:pPr>
             <a:r>
-              <a:rPr sz="2600" b="1" i="0">
+              <a:rPr sz="2800" b="1" i="0">
                 <a:solidFill>
                   <a:srgbClr val="051C2C"/>
                 </a:solidFill>
@@ -22394,14 +21446,14 @@
       </p:sp>
       <p:sp>
         <p:nvSpPr>
-          <p:cNvPr id="22" name="TextBox 21"/>
+          <p:cNvPr id="21" name="TextBox 20"/>
           <p:cNvSpPr txBox="1"/>
           <p:nvPr/>
         </p:nvSpPr>
         <p:spPr>
           <a:xfrm>
             <a:off x="9393174" y="3346704"/>
-            <a:ext cx="2064257" cy="274320"/>
+            <a:ext cx="2064257" cy="1280160"/>
           </a:xfrm>
           <a:prstGeom prst="rect">
             <a:avLst/>
@@ -22423,7 +21475,7 @@
               </a:spcAft>
             </a:pPr>
             <a:r>
-              <a:rPr sz="1800" b="1" i="0">
+              <a:rPr sz="1900" b="1" i="0">
                 <a:solidFill>
                   <a:srgbClr val="FFFFFF"/>
                 </a:solidFill>
@@ -22438,14 +21490,14 @@
                 <a:spcPct val="115000"/>
               </a:lnSpc>
               <a:spcBef>
-                <a:spcPts val="600"/>
+                <a:spcPts val="800"/>
               </a:spcBef>
               <a:spcAft>
                 <a:spcPts val="0"/>
               </a:spcAft>
             </a:pPr>
             <a:r>
-              <a:rPr sz="1300" b="0" i="0">
+              <a:rPr sz="1350" b="0" i="0">
                 <a:solidFill>
                   <a:srgbClr val="C6CDD1"/>
                 </a:solidFill>
@@ -22464,7 +21516,7 @@
               </a:spcAft>
             </a:pPr>
             <a:r>
-              <a:rPr sz="1250" b="1" i="0">
+              <a:rPr sz="1300" b="1" i="0">
                 <a:solidFill>
                   <a:srgbClr val="D5FB00"/>
                 </a:solidFill>
@@ -22473,39 +21525,17 @@
               <a:t>6 skills · 20 h</a:t>
             </a:r>
           </a:p>
-          <a:p>
-            <a:pPr>
-              <a:lnSpc>
-                <a:spcPct val="115000"/>
-              </a:lnSpc>
-              <a:spcBef>
-                <a:spcPts val="500"/>
-              </a:spcBef>
-              <a:spcAft>
-                <a:spcPts val="0"/>
-              </a:spcAft>
-            </a:pPr>
-            <a:r>
-              <a:rPr sz="1100" b="0" i="0">
-                <a:solidFill>
-                  <a:srgbClr val="9FAFBA"/>
-                </a:solidFill>
-                <a:latin typeface="Segoe UI"/>
-              </a:rPr>
-              <a:t>Implementation review</a:t>
-            </a:r>
-          </a:p>
-        </p:txBody>
-      </p:sp>
-      <p:sp>
-        <p:nvSpPr>
-          <p:cNvPr id="23" name="TextBox 22"/>
+        </p:txBody>
+      </p:sp>
+      <p:sp>
+        <p:nvSpPr>
+          <p:cNvPr id="22" name="TextBox 21"/>
           <p:cNvSpPr txBox="1"/>
           <p:nvPr/>
         </p:nvSpPr>
         <p:spPr>
           <a:xfrm>
-            <a:off x="457200" y="5559552"/>
+            <a:off x="457200" y="5175504"/>
             <a:ext cx="11274552" cy="457200"/>
           </a:xfrm>
           <a:prstGeom prst="rect">
@@ -22531,13 +21561,13 @@
               </a:spcAft>
             </a:pPr>
             <a:r>
-              <a:rPr sz="1250" b="0" i="0">
+              <a:rPr sz="1300" b="0" i="0">
                 <a:solidFill>
                   <a:srgbClr val="6E7C87"/>
                 </a:solidFill>
                 <a:latin typeface="Segoe UI"/>
               </a:rPr>
-              <a:t>Each level assumes the one before it. Half of the total hours sit in level O — this program is built to multiply knowledge, not just to certify individuals.</a:t>
+              <a:t>Every level has its own gate: a written exam, a validation on the floor, a practical exam, an implementation review.</a:t>
             </a:r>
           </a:p>
         </p:txBody>
@@ -22547,6 +21577,18 @@
   <p:clrMapOvr>
     <a:masterClrMapping/>
   </p:clrMapOvr>
+  <mc:AlternateContent xmlns:mc="http://schemas.openxmlformats.org/markup-compatibility/2006">
+    <mc:Choice xmlns:p159="http://schemas.microsoft.com/office/powerpoint/2015/09/main" Requires="p159">
+      <p:transition xmlns:p14="http://schemas.microsoft.com/office/powerpoint/2010/main" spd="slow" p14:dur="1250">
+        <p159:morph option="byObject"/>
+      </p:transition>
+    </mc:Choice>
+    <mc:Fallback>
+      <p:transition xmlns:p14="http://schemas.microsoft.com/office/powerpoint/2010/main" spd="slow">
+        <p:fade/>
+      </p:transition>
+    </mc:Fallback>
+  </mc:AlternateContent>
 </p:sld>
 </file>
 
@@ -22765,55 +21807,13 @@
       </p:sp>
       <p:sp>
         <p:nvSpPr>
-          <p:cNvPr id="7" name="TextBox 6"/>
-          <p:cNvSpPr txBox="1"/>
-          <p:nvPr/>
-        </p:nvSpPr>
-        <p:spPr>
-          <a:xfrm>
-            <a:off x="457200" y="1481328"/>
-            <a:ext cx="10607040" cy="310896"/>
-          </a:xfrm>
-          <a:prstGeom prst="rect">
-            <a:avLst/>
-          </a:prstGeom>
-          <a:noFill/>
-        </p:spPr>
-        <p:txBody>
-          <a:bodyPr wrap="square" lIns="0" rIns="0" tIns="0" bIns="0" anchor="t">
-            <a:spAutoFit/>
-          </a:bodyPr>
-          <a:lstStyle/>
-          <a:p>
-            <a:pPr algn="l">
-              <a:spcBef>
-                <a:spcPts val="0"/>
-              </a:spcBef>
-              <a:spcAft>
-                <a:spcPts val="0"/>
-              </a:spcAft>
-            </a:pPr>
-            <a:r>
-              <a:rPr sz="1300" b="0" i="0">
-                <a:solidFill>
-                  <a:srgbClr val="6E7C87"/>
-                </a:solidFill>
-                <a:latin typeface="Segoe UI"/>
-              </a:rPr>
-              <a:t>4 of 23 unsupervised  ·  12 in progress  ·  7 not started</a:t>
-            </a:r>
-          </a:p>
-        </p:txBody>
-      </p:sp>
-      <p:sp>
-        <p:nvSpPr>
-          <p:cNvPr id="8" name="Oval 7"/>
+          <p:cNvPr id="7" name="!!iluo_I"/>
           <p:cNvSpPr/>
           <p:nvPr/>
         </p:nvSpPr>
         <p:spPr>
           <a:xfrm>
-            <a:off x="457200" y="2240280"/>
+            <a:off x="457200" y="2176272"/>
             <a:ext cx="402336" cy="402336"/>
           </a:xfrm>
           <a:prstGeom prst="ellipse">
@@ -22853,13 +21853,13 @@
       </p:sp>
       <p:sp>
         <p:nvSpPr>
-          <p:cNvPr id="9" name="TextBox 8"/>
+          <p:cNvPr id="8" name="TextBox 7"/>
           <p:cNvSpPr txBox="1"/>
           <p:nvPr/>
         </p:nvSpPr>
         <p:spPr>
           <a:xfrm>
-            <a:off x="969264" y="2322576"/>
+            <a:off x="969264" y="2267712"/>
             <a:ext cx="1920240" cy="274320"/>
           </a:xfrm>
           <a:prstGeom prst="rect">
@@ -22882,7 +21882,7 @@
               </a:spcAft>
             </a:pPr>
             <a:r>
-              <a:rPr sz="1150" b="1" i="0">
+              <a:rPr sz="1200" b="1" i="0">
                 <a:solidFill>
                   <a:srgbClr val="051C2C"/>
                 </a:solidFill>
@@ -22895,14 +21895,14 @@
       </p:sp>
       <p:sp>
         <p:nvSpPr>
-          <p:cNvPr id="10" name="Rectangle 9"/>
+          <p:cNvPr id="9" name="Rectangle 8"/>
           <p:cNvSpPr/>
           <p:nvPr/>
         </p:nvSpPr>
         <p:spPr>
           <a:xfrm>
-            <a:off x="3017520" y="2286000"/>
-            <a:ext cx="402336" cy="310896"/>
+            <a:off x="3017520" y="2212848"/>
+            <a:ext cx="402336" cy="329184"/>
           </a:xfrm>
           <a:prstGeom prst="rect">
             <a:avLst/>
@@ -22925,14 +21925,14 @@
       </p:sp>
       <p:sp>
         <p:nvSpPr>
-          <p:cNvPr id="11" name="Rectangle 10"/>
+          <p:cNvPr id="10" name="Rectangle 9"/>
           <p:cNvSpPr/>
           <p:nvPr/>
         </p:nvSpPr>
         <p:spPr>
           <a:xfrm>
-            <a:off x="3502152" y="2286000"/>
-            <a:ext cx="402336" cy="310896"/>
+            <a:off x="3502152" y="2212848"/>
+            <a:ext cx="402336" cy="329184"/>
           </a:xfrm>
           <a:prstGeom prst="rect">
             <a:avLst/>
@@ -22955,14 +21955,14 @@
       </p:sp>
       <p:sp>
         <p:nvSpPr>
-          <p:cNvPr id="12" name="Rectangle 11"/>
+          <p:cNvPr id="11" name="Rectangle 10"/>
           <p:cNvSpPr/>
           <p:nvPr/>
         </p:nvSpPr>
         <p:spPr>
           <a:xfrm>
-            <a:off x="3986784" y="2286000"/>
-            <a:ext cx="402336" cy="310896"/>
+            <a:off x="3986784" y="2212848"/>
+            <a:ext cx="402336" cy="329184"/>
           </a:xfrm>
           <a:prstGeom prst="rect">
             <a:avLst/>
@@ -22985,14 +21985,14 @@
       </p:sp>
       <p:sp>
         <p:nvSpPr>
-          <p:cNvPr id="13" name="Rectangle 12"/>
+          <p:cNvPr id="12" name="Rectangle 11"/>
           <p:cNvSpPr/>
           <p:nvPr/>
         </p:nvSpPr>
         <p:spPr>
           <a:xfrm>
-            <a:off x="4471416" y="2286000"/>
-            <a:ext cx="402336" cy="310896"/>
+            <a:off x="4471416" y="2212848"/>
+            <a:ext cx="402336" cy="329184"/>
           </a:xfrm>
           <a:prstGeom prst="rect">
             <a:avLst/>
@@ -23015,14 +22015,14 @@
       </p:sp>
       <p:sp>
         <p:nvSpPr>
-          <p:cNvPr id="14" name="Rectangle 13"/>
+          <p:cNvPr id="13" name="Rectangle 12"/>
           <p:cNvSpPr/>
           <p:nvPr/>
         </p:nvSpPr>
         <p:spPr>
           <a:xfrm>
-            <a:off x="4956048" y="2286000"/>
-            <a:ext cx="402336" cy="310896"/>
+            <a:off x="4956048" y="2212848"/>
+            <a:ext cx="402336" cy="329184"/>
           </a:xfrm>
           <a:prstGeom prst="rect">
             <a:avLst/>
@@ -23045,14 +22045,14 @@
       </p:sp>
       <p:sp>
         <p:nvSpPr>
-          <p:cNvPr id="15" name="Rectangle 14"/>
+          <p:cNvPr id="14" name="Rectangle 13"/>
           <p:cNvSpPr/>
           <p:nvPr/>
         </p:nvSpPr>
         <p:spPr>
           <a:xfrm>
-            <a:off x="5440680" y="2286000"/>
-            <a:ext cx="402336" cy="310896"/>
+            <a:off x="5440680" y="2212848"/>
+            <a:ext cx="402336" cy="329184"/>
           </a:xfrm>
           <a:prstGeom prst="rect">
             <a:avLst/>
@@ -23075,14 +22075,14 @@
       </p:sp>
       <p:sp>
         <p:nvSpPr>
-          <p:cNvPr id="16" name="Rectangle 15"/>
+          <p:cNvPr id="15" name="Rectangle 14"/>
           <p:cNvSpPr/>
           <p:nvPr/>
         </p:nvSpPr>
         <p:spPr>
           <a:xfrm>
-            <a:off x="5925312" y="2286000"/>
-            <a:ext cx="402336" cy="310896"/>
+            <a:off x="5925312" y="2212848"/>
+            <a:ext cx="402336" cy="329184"/>
           </a:xfrm>
           <a:prstGeom prst="rect">
             <a:avLst/>
@@ -23105,14 +22105,14 @@
       </p:sp>
       <p:sp>
         <p:nvSpPr>
-          <p:cNvPr id="17" name="Rectangle 16"/>
+          <p:cNvPr id="16" name="Rectangle 15"/>
           <p:cNvSpPr/>
           <p:nvPr/>
         </p:nvSpPr>
         <p:spPr>
           <a:xfrm>
-            <a:off x="6409944" y="2286000"/>
-            <a:ext cx="402336" cy="310896"/>
+            <a:off x="6409944" y="2212848"/>
+            <a:ext cx="402336" cy="329184"/>
           </a:xfrm>
           <a:prstGeom prst="rect">
             <a:avLst/>
@@ -23135,14 +22135,14 @@
       </p:sp>
       <p:sp>
         <p:nvSpPr>
-          <p:cNvPr id="18" name="Rectangle 17"/>
+          <p:cNvPr id="17" name="Rectangle 16"/>
           <p:cNvSpPr/>
           <p:nvPr/>
         </p:nvSpPr>
         <p:spPr>
           <a:xfrm>
-            <a:off x="6894576" y="2286000"/>
-            <a:ext cx="402336" cy="310896"/>
+            <a:off x="6894576" y="2212848"/>
+            <a:ext cx="402336" cy="329184"/>
           </a:xfrm>
           <a:prstGeom prst="rect">
             <a:avLst/>
@@ -23165,55 +22165,13 @@
       </p:sp>
       <p:sp>
         <p:nvSpPr>
-          <p:cNvPr id="19" name="TextBox 18"/>
-          <p:cNvSpPr txBox="1"/>
-          <p:nvPr/>
-        </p:nvSpPr>
-        <p:spPr>
-          <a:xfrm>
-            <a:off x="7488936" y="2340864"/>
-            <a:ext cx="1005840" cy="274320"/>
-          </a:xfrm>
-          <a:prstGeom prst="rect">
-            <a:avLst/>
-          </a:prstGeom>
-          <a:noFill/>
-        </p:spPr>
-        <p:txBody>
-          <a:bodyPr wrap="square" lIns="0" rIns="0" tIns="0" bIns="0" anchor="t">
-            <a:spAutoFit/>
-          </a:bodyPr>
-          <a:lstStyle/>
-          <a:p>
-            <a:pPr algn="l">
-              <a:spcBef>
-                <a:spcPts val="0"/>
-              </a:spcBef>
-              <a:spcAft>
-                <a:spcPts val="0"/>
-              </a:spcAft>
-            </a:pPr>
-            <a:r>
-              <a:rPr sz="1050" b="0" i="0">
-                <a:solidFill>
-                  <a:srgbClr val="6E7C87"/>
-                </a:solidFill>
-                <a:latin typeface="Segoe UI"/>
-              </a:rPr>
-              <a:t>9 skills</a:t>
-            </a:r>
-          </a:p>
-        </p:txBody>
-      </p:sp>
-      <p:sp>
-        <p:nvSpPr>
-          <p:cNvPr id="20" name="Oval 19"/>
+          <p:cNvPr id="18" name="!!iluo_L"/>
           <p:cNvSpPr/>
           <p:nvPr/>
         </p:nvSpPr>
         <p:spPr>
           <a:xfrm>
-            <a:off x="457200" y="2843784"/>
+            <a:off x="457200" y="2816352"/>
             <a:ext cx="402336" cy="402336"/>
           </a:xfrm>
           <a:prstGeom prst="ellipse">
@@ -23253,13 +22211,13 @@
       </p:sp>
       <p:sp>
         <p:nvSpPr>
-          <p:cNvPr id="21" name="TextBox 20"/>
+          <p:cNvPr id="19" name="TextBox 18"/>
           <p:cNvSpPr txBox="1"/>
           <p:nvPr/>
         </p:nvSpPr>
         <p:spPr>
           <a:xfrm>
-            <a:off x="969264" y="2926080"/>
+            <a:off x="969264" y="2907792"/>
             <a:ext cx="1920240" cy="274320"/>
           </a:xfrm>
           <a:prstGeom prst="rect">
@@ -23282,7 +22240,7 @@
               </a:spcAft>
             </a:pPr>
             <a:r>
-              <a:rPr sz="1150" b="1" i="0">
+              <a:rPr sz="1200" b="1" i="0">
                 <a:solidFill>
                   <a:srgbClr val="051C2C"/>
                 </a:solidFill>
@@ -23295,14 +22253,14 @@
       </p:sp>
       <p:sp>
         <p:nvSpPr>
-          <p:cNvPr id="22" name="Rectangle 21"/>
+          <p:cNvPr id="20" name="Rectangle 19"/>
           <p:cNvSpPr/>
           <p:nvPr/>
         </p:nvSpPr>
         <p:spPr>
           <a:xfrm>
-            <a:off x="3017520" y="2889504"/>
-            <a:ext cx="402336" cy="310896"/>
+            <a:off x="3017520" y="2852928"/>
+            <a:ext cx="402336" cy="329184"/>
           </a:xfrm>
           <a:prstGeom prst="rect">
             <a:avLst/>
@@ -23325,14 +22283,14 @@
       </p:sp>
       <p:sp>
         <p:nvSpPr>
-          <p:cNvPr id="23" name="Rectangle 22"/>
+          <p:cNvPr id="21" name="Rectangle 20"/>
           <p:cNvSpPr/>
           <p:nvPr/>
         </p:nvSpPr>
         <p:spPr>
           <a:xfrm>
-            <a:off x="3502152" y="2889504"/>
-            <a:ext cx="402336" cy="310896"/>
+            <a:off x="3502152" y="2852928"/>
+            <a:ext cx="402336" cy="329184"/>
           </a:xfrm>
           <a:prstGeom prst="rect">
             <a:avLst/>
@@ -23355,14 +22313,14 @@
       </p:sp>
       <p:sp>
         <p:nvSpPr>
-          <p:cNvPr id="24" name="Rectangle 23"/>
+          <p:cNvPr id="22" name="Rectangle 21"/>
           <p:cNvSpPr/>
           <p:nvPr/>
         </p:nvSpPr>
         <p:spPr>
           <a:xfrm>
-            <a:off x="3986784" y="2889504"/>
-            <a:ext cx="402336" cy="310896"/>
+            <a:off x="3986784" y="2852928"/>
+            <a:ext cx="402336" cy="329184"/>
           </a:xfrm>
           <a:prstGeom prst="rect">
             <a:avLst/>
@@ -23385,14 +22343,14 @@
       </p:sp>
       <p:sp>
         <p:nvSpPr>
-          <p:cNvPr id="25" name="Rectangle 24"/>
+          <p:cNvPr id="23" name="Rectangle 22"/>
           <p:cNvSpPr/>
           <p:nvPr/>
         </p:nvSpPr>
         <p:spPr>
           <a:xfrm>
-            <a:off x="4471416" y="2889504"/>
-            <a:ext cx="402336" cy="310896"/>
+            <a:off x="4471416" y="2852928"/>
+            <a:ext cx="402336" cy="329184"/>
           </a:xfrm>
           <a:prstGeom prst="rect">
             <a:avLst/>
@@ -23415,14 +22373,14 @@
       </p:sp>
       <p:sp>
         <p:nvSpPr>
-          <p:cNvPr id="26" name="Rectangle 25"/>
+          <p:cNvPr id="24" name="Rectangle 23"/>
           <p:cNvSpPr/>
           <p:nvPr/>
         </p:nvSpPr>
         <p:spPr>
           <a:xfrm>
-            <a:off x="4956048" y="2889504"/>
-            <a:ext cx="402336" cy="310896"/>
+            <a:off x="4956048" y="2852928"/>
+            <a:ext cx="402336" cy="329184"/>
           </a:xfrm>
           <a:prstGeom prst="rect">
             <a:avLst/>
@@ -23445,55 +22403,13 @@
       </p:sp>
       <p:sp>
         <p:nvSpPr>
-          <p:cNvPr id="27" name="TextBox 26"/>
-          <p:cNvSpPr txBox="1"/>
-          <p:nvPr/>
-        </p:nvSpPr>
-        <p:spPr>
-          <a:xfrm>
-            <a:off x="5550408" y="2944368"/>
-            <a:ext cx="1005840" cy="274320"/>
-          </a:xfrm>
-          <a:prstGeom prst="rect">
-            <a:avLst/>
-          </a:prstGeom>
-          <a:noFill/>
-        </p:spPr>
-        <p:txBody>
-          <a:bodyPr wrap="square" lIns="0" rIns="0" tIns="0" bIns="0" anchor="t">
-            <a:spAutoFit/>
-          </a:bodyPr>
-          <a:lstStyle/>
-          <a:p>
-            <a:pPr algn="l">
-              <a:spcBef>
-                <a:spcPts val="0"/>
-              </a:spcBef>
-              <a:spcAft>
-                <a:spcPts val="0"/>
-              </a:spcAft>
-            </a:pPr>
-            <a:r>
-              <a:rPr sz="1050" b="0" i="0">
-                <a:solidFill>
-                  <a:srgbClr val="6E7C87"/>
-                </a:solidFill>
-                <a:latin typeface="Segoe UI"/>
-              </a:rPr>
-              <a:t>5 skills</a:t>
-            </a:r>
-          </a:p>
-        </p:txBody>
-      </p:sp>
-      <p:sp>
-        <p:nvSpPr>
-          <p:cNvPr id="28" name="Oval 27"/>
+          <p:cNvPr id="25" name="!!iluo_U"/>
           <p:cNvSpPr/>
           <p:nvPr/>
         </p:nvSpPr>
         <p:spPr>
           <a:xfrm>
-            <a:off x="457200" y="3447288"/>
+            <a:off x="457200" y="3456432"/>
             <a:ext cx="402336" cy="402336"/>
           </a:xfrm>
           <a:prstGeom prst="ellipse">
@@ -23533,13 +22449,13 @@
       </p:sp>
       <p:sp>
         <p:nvSpPr>
-          <p:cNvPr id="29" name="TextBox 28"/>
+          <p:cNvPr id="26" name="TextBox 25"/>
           <p:cNvSpPr txBox="1"/>
           <p:nvPr/>
         </p:nvSpPr>
         <p:spPr>
           <a:xfrm>
-            <a:off x="969264" y="3529584"/>
+            <a:off x="969264" y="3547872"/>
             <a:ext cx="1920240" cy="274320"/>
           </a:xfrm>
           <a:prstGeom prst="rect">
@@ -23562,7 +22478,7 @@
               </a:spcAft>
             </a:pPr>
             <a:r>
-              <a:rPr sz="1150" b="1" i="0">
+              <a:rPr sz="1200" b="1" i="0">
                 <a:solidFill>
                   <a:srgbClr val="051C2C"/>
                 </a:solidFill>
@@ -23575,14 +22491,14 @@
       </p:sp>
       <p:sp>
         <p:nvSpPr>
-          <p:cNvPr id="30" name="Rectangle 29"/>
+          <p:cNvPr id="27" name="Rectangle 26"/>
           <p:cNvSpPr/>
           <p:nvPr/>
         </p:nvSpPr>
         <p:spPr>
           <a:xfrm>
             <a:off x="3017520" y="3493008"/>
-            <a:ext cx="402336" cy="310896"/>
+            <a:ext cx="402336" cy="329184"/>
           </a:xfrm>
           <a:prstGeom prst="rect">
             <a:avLst/>
@@ -23605,14 +22521,14 @@
       </p:sp>
       <p:sp>
         <p:nvSpPr>
-          <p:cNvPr id="31" name="Rectangle 30"/>
+          <p:cNvPr id="28" name="Rectangle 27"/>
           <p:cNvSpPr/>
           <p:nvPr/>
         </p:nvSpPr>
         <p:spPr>
           <a:xfrm>
             <a:off x="3502152" y="3493008"/>
-            <a:ext cx="402336" cy="310896"/>
+            <a:ext cx="402336" cy="329184"/>
           </a:xfrm>
           <a:prstGeom prst="rect">
             <a:avLst/>
@@ -23635,14 +22551,14 @@
       </p:sp>
       <p:sp>
         <p:nvSpPr>
-          <p:cNvPr id="32" name="Rectangle 31"/>
+          <p:cNvPr id="29" name="Rectangle 28"/>
           <p:cNvSpPr/>
           <p:nvPr/>
         </p:nvSpPr>
         <p:spPr>
           <a:xfrm>
             <a:off x="3986784" y="3493008"/>
-            <a:ext cx="402336" cy="310896"/>
+            <a:ext cx="402336" cy="329184"/>
           </a:xfrm>
           <a:prstGeom prst="rect">
             <a:avLst/>
@@ -23665,55 +22581,13 @@
       </p:sp>
       <p:sp>
         <p:nvSpPr>
-          <p:cNvPr id="33" name="TextBox 32"/>
-          <p:cNvSpPr txBox="1"/>
-          <p:nvPr/>
-        </p:nvSpPr>
-        <p:spPr>
-          <a:xfrm>
-            <a:off x="4581144" y="3547872"/>
-            <a:ext cx="1005840" cy="274320"/>
-          </a:xfrm>
-          <a:prstGeom prst="rect">
-            <a:avLst/>
-          </a:prstGeom>
-          <a:noFill/>
-        </p:spPr>
-        <p:txBody>
-          <a:bodyPr wrap="square" lIns="0" rIns="0" tIns="0" bIns="0" anchor="t">
-            <a:spAutoFit/>
-          </a:bodyPr>
-          <a:lstStyle/>
-          <a:p>
-            <a:pPr algn="l">
-              <a:spcBef>
-                <a:spcPts val="0"/>
-              </a:spcBef>
-              <a:spcAft>
-                <a:spcPts val="0"/>
-              </a:spcAft>
-            </a:pPr>
-            <a:r>
-              <a:rPr sz="1050" b="0" i="0">
-                <a:solidFill>
-                  <a:srgbClr val="6E7C87"/>
-                </a:solidFill>
-                <a:latin typeface="Segoe UI"/>
-              </a:rPr>
-              <a:t>3 skills</a:t>
-            </a:r>
-          </a:p>
-        </p:txBody>
-      </p:sp>
-      <p:sp>
-        <p:nvSpPr>
-          <p:cNvPr id="34" name="Oval 33"/>
+          <p:cNvPr id="30" name="!!iluo_O"/>
           <p:cNvSpPr/>
           <p:nvPr/>
         </p:nvSpPr>
         <p:spPr>
           <a:xfrm>
-            <a:off x="457200" y="4050792"/>
+            <a:off x="457200" y="4096512"/>
             <a:ext cx="402336" cy="402336"/>
           </a:xfrm>
           <a:prstGeom prst="ellipse">
@@ -23753,13 +22627,13 @@
       </p:sp>
       <p:sp>
         <p:nvSpPr>
-          <p:cNvPr id="35" name="TextBox 34"/>
+          <p:cNvPr id="31" name="TextBox 30"/>
           <p:cNvSpPr txBox="1"/>
           <p:nvPr/>
         </p:nvSpPr>
         <p:spPr>
           <a:xfrm>
-            <a:off x="969264" y="4133088"/>
+            <a:off x="969264" y="4187952"/>
             <a:ext cx="1920240" cy="274320"/>
           </a:xfrm>
           <a:prstGeom prst="rect">
@@ -23782,7 +22656,7 @@
               </a:spcAft>
             </a:pPr>
             <a:r>
-              <a:rPr sz="1150" b="1" i="0">
+              <a:rPr sz="1200" b="1" i="0">
                 <a:solidFill>
                   <a:srgbClr val="051C2C"/>
                 </a:solidFill>
@@ -23795,14 +22669,14 @@
       </p:sp>
       <p:sp>
         <p:nvSpPr>
-          <p:cNvPr id="36" name="Rectangle 35"/>
+          <p:cNvPr id="32" name="Rectangle 31"/>
           <p:cNvSpPr/>
           <p:nvPr/>
         </p:nvSpPr>
         <p:spPr>
           <a:xfrm>
-            <a:off x="3017520" y="4096512"/>
-            <a:ext cx="402336" cy="310896"/>
+            <a:off x="3017520" y="4133088"/>
+            <a:ext cx="402336" cy="329184"/>
           </a:xfrm>
           <a:prstGeom prst="rect">
             <a:avLst/>
@@ -23825,14 +22699,14 @@
       </p:sp>
       <p:sp>
         <p:nvSpPr>
-          <p:cNvPr id="37" name="Rectangle 36"/>
+          <p:cNvPr id="33" name="Rectangle 32"/>
           <p:cNvSpPr/>
           <p:nvPr/>
         </p:nvSpPr>
         <p:spPr>
           <a:xfrm>
-            <a:off x="3502152" y="4096512"/>
-            <a:ext cx="402336" cy="310896"/>
+            <a:off x="3502152" y="4133088"/>
+            <a:ext cx="402336" cy="329184"/>
           </a:xfrm>
           <a:prstGeom prst="rect">
             <a:avLst/>
@@ -23855,14 +22729,14 @@
       </p:sp>
       <p:sp>
         <p:nvSpPr>
-          <p:cNvPr id="38" name="Rectangle 37"/>
+          <p:cNvPr id="34" name="Rectangle 33"/>
           <p:cNvSpPr/>
           <p:nvPr/>
         </p:nvSpPr>
         <p:spPr>
           <a:xfrm>
-            <a:off x="3986784" y="4096512"/>
-            <a:ext cx="402336" cy="310896"/>
+            <a:off x="3986784" y="4133088"/>
+            <a:ext cx="402336" cy="329184"/>
           </a:xfrm>
           <a:prstGeom prst="rect">
             <a:avLst/>
@@ -23885,14 +22759,14 @@
       </p:sp>
       <p:sp>
         <p:nvSpPr>
-          <p:cNvPr id="39" name="Rectangle 38"/>
+          <p:cNvPr id="35" name="Rectangle 34"/>
           <p:cNvSpPr/>
           <p:nvPr/>
         </p:nvSpPr>
         <p:spPr>
           <a:xfrm>
-            <a:off x="4471416" y="4096512"/>
-            <a:ext cx="402336" cy="310896"/>
+            <a:off x="4471416" y="4133088"/>
+            <a:ext cx="402336" cy="329184"/>
           </a:xfrm>
           <a:prstGeom prst="rect">
             <a:avLst/>
@@ -23915,14 +22789,14 @@
       </p:sp>
       <p:sp>
         <p:nvSpPr>
-          <p:cNvPr id="40" name="Rectangle 39"/>
+          <p:cNvPr id="36" name="Rectangle 35"/>
           <p:cNvSpPr/>
           <p:nvPr/>
         </p:nvSpPr>
         <p:spPr>
           <a:xfrm>
-            <a:off x="4956048" y="4096512"/>
-            <a:ext cx="402336" cy="310896"/>
+            <a:off x="4956048" y="4133088"/>
+            <a:ext cx="402336" cy="329184"/>
           </a:xfrm>
           <a:prstGeom prst="rect">
             <a:avLst/>
@@ -23945,14 +22819,14 @@
       </p:sp>
       <p:sp>
         <p:nvSpPr>
-          <p:cNvPr id="41" name="Rectangle 40"/>
+          <p:cNvPr id="37" name="Rectangle 36"/>
           <p:cNvSpPr/>
           <p:nvPr/>
         </p:nvSpPr>
         <p:spPr>
           <a:xfrm>
-            <a:off x="5440680" y="4096512"/>
-            <a:ext cx="402336" cy="310896"/>
+            <a:off x="5440680" y="4133088"/>
+            <a:ext cx="402336" cy="329184"/>
           </a:xfrm>
           <a:prstGeom prst="rect">
             <a:avLst/>
@@ -23975,55 +22849,13 @@
       </p:sp>
       <p:sp>
         <p:nvSpPr>
-          <p:cNvPr id="42" name="TextBox 41"/>
-          <p:cNvSpPr txBox="1"/>
-          <p:nvPr/>
-        </p:nvSpPr>
-        <p:spPr>
-          <a:xfrm>
-            <a:off x="6035040" y="4151376"/>
-            <a:ext cx="1005840" cy="274320"/>
-          </a:xfrm>
-          <a:prstGeom prst="rect">
-            <a:avLst/>
-          </a:prstGeom>
-          <a:noFill/>
-        </p:spPr>
-        <p:txBody>
-          <a:bodyPr wrap="square" lIns="0" rIns="0" tIns="0" bIns="0" anchor="t">
-            <a:spAutoFit/>
-          </a:bodyPr>
-          <a:lstStyle/>
-          <a:p>
-            <a:pPr algn="l">
-              <a:spcBef>
-                <a:spcPts val="0"/>
-              </a:spcBef>
-              <a:spcAft>
-                <a:spcPts val="0"/>
-              </a:spcAft>
-            </a:pPr>
-            <a:r>
-              <a:rPr sz="1050" b="0" i="0">
-                <a:solidFill>
-                  <a:srgbClr val="6E7C87"/>
-                </a:solidFill>
-                <a:latin typeface="Segoe UI"/>
-              </a:rPr>
-              <a:t>6 skills</a:t>
-            </a:r>
-          </a:p>
-        </p:txBody>
-      </p:sp>
-      <p:sp>
-        <p:nvSpPr>
-          <p:cNvPr id="43" name="Rectangle 42"/>
+          <p:cNvPr id="38" name="Rectangle 37"/>
           <p:cNvSpPr/>
           <p:nvPr/>
         </p:nvSpPr>
         <p:spPr>
           <a:xfrm>
-            <a:off x="3017520" y="4846320"/>
+            <a:off x="3017520" y="4882896"/>
             <a:ext cx="182880" cy="182880"/>
           </a:xfrm>
           <a:prstGeom prst="rect">
@@ -24047,13 +22879,13 @@
       </p:sp>
       <p:sp>
         <p:nvSpPr>
-          <p:cNvPr id="44" name="TextBox 43"/>
+          <p:cNvPr id="39" name="TextBox 38"/>
           <p:cNvSpPr txBox="1"/>
           <p:nvPr/>
         </p:nvSpPr>
         <p:spPr>
           <a:xfrm>
-            <a:off x="3291839" y="4818888"/>
+            <a:off x="3291839" y="4855464"/>
             <a:ext cx="1463040" cy="237744"/>
           </a:xfrm>
           <a:prstGeom prst="rect">
@@ -24089,13 +22921,13 @@
       </p:sp>
       <p:sp>
         <p:nvSpPr>
-          <p:cNvPr id="45" name="Rectangle 44"/>
+          <p:cNvPr id="40" name="Rectangle 39"/>
           <p:cNvSpPr/>
           <p:nvPr/>
         </p:nvSpPr>
         <p:spPr>
           <a:xfrm>
-            <a:off x="4480560" y="4846320"/>
+            <a:off x="4480560" y="4882896"/>
             <a:ext cx="182880" cy="182880"/>
           </a:xfrm>
           <a:prstGeom prst="rect">
@@ -24119,13 +22951,13 @@
       </p:sp>
       <p:sp>
         <p:nvSpPr>
-          <p:cNvPr id="46" name="TextBox 45"/>
+          <p:cNvPr id="41" name="TextBox 40"/>
           <p:cNvSpPr txBox="1"/>
           <p:nvPr/>
         </p:nvSpPr>
         <p:spPr>
           <a:xfrm>
-            <a:off x="4754880" y="4818888"/>
+            <a:off x="4754880" y="4855464"/>
             <a:ext cx="1463040" cy="237744"/>
           </a:xfrm>
           <a:prstGeom prst="rect">
@@ -24161,13 +22993,13 @@
       </p:sp>
       <p:sp>
         <p:nvSpPr>
-          <p:cNvPr id="47" name="Rectangle 46"/>
+          <p:cNvPr id="42" name="Rectangle 41"/>
           <p:cNvSpPr/>
           <p:nvPr/>
         </p:nvSpPr>
         <p:spPr>
           <a:xfrm>
-            <a:off x="5943600" y="4846320"/>
+            <a:off x="5943600" y="4882896"/>
             <a:ext cx="182880" cy="182880"/>
           </a:xfrm>
           <a:prstGeom prst="rect">
@@ -24191,13 +23023,13 @@
       </p:sp>
       <p:sp>
         <p:nvSpPr>
-          <p:cNvPr id="48" name="TextBox 47"/>
+          <p:cNvPr id="43" name="TextBox 42"/>
           <p:cNvSpPr txBox="1"/>
           <p:nvPr/>
         </p:nvSpPr>
         <p:spPr>
           <a:xfrm>
-            <a:off x="6217920" y="4818888"/>
+            <a:off x="6217920" y="4855464"/>
             <a:ext cx="1463040" cy="237744"/>
           </a:xfrm>
           <a:prstGeom prst="rect">
@@ -24233,14 +23065,14 @@
       </p:sp>
       <p:sp>
         <p:nvSpPr>
-          <p:cNvPr id="49" name="Rectangle 48"/>
+          <p:cNvPr id="44" name="Rectangle 43"/>
           <p:cNvSpPr/>
           <p:nvPr/>
         </p:nvSpPr>
         <p:spPr>
           <a:xfrm>
-            <a:off x="7973568" y="2139696"/>
-            <a:ext cx="3758184" cy="2944368"/>
+            <a:off x="7973568" y="2066543"/>
+            <a:ext cx="3758184" cy="2670048"/>
           </a:xfrm>
           <a:prstGeom prst="rect">
             <a:avLst/>
@@ -24263,14 +23095,14 @@
       </p:sp>
       <p:sp>
         <p:nvSpPr>
-          <p:cNvPr id="50" name="TextBox 49"/>
+          <p:cNvPr id="45" name="TextBox 44"/>
           <p:cNvSpPr txBox="1"/>
           <p:nvPr/>
         </p:nvSpPr>
         <p:spPr>
           <a:xfrm>
-            <a:off x="8266175" y="2414016"/>
-            <a:ext cx="3172968" cy="2377440"/>
+            <a:off x="8266175" y="2359152"/>
+            <a:ext cx="3172968" cy="2103120"/>
           </a:xfrm>
           <a:prstGeom prst="rect">
             <a:avLst/>
@@ -24303,62 +23135,53 @@
           </a:p>
           <a:p>
             <a:pPr>
-              <a:lnSpc>
-                <a:spcPct val="116000"/>
-              </a:lnSpc>
               <a:spcBef>
-                <a:spcPts val="1400"/>
+                <a:spcPts val="1800"/>
               </a:spcBef>
               <a:spcAft>
                 <a:spcPts val="0"/>
               </a:spcAft>
             </a:pPr>
             <a:r>
-              <a:rPr sz="1250" b="0" i="0">
+              <a:rPr sz="1400" b="0" i="0">
                 <a:solidFill>
                   <a:srgbClr val="051C2C"/>
                 </a:solidFill>
                 <a:latin typeface="Segoe UI"/>
               </a:rPr>
-              <a:t>Consumable changes — contact tip, liner, nozzle, diffuser, rollers</a:t>
+              <a:t>Consumable changes</a:t>
             </a:r>
           </a:p>
           <a:p>
             <a:pPr>
-              <a:lnSpc>
-                <a:spcPct val="116000"/>
-              </a:lnSpc>
               <a:spcBef>
-                <a:spcPts val="1400"/>
+                <a:spcPts val="1800"/>
               </a:spcBef>
               <a:spcAft>
                 <a:spcPts val="0"/>
               </a:spcAft>
             </a:pPr>
             <a:r>
-              <a:rPr sz="1250" b="0" i="0">
+              <a:rPr sz="1400" b="0" i="0">
                 <a:solidFill>
                   <a:srgbClr val="051C2C"/>
                 </a:solidFill>
                 <a:latin typeface="Segoe UI"/>
               </a:rPr>
-              <a:t>Essential variable adjustment — current, wire feed, voltage, travel speed</a:t>
+              <a:t>Essential variable adjustment</a:t>
             </a:r>
           </a:p>
           <a:p>
             <a:pPr>
-              <a:lnSpc>
-                <a:spcPct val="116000"/>
-              </a:lnSpc>
               <a:spcBef>
-                <a:spcPts val="1400"/>
+                <a:spcPts val="1800"/>
               </a:spcBef>
               <a:spcAft>
                 <a:spcPts val="0"/>
               </a:spcAft>
             </a:pPr>
             <a:r>
-              <a:rPr sz="1250" b="0" i="0">
+              <a:rPr sz="1400" b="0" i="0">
                 <a:solidFill>
                   <a:srgbClr val="051C2C"/>
                 </a:solidFill>
@@ -24369,18 +23192,15 @@
           </a:p>
           <a:p>
             <a:pPr>
-              <a:lnSpc>
-                <a:spcPct val="116000"/>
-              </a:lnSpc>
               <a:spcBef>
-                <a:spcPts val="1400"/>
+                <a:spcPts val="1800"/>
               </a:spcBef>
               <a:spcAft>
                 <a:spcPts val="0"/>
               </a:spcAft>
             </a:pPr>
             <a:r>
-              <a:rPr sz="1250" b="0" i="0">
+              <a:rPr sz="1400" b="0" i="0">
                 <a:solidFill>
                   <a:srgbClr val="051C2C"/>
                 </a:solidFill>
@@ -24393,14 +23213,14 @@
       </p:sp>
       <p:sp>
         <p:nvSpPr>
-          <p:cNvPr id="51" name="Rectangle 50"/>
+          <p:cNvPr id="46" name="Rectangle 45"/>
           <p:cNvSpPr/>
           <p:nvPr/>
         </p:nvSpPr>
         <p:spPr>
           <a:xfrm>
-            <a:off x="457200" y="5285232"/>
-            <a:ext cx="11274552" cy="1005840"/>
+            <a:off x="457200" y="5358384"/>
+            <a:ext cx="11274552" cy="969264"/>
           </a:xfrm>
           <a:prstGeom prst="rect">
             <a:avLst/>
@@ -24423,14 +23243,14 @@
       </p:sp>
       <p:sp>
         <p:nvSpPr>
-          <p:cNvPr id="52" name="TextBox 51"/>
+          <p:cNvPr id="47" name="TextBox 46"/>
           <p:cNvSpPr txBox="1"/>
           <p:nvPr/>
         </p:nvSpPr>
         <p:spPr>
           <a:xfrm>
-            <a:off x="841248" y="5468112"/>
-            <a:ext cx="10515600" cy="685800"/>
+            <a:off x="841248" y="5577840"/>
+            <a:ext cx="10515600" cy="566928"/>
           </a:xfrm>
           <a:prstGeom prst="rect">
             <a:avLst/>
@@ -24438,49 +23258,30 @@
           <a:noFill/>
         </p:spPr>
         <p:txBody>
-          <a:bodyPr wrap="square" lIns="0" rIns="0" tIns="0" bIns="0" anchor="t">
+          <a:bodyPr wrap="square" lIns="0" rIns="0" tIns="0" bIns="0" anchor="ctr">
             <a:spAutoFit/>
           </a:bodyPr>
           <a:lstStyle/>
           <a:p>
             <a:pPr algn="l">
-              <a:spcBef>
-                <a:spcPts val="0"/>
-              </a:spcBef>
-              <a:spcAft>
-                <a:spcPts val="0"/>
-              </a:spcAft>
-            </a:pPr>
-            <a:r>
-              <a:rPr sz="1200" b="1" i="0">
-                <a:solidFill>
-                  <a:srgbClr val="D5FB00"/>
-                </a:solidFill>
-                <a:latin typeface="Segoe UI"/>
-              </a:rPr>
-              <a:t>The honest part</a:t>
-            </a:r>
-          </a:p>
-          <a:p>
-            <a:pPr>
               <a:lnSpc>
                 <a:spcPct val="116000"/>
               </a:lnSpc>
               <a:spcBef>
-                <a:spcPts val="600"/>
+                <a:spcPts val="0"/>
               </a:spcBef>
               <a:spcAft>
                 <a:spcPts val="0"/>
               </a:spcAft>
             </a:pPr>
             <a:r>
-              <a:rPr sz="1300" b="0" i="0">
+              <a:rPr sz="1500" b="0" i="0">
                 <a:solidFill>
                   <a:srgbClr val="FFFFFF"/>
                 </a:solidFill>
                 <a:latin typeface="Segoe UI"/>
               </a:rPr>
-              <a:t>Level I content I picked up in the cell, not in a classroom. The theory session and the 8.0 written exam have not been delivered yet — so none of it is formally validated.</a:t>
+              <a:t>I learned Level I in the cell, not in a classroom. The exam has not happened, so nothing is validated yet.</a:t>
             </a:r>
           </a:p>
         </p:txBody>
@@ -24490,6 +23291,18 @@
   <p:clrMapOvr>
     <a:masterClrMapping/>
   </p:clrMapOvr>
+  <mc:AlternateContent xmlns:mc="http://schemas.openxmlformats.org/markup-compatibility/2006">
+    <mc:Choice xmlns:p159="http://schemas.microsoft.com/office/powerpoint/2015/09/main" Requires="p159">
+      <p:transition xmlns:p14="http://schemas.microsoft.com/office/powerpoint/2010/main" spd="slow" p14:dur="1250">
+        <p159:morph option="byObject"/>
+      </p:transition>
+    </mc:Choice>
+    <mc:Fallback>
+      <p:transition xmlns:p14="http://schemas.microsoft.com/office/powerpoint/2010/main" spd="slow">
+        <p:fade/>
+      </p:transition>
+    </mc:Fallback>
+  </mc:AlternateContent>
 </p:sld>
 </file>
 
@@ -24701,63 +23514,21 @@
                 </a:solidFill>
                 <a:latin typeface="Segoe UI"/>
               </a:rPr>
-              <a:t>Not a gap in effort — a gap in structure</a:t>
-            </a:r>
-          </a:p>
-        </p:txBody>
-      </p:sp>
-      <p:sp>
-        <p:nvSpPr>
-          <p:cNvPr id="7" name="TextBox 6"/>
-          <p:cNvSpPr txBox="1"/>
-          <p:nvPr/>
-        </p:nvSpPr>
-        <p:spPr>
-          <a:xfrm>
-            <a:off x="457200" y="1481328"/>
-            <a:ext cx="10607040" cy="310896"/>
-          </a:xfrm>
-          <a:prstGeom prst="rect">
-            <a:avLst/>
-          </a:prstGeom>
-          <a:noFill/>
-        </p:spPr>
-        <p:txBody>
-          <a:bodyPr wrap="square" lIns="0" rIns="0" tIns="0" bIns="0" anchor="t">
-            <a:spAutoFit/>
-          </a:bodyPr>
-          <a:lstStyle/>
-          <a:p>
-            <a:pPr algn="l">
-              <a:spcBef>
-                <a:spcPts val="0"/>
-              </a:spcBef>
-              <a:spcAft>
-                <a:spcPts val="0"/>
-              </a:spcAft>
-            </a:pPr>
-            <a:r>
-              <a:rPr sz="1300" b="0" i="0">
-                <a:solidFill>
-                  <a:srgbClr val="9FAFBA"/>
-                </a:solidFill>
-                <a:latin typeface="Segoe UI"/>
-              </a:rPr>
-              <a:t>What the program assumed, and what the floor actually delivered</a:t>
-            </a:r>
-          </a:p>
-        </p:txBody>
-      </p:sp>
-      <p:sp>
-        <p:nvSpPr>
-          <p:cNvPr id="8" name="Rectangle 7"/>
+              <a:t>Not a gap in effort, a gap in structure</a:t>
+            </a:r>
+          </a:p>
+        </p:txBody>
+      </p:sp>
+      <p:sp>
+        <p:nvSpPr>
+          <p:cNvPr id="7" name="Rectangle 6"/>
           <p:cNvSpPr/>
           <p:nvPr/>
         </p:nvSpPr>
         <p:spPr>
           <a:xfrm>
-            <a:off x="457200" y="1938528"/>
-            <a:ext cx="5504688" cy="2487168"/>
+            <a:off x="457200" y="1956816"/>
+            <a:ext cx="5504688" cy="2286000"/>
           </a:xfrm>
           <a:prstGeom prst="rect">
             <a:avLst/>
@@ -24780,14 +23551,14 @@
       </p:sp>
       <p:sp>
         <p:nvSpPr>
-          <p:cNvPr id="9" name="TextBox 8"/>
+          <p:cNvPr id="8" name="TextBox 7"/>
           <p:cNvSpPr txBox="1"/>
           <p:nvPr/>
         </p:nvSpPr>
         <p:spPr>
           <a:xfrm>
-            <a:off x="786384" y="2194560"/>
-            <a:ext cx="4846320" cy="2011680"/>
+            <a:off x="786384" y="2249424"/>
+            <a:ext cx="4846320" cy="1737360"/>
           </a:xfrm>
           <a:prstGeom prst="rect">
             <a:avLst/>
@@ -24821,14 +23592,14 @@
           <a:p>
             <a:pPr>
               <a:spcBef>
-                <a:spcPts val="1400"/>
+                <a:spcPts val="1800"/>
               </a:spcBef>
               <a:spcAft>
                 <a:spcPts val="0"/>
               </a:spcAft>
             </a:pPr>
             <a:r>
-              <a:rPr sz="1400" b="0" i="0">
+              <a:rPr sz="1600" b="0" i="0">
                 <a:solidFill>
                   <a:srgbClr val="FFFFFF"/>
                 </a:solidFill>
@@ -24840,72 +23611,53 @@
           <a:p>
             <a:pPr>
               <a:spcBef>
-                <a:spcPts val="1400"/>
+                <a:spcPts val="1800"/>
               </a:spcBef>
               <a:spcAft>
                 <a:spcPts val="0"/>
               </a:spcAft>
             </a:pPr>
             <a:r>
-              <a:rPr sz="1400" b="0" i="0">
+              <a:rPr sz="1600" b="0" i="0">
                 <a:solidFill>
                   <a:srgbClr val="FFFFFF"/>
                 </a:solidFill>
                 <a:latin typeface="Segoe UI"/>
               </a:rPr>
-              <a:t>Classroom first, then the cell</a:t>
+              <a:t>Classroom, then the cell</a:t>
             </a:r>
           </a:p>
           <a:p>
             <a:pPr>
               <a:spcBef>
-                <a:spcPts val="1400"/>
+                <a:spcPts val="1800"/>
               </a:spcBef>
               <a:spcAft>
                 <a:spcPts val="0"/>
               </a:spcAft>
             </a:pPr>
             <a:r>
-              <a:rPr sz="1400" b="0" i="0">
+              <a:rPr sz="1600" b="0" i="0">
                 <a:solidFill>
                   <a:srgbClr val="FFFFFF"/>
                 </a:solidFill>
                 <a:latin typeface="Segoe UI"/>
               </a:rPr>
-              <a:t>One level at a time, in order</a:t>
-            </a:r>
-          </a:p>
-          <a:p>
-            <a:pPr>
-              <a:spcBef>
-                <a:spcPts val="1400"/>
-              </a:spcBef>
-              <a:spcAft>
-                <a:spcPts val="0"/>
-              </a:spcAft>
-            </a:pPr>
-            <a:r>
-              <a:rPr sz="1400" b="0" i="0">
-                <a:solidFill>
-                  <a:srgbClr val="FFFFFF"/>
-                </a:solidFill>
-                <a:latin typeface="Segoe UI"/>
-              </a:rPr>
-              <a:t>A formal exam at every gate</a:t>
-            </a:r>
-          </a:p>
-        </p:txBody>
-      </p:sp>
-      <p:sp>
-        <p:nvSpPr>
-          <p:cNvPr id="10" name="Rectangle 9"/>
+              <a:t>One level at a time</a:t>
+            </a:r>
+          </a:p>
+        </p:txBody>
+      </p:sp>
+      <p:sp>
+        <p:nvSpPr>
+          <p:cNvPr id="9" name="Rectangle 8"/>
           <p:cNvSpPr/>
           <p:nvPr/>
         </p:nvSpPr>
         <p:spPr>
           <a:xfrm>
-            <a:off x="6227064" y="1938528"/>
-            <a:ext cx="5504688" cy="2487168"/>
+            <a:off x="6227064" y="1956816"/>
+            <a:ext cx="5504688" cy="2286000"/>
           </a:xfrm>
           <a:prstGeom prst="rect">
             <a:avLst/>
@@ -24928,14 +23680,14 @@
       </p:sp>
       <p:sp>
         <p:nvSpPr>
-          <p:cNvPr id="11" name="TextBox 10"/>
+          <p:cNvPr id="10" name="TextBox 9"/>
           <p:cNvSpPr txBox="1"/>
           <p:nvPr/>
         </p:nvSpPr>
         <p:spPr>
           <a:xfrm>
-            <a:off x="6556248" y="2194560"/>
-            <a:ext cx="4846320" cy="2011680"/>
+            <a:off x="6556248" y="2249424"/>
+            <a:ext cx="4846320" cy="1737360"/>
           </a:xfrm>
           <a:prstGeom prst="rect">
             <a:avLst/>
@@ -24969,91 +23721,72 @@
           <a:p>
             <a:pPr>
               <a:spcBef>
-                <a:spcPts val="1400"/>
+                <a:spcPts val="1800"/>
               </a:spcBef>
               <a:spcAft>
                 <a:spcPts val="0"/>
               </a:spcAft>
             </a:pPr>
             <a:r>
-              <a:rPr sz="1400" b="0" i="0">
+              <a:rPr sz="1600" b="0" i="0">
                 <a:solidFill>
                   <a:srgbClr val="FFFFFF"/>
                 </a:solidFill>
                 <a:latin typeface="Segoe UI"/>
               </a:rPr>
-              <a:t>Hours driven by demand, not by schedule</a:t>
+              <a:t>Hours driven by demand</a:t>
             </a:r>
           </a:p>
           <a:p>
             <a:pPr>
               <a:spcBef>
-                <a:spcPts val="1400"/>
+                <a:spcPts val="1800"/>
               </a:spcBef>
               <a:spcAft>
                 <a:spcPts val="0"/>
               </a:spcAft>
             </a:pPr>
             <a:r>
-              <a:rPr sz="1400" b="0" i="0">
+              <a:rPr sz="1600" b="0" i="0">
                 <a:solidFill>
                   <a:srgbClr val="FFFFFF"/>
                 </a:solidFill>
                 <a:latin typeface="Segoe UI"/>
               </a:rPr>
-              <a:t>Straight to the floor from day one</a:t>
+              <a:t>The floor from day one</a:t>
             </a:r>
           </a:p>
           <a:p>
             <a:pPr>
               <a:spcBef>
-                <a:spcPts val="1400"/>
+                <a:spcPts val="1800"/>
               </a:spcBef>
               <a:spcAft>
                 <a:spcPts val="0"/>
               </a:spcAft>
             </a:pPr>
             <a:r>
-              <a:rPr sz="1400" b="0" i="0">
+              <a:rPr sz="1600" b="0" i="0">
                 <a:solidFill>
                   <a:srgbClr val="FFFFFF"/>
                 </a:solidFill>
                 <a:latin typeface="Segoe UI"/>
               </a:rPr>
-              <a:t>Levels touched out of order</a:t>
-            </a:r>
-          </a:p>
-          <a:p>
-            <a:pPr>
-              <a:spcBef>
-                <a:spcPts val="1400"/>
-              </a:spcBef>
-              <a:spcAft>
-                <a:spcPts val="0"/>
-              </a:spcAft>
-            </a:pPr>
-            <a:r>
-              <a:rPr sz="1400" b="0" i="0">
-                <a:solidFill>
-                  <a:srgbClr val="FFFFFF"/>
-                </a:solidFill>
-                <a:latin typeface="Segoe UI"/>
-              </a:rPr>
-              <a:t>No formal evaluation yet</a:t>
-            </a:r>
-          </a:p>
-        </p:txBody>
-      </p:sp>
-      <p:sp>
-        <p:nvSpPr>
-          <p:cNvPr id="12" name="Rectangle 11"/>
+              <a:t>Levels out of order</a:t>
+            </a:r>
+          </a:p>
+        </p:txBody>
+      </p:sp>
+      <p:sp>
+        <p:nvSpPr>
+          <p:cNvPr id="11" name="Rectangle 10"/>
           <p:cNvSpPr/>
           <p:nvPr/>
         </p:nvSpPr>
         <p:spPr>
           <a:xfrm>
-            <a:off x="457200" y="4626864"/>
-            <a:ext cx="7040880" cy="914400"/>
+            <a:off x="457200" y="4681728"/>
+            <a:ext cx="11274552" cy="1097280"/>
           </a:xfrm>
           <a:prstGeom prst="rect">
             <a:avLst/>
@@ -25076,126 +23809,20 @@
       </p:sp>
       <p:sp>
         <p:nvSpPr>
-          <p:cNvPr id="13" name="TextBox 12"/>
-          <p:cNvSpPr txBox="1"/>
-          <p:nvPr/>
-        </p:nvSpPr>
-        <p:spPr>
-          <a:xfrm>
-            <a:off x="786384" y="4809744"/>
-            <a:ext cx="6400800" cy="548640"/>
-          </a:xfrm>
-          <a:prstGeom prst="rect">
-            <a:avLst/>
-          </a:prstGeom>
-          <a:noFill/>
-        </p:spPr>
-        <p:txBody>
-          <a:bodyPr wrap="square" lIns="0" rIns="0" tIns="0" bIns="0" anchor="ctr">
-            <a:spAutoFit/>
-          </a:bodyPr>
-          <a:lstStyle/>
-          <a:p>
-            <a:pPr algn="l">
-              <a:spcBef>
-                <a:spcPts val="0"/>
-              </a:spcBef>
-              <a:spcAft>
-                <a:spcPts val="0"/>
-              </a:spcAft>
-            </a:pPr>
-            <a:r>
-              <a:rPr sz="1450" b="1" i="0">
-                <a:solidFill>
-                  <a:srgbClr val="051C2C"/>
-                </a:solidFill>
-                <a:latin typeface="Segoe UI"/>
-              </a:rPr>
-              <a:t>60% integration project   │   40% breakdowns and support</a:t>
-            </a:r>
-          </a:p>
-        </p:txBody>
-      </p:sp>
-      <p:sp>
-        <p:nvSpPr>
-          <p:cNvPr id="14" name="TextBox 13"/>
-          <p:cNvSpPr txBox="1"/>
-          <p:nvPr/>
-        </p:nvSpPr>
-        <p:spPr>
-          <a:xfrm>
-            <a:off x="7772400" y="4645152"/>
-            <a:ext cx="3959352" cy="914400"/>
-          </a:xfrm>
-          <a:prstGeom prst="rect">
-            <a:avLst/>
-          </a:prstGeom>
-          <a:noFill/>
-        </p:spPr>
-        <p:txBody>
-          <a:bodyPr wrap="square" lIns="0" rIns="0" tIns="0" bIns="0" anchor="t">
-            <a:spAutoFit/>
-          </a:bodyPr>
-          <a:lstStyle/>
-          <a:p>
-            <a:pPr algn="l">
-              <a:spcBef>
-                <a:spcPts val="0"/>
-              </a:spcBef>
-              <a:spcAft>
-                <a:spcPts val="0"/>
-              </a:spcAft>
-            </a:pPr>
-            <a:r>
-              <a:rPr sz="950" b="1" i="0">
-                <a:solidFill>
-                  <a:srgbClr val="D5FB00"/>
-                </a:solidFill>
-                <a:latin typeface="Segoe UI"/>
-              </a:rPr>
-              <a:t>HOW MY TIME REALLY SPLIT</a:t>
-            </a:r>
-          </a:p>
-          <a:p>
-            <a:pPr>
-              <a:lnSpc>
-                <a:spcPct val="116000"/>
-              </a:lnSpc>
-              <a:spcBef>
-                <a:spcPts val="700"/>
-              </a:spcBef>
-              <a:spcAft>
-                <a:spcPts val="0"/>
-              </a:spcAft>
-            </a:pPr>
-            <a:r>
-              <a:rPr sz="1250" b="0" i="0">
-                <a:solidFill>
-                  <a:srgbClr val="C6CDD1"/>
-                </a:solidFill>
-                <a:latin typeface="Segoe UI"/>
-              </a:rPr>
-              <a:t>Most of my hours went into an integration project with my engineer — work that is not on the welding matrix at all.</a:t>
-            </a:r>
-          </a:p>
-        </p:txBody>
-      </p:sp>
-      <p:sp>
-        <p:nvSpPr>
-          <p:cNvPr id="15" name="Rectangle 14"/>
+          <p:cNvPr id="12" name="Rectangle 11"/>
           <p:cNvSpPr/>
           <p:nvPr/>
         </p:nvSpPr>
         <p:spPr>
           <a:xfrm>
-            <a:off x="457200" y="5833872"/>
-            <a:ext cx="11274552" cy="18288"/>
+            <a:off x="6089904" y="4956048"/>
+            <a:ext cx="18288" cy="548640"/>
           </a:xfrm>
           <a:prstGeom prst="rect">
             <a:avLst/>
           </a:prstGeom>
           <a:solidFill>
-            <a:srgbClr val="1B384A"/>
+            <a:srgbClr val="051C2C"/>
           </a:solidFill>
           <a:ln>
             <a:noFill/>
@@ -25212,14 +23839,14 @@
       </p:sp>
       <p:sp>
         <p:nvSpPr>
-          <p:cNvPr id="16" name="TextBox 15"/>
+          <p:cNvPr id="13" name="TextBox 12"/>
           <p:cNvSpPr txBox="1"/>
           <p:nvPr/>
         </p:nvSpPr>
         <p:spPr>
           <a:xfrm>
-            <a:off x="457200" y="6035040"/>
-            <a:ext cx="11274552" cy="365760"/>
+            <a:off x="841248" y="4956048"/>
+            <a:ext cx="5029200" cy="548640"/>
           </a:xfrm>
           <a:prstGeom prst="rect">
             <a:avLst/>
@@ -25227,7 +23854,7 @@
           <a:noFill/>
         </p:spPr>
         <p:txBody>
-          <a:bodyPr wrap="square" lIns="0" rIns="0" tIns="0" bIns="0" anchor="t">
+          <a:bodyPr wrap="square" lIns="0" rIns="0" tIns="0" bIns="0" anchor="ctr">
             <a:spAutoFit/>
           </a:bodyPr>
           <a:lstStyle/>
@@ -25241,13 +23868,55 @@
               </a:spcAft>
             </a:pPr>
             <a:r>
-              <a:rPr sz="1600" b="1" i="0">
-                <a:solidFill>
-                  <a:srgbClr val="FFFFFF"/>
+              <a:rPr sz="2000" b="1" i="0">
+                <a:solidFill>
+                  <a:srgbClr val="051C2C"/>
                 </a:solidFill>
                 <a:latin typeface="Segoe UI"/>
               </a:rPr>
-              <a:t>Every hour I worked was useful — only the paperwork is missing.</a:t>
+              <a:t>60% integration project</a:t>
+            </a:r>
+          </a:p>
+        </p:txBody>
+      </p:sp>
+      <p:sp>
+        <p:nvSpPr>
+          <p:cNvPr id="14" name="TextBox 13"/>
+          <p:cNvSpPr txBox="1"/>
+          <p:nvPr/>
+        </p:nvSpPr>
+        <p:spPr>
+          <a:xfrm>
+            <a:off x="6345936" y="4956048"/>
+            <a:ext cx="5120640" cy="548640"/>
+          </a:xfrm>
+          <a:prstGeom prst="rect">
+            <a:avLst/>
+          </a:prstGeom>
+          <a:noFill/>
+        </p:spPr>
+        <p:txBody>
+          <a:bodyPr wrap="square" lIns="0" rIns="0" tIns="0" bIns="0" anchor="ctr">
+            <a:spAutoFit/>
+          </a:bodyPr>
+          <a:lstStyle/>
+          <a:p>
+            <a:pPr algn="l">
+              <a:spcBef>
+                <a:spcPts val="0"/>
+              </a:spcBef>
+              <a:spcAft>
+                <a:spcPts val="0"/>
+              </a:spcAft>
+            </a:pPr>
+            <a:r>
+              <a:rPr sz="2000" b="1" i="0">
+                <a:solidFill>
+                  <a:srgbClr val="051C2C"/>
+                </a:solidFill>
+                <a:latin typeface="Segoe UI"/>
+              </a:rPr>
+              <a:t>40% breakdowns and support</a:t>
             </a:r>
           </a:p>
         </p:txBody>
@@ -25257,6 +23926,18 @@
   <p:clrMapOvr>
     <a:masterClrMapping/>
   </p:clrMapOvr>
+  <mc:AlternateContent xmlns:mc="http://schemas.openxmlformats.org/markup-compatibility/2006">
+    <mc:Choice xmlns:p159="http://schemas.microsoft.com/office/powerpoint/2015/09/main" Requires="p159">
+      <p:transition xmlns:p14="http://schemas.microsoft.com/office/powerpoint/2010/main" spd="slow" p14:dur="1250">
+        <p159:morph option="byObject"/>
+      </p:transition>
+    </mc:Choice>
+    <mc:Fallback>
+      <p:transition xmlns:p14="http://schemas.microsoft.com/office/powerpoint/2010/main" spd="slow">
+        <p:fade/>
+      </p:transition>
+    </mc:Fallback>
+  </mc:AlternateContent>
 </p:sld>
 </file>
 
@@ -25468,63 +24149,21 @@
                 </a:solidFill>
                 <a:latin typeface="Segoe UI"/>
               </a:rPr>
-              <a:t>60% of my hours, none of it on the matrix</a:t>
-            </a:r>
-          </a:p>
-        </p:txBody>
-      </p:sp>
-      <p:sp>
-        <p:nvSpPr>
-          <p:cNvPr id="7" name="TextBox 6"/>
-          <p:cNvSpPr txBox="1"/>
-          <p:nvPr/>
-        </p:nvSpPr>
-        <p:spPr>
-          <a:xfrm>
-            <a:off x="457200" y="1481328"/>
-            <a:ext cx="10607040" cy="310896"/>
-          </a:xfrm>
-          <a:prstGeom prst="rect">
-            <a:avLst/>
-          </a:prstGeom>
-          <a:noFill/>
-        </p:spPr>
-        <p:txBody>
-          <a:bodyPr wrap="square" lIns="0" rIns="0" tIns="0" bIns="0" anchor="t">
-            <a:spAutoFit/>
-          </a:bodyPr>
-          <a:lstStyle/>
-          <a:p>
-            <a:pPr algn="l">
-              <a:spcBef>
-                <a:spcPts val="0"/>
-              </a:spcBef>
-              <a:spcAft>
-                <a:spcPts val="0"/>
-              </a:spcAft>
-            </a:pPr>
-            <a:r>
-              <a:rPr sz="1300" b="0" i="0">
-                <a:solidFill>
-                  <a:srgbClr val="6E7C87"/>
-                </a:solidFill>
-                <a:latin typeface="Segoe UI"/>
-              </a:rPr>
-              <a:t>Real engineering work the ILUO scorecard cannot see</a:t>
-            </a:r>
-          </a:p>
-        </p:txBody>
-      </p:sp>
-      <p:sp>
-        <p:nvSpPr>
-          <p:cNvPr id="8" name="Rectangle 7"/>
+              <a:t>60% of my hours, and none of it on the matrix</a:t>
+            </a:r>
+          </a:p>
+        </p:txBody>
+      </p:sp>
+      <p:sp>
+        <p:nvSpPr>
+          <p:cNvPr id="7" name="Rectangle 6"/>
           <p:cNvSpPr/>
           <p:nvPr/>
         </p:nvSpPr>
         <p:spPr>
           <a:xfrm>
-            <a:off x="457200" y="2212848"/>
-            <a:ext cx="11274552" cy="859536"/>
+            <a:off x="457200" y="2194560"/>
+            <a:ext cx="11274552" cy="914400"/>
           </a:xfrm>
           <a:prstGeom prst="rect">
             <a:avLst/>
@@ -25547,14 +24186,56 @@
       </p:sp>
       <p:sp>
         <p:nvSpPr>
+          <p:cNvPr id="8" name="TextBox 7"/>
+          <p:cNvSpPr txBox="1"/>
+          <p:nvPr/>
+        </p:nvSpPr>
+        <p:spPr>
+          <a:xfrm>
+            <a:off x="822960" y="2395728"/>
+            <a:ext cx="2377440" cy="512064"/>
+          </a:xfrm>
+          <a:prstGeom prst="rect">
+            <a:avLst/>
+          </a:prstGeom>
+          <a:noFill/>
+        </p:spPr>
+        <p:txBody>
+          <a:bodyPr wrap="square" lIns="0" rIns="0" tIns="0" bIns="0" anchor="ctr">
+            <a:spAutoFit/>
+          </a:bodyPr>
+          <a:lstStyle/>
+          <a:p>
+            <a:pPr algn="l">
+              <a:spcBef>
+                <a:spcPts val="0"/>
+              </a:spcBef>
+              <a:spcAft>
+                <a:spcPts val="0"/>
+              </a:spcAft>
+            </a:pPr>
+            <a:r>
+              <a:rPr sz="1000" b="1" i="0">
+                <a:solidFill>
+                  <a:srgbClr val="0033A0"/>
+                </a:solidFill>
+                <a:latin typeface="Segoe UI"/>
+              </a:rPr>
+              <a:t>WHAT IT IS</a:t>
+            </a:r>
+          </a:p>
+        </p:txBody>
+      </p:sp>
+      <p:sp>
+        <p:nvSpPr>
           <p:cNvPr id="9" name="TextBox 8"/>
           <p:cNvSpPr txBox="1"/>
           <p:nvPr/>
         </p:nvSpPr>
         <p:spPr>
           <a:xfrm>
-            <a:off x="822960" y="2395728"/>
-            <a:ext cx="2377440" cy="502920"/>
+            <a:off x="3291840" y="2395728"/>
+            <a:ext cx="8046720" cy="512064"/>
           </a:xfrm>
           <a:prstGeom prst="rect">
             <a:avLst/>
@@ -25576,49 +24257,7 @@
               </a:spcAft>
             </a:pPr>
             <a:r>
-              <a:rPr sz="1000" b="1" i="0">
-                <a:solidFill>
-                  <a:srgbClr val="0033A0"/>
-                </a:solidFill>
-                <a:latin typeface="Segoe UI"/>
-              </a:rPr>
-              <a:t>WHAT IT IS</a:t>
-            </a:r>
-          </a:p>
-        </p:txBody>
-      </p:sp>
-      <p:sp>
-        <p:nvSpPr>
-          <p:cNvPr id="10" name="TextBox 9"/>
-          <p:cNvSpPr txBox="1"/>
-          <p:nvPr/>
-        </p:nvSpPr>
-        <p:spPr>
-          <a:xfrm>
-            <a:off x="3291840" y="2395728"/>
-            <a:ext cx="8046720" cy="502920"/>
-          </a:xfrm>
-          <a:prstGeom prst="rect">
-            <a:avLst/>
-          </a:prstGeom>
-          <a:noFill/>
-        </p:spPr>
-        <p:txBody>
-          <a:bodyPr wrap="square" lIns="0" rIns="0" tIns="0" bIns="0" anchor="ctr">
-            <a:spAutoFit/>
-          </a:bodyPr>
-          <a:lstStyle/>
-          <a:p>
-            <a:pPr algn="l">
-              <a:spcBef>
-                <a:spcPts val="0"/>
-              </a:spcBef>
-              <a:spcAft>
-                <a:spcPts val="0"/>
-              </a:spcAft>
-            </a:pPr>
-            <a:r>
-              <a:rPr sz="1500" b="0" i="0">
+              <a:rPr sz="1600" b="0" i="0">
                 <a:solidFill>
                   <a:srgbClr val="051C2C"/>
                 </a:solidFill>
@@ -25631,14 +24270,14 @@
       </p:sp>
       <p:sp>
         <p:nvSpPr>
-          <p:cNvPr id="11" name="Rectangle 10"/>
+          <p:cNvPr id="10" name="Rectangle 9"/>
           <p:cNvSpPr/>
           <p:nvPr/>
         </p:nvSpPr>
         <p:spPr>
           <a:xfrm>
-            <a:off x="457200" y="3200400"/>
-            <a:ext cx="11274552" cy="859536"/>
+            <a:off x="457200" y="3236976"/>
+            <a:ext cx="11274552" cy="914400"/>
           </a:xfrm>
           <a:prstGeom prst="rect">
             <a:avLst/>
@@ -25661,14 +24300,56 @@
       </p:sp>
       <p:sp>
         <p:nvSpPr>
+          <p:cNvPr id="11" name="TextBox 10"/>
+          <p:cNvSpPr txBox="1"/>
+          <p:nvPr/>
+        </p:nvSpPr>
+        <p:spPr>
+          <a:xfrm>
+            <a:off x="822960" y="3438144"/>
+            <a:ext cx="2377440" cy="512064"/>
+          </a:xfrm>
+          <a:prstGeom prst="rect">
+            <a:avLst/>
+          </a:prstGeom>
+          <a:noFill/>
+        </p:spPr>
+        <p:txBody>
+          <a:bodyPr wrap="square" lIns="0" rIns="0" tIns="0" bIns="0" anchor="ctr">
+            <a:spAutoFit/>
+          </a:bodyPr>
+          <a:lstStyle/>
+          <a:p>
+            <a:pPr algn="l">
+              <a:spcBef>
+                <a:spcPts val="0"/>
+              </a:spcBef>
+              <a:spcAft>
+                <a:spcPts val="0"/>
+              </a:spcAft>
+            </a:pPr>
+            <a:r>
+              <a:rPr sz="1000" b="1" i="0">
+                <a:solidFill>
+                  <a:srgbClr val="0033A0"/>
+                </a:solidFill>
+                <a:latin typeface="Segoe UI"/>
+              </a:rPr>
+              <a:t>MY ROLE</a:t>
+            </a:r>
+          </a:p>
+        </p:txBody>
+      </p:sp>
+      <p:sp>
+        <p:nvSpPr>
           <p:cNvPr id="12" name="TextBox 11"/>
           <p:cNvSpPr txBox="1"/>
           <p:nvPr/>
         </p:nvSpPr>
         <p:spPr>
           <a:xfrm>
-            <a:off x="822960" y="3383280"/>
-            <a:ext cx="2377440" cy="502920"/>
+            <a:off x="3291840" y="3438144"/>
+            <a:ext cx="8046720" cy="512064"/>
           </a:xfrm>
           <a:prstGeom prst="rect">
             <a:avLst/>
@@ -25690,49 +24371,7 @@
               </a:spcAft>
             </a:pPr>
             <a:r>
-              <a:rPr sz="1000" b="1" i="0">
-                <a:solidFill>
-                  <a:srgbClr val="0033A0"/>
-                </a:solidFill>
-                <a:latin typeface="Segoe UI"/>
-              </a:rPr>
-              <a:t>MY ROLE</a:t>
-            </a:r>
-          </a:p>
-        </p:txBody>
-      </p:sp>
-      <p:sp>
-        <p:nvSpPr>
-          <p:cNvPr id="13" name="TextBox 12"/>
-          <p:cNvSpPr txBox="1"/>
-          <p:nvPr/>
-        </p:nvSpPr>
-        <p:spPr>
-          <a:xfrm>
-            <a:off x="3291840" y="3383280"/>
-            <a:ext cx="8046720" cy="502920"/>
-          </a:xfrm>
-          <a:prstGeom prst="rect">
-            <a:avLst/>
-          </a:prstGeom>
-          <a:noFill/>
-        </p:spPr>
-        <p:txBody>
-          <a:bodyPr wrap="square" lIns="0" rIns="0" tIns="0" bIns="0" anchor="ctr">
-            <a:spAutoFit/>
-          </a:bodyPr>
-          <a:lstStyle/>
-          <a:p>
-            <a:pPr algn="l">
-              <a:spcBef>
-                <a:spcPts val="0"/>
-              </a:spcBef>
-              <a:spcAft>
-                <a:spcPts val="0"/>
-              </a:spcAft>
-            </a:pPr>
-            <a:r>
-              <a:rPr sz="1500" b="0" i="0">
+              <a:rPr sz="1600" b="0" i="0">
                 <a:solidFill>
                   <a:srgbClr val="051C2C"/>
                 </a:solidFill>
@@ -25745,14 +24384,14 @@
       </p:sp>
       <p:sp>
         <p:nvSpPr>
-          <p:cNvPr id="14" name="Rectangle 13"/>
+          <p:cNvPr id="13" name="Rectangle 12"/>
           <p:cNvSpPr/>
           <p:nvPr/>
         </p:nvSpPr>
         <p:spPr>
           <a:xfrm>
-            <a:off x="457200" y="4187952"/>
-            <a:ext cx="11274552" cy="859536"/>
+            <a:off x="457200" y="4279392"/>
+            <a:ext cx="11274552" cy="914400"/>
           </a:xfrm>
           <a:prstGeom prst="rect">
             <a:avLst/>
@@ -25775,14 +24414,56 @@
       </p:sp>
       <p:sp>
         <p:nvSpPr>
+          <p:cNvPr id="14" name="TextBox 13"/>
+          <p:cNvSpPr txBox="1"/>
+          <p:nvPr/>
+        </p:nvSpPr>
+        <p:spPr>
+          <a:xfrm>
+            <a:off x="822960" y="4480559"/>
+            <a:ext cx="2377440" cy="512064"/>
+          </a:xfrm>
+          <a:prstGeom prst="rect">
+            <a:avLst/>
+          </a:prstGeom>
+          <a:noFill/>
+        </p:spPr>
+        <p:txBody>
+          <a:bodyPr wrap="square" lIns="0" rIns="0" tIns="0" bIns="0" anchor="ctr">
+            <a:spAutoFit/>
+          </a:bodyPr>
+          <a:lstStyle/>
+          <a:p>
+            <a:pPr algn="l">
+              <a:spcBef>
+                <a:spcPts val="0"/>
+              </a:spcBef>
+              <a:spcAft>
+                <a:spcPts val="0"/>
+              </a:spcAft>
+            </a:pPr>
+            <a:r>
+              <a:rPr sz="1000" b="1" i="0">
+                <a:solidFill>
+                  <a:srgbClr val="0033A0"/>
+                </a:solidFill>
+                <a:latin typeface="Segoe UI"/>
+              </a:rPr>
+              <a:t>WHAT IT TAUGHT ME</a:t>
+            </a:r>
+          </a:p>
+        </p:txBody>
+      </p:sp>
+      <p:sp>
+        <p:nvSpPr>
           <p:cNvPr id="15" name="TextBox 14"/>
           <p:cNvSpPr txBox="1"/>
           <p:nvPr/>
         </p:nvSpPr>
         <p:spPr>
           <a:xfrm>
-            <a:off x="822960" y="4370832"/>
-            <a:ext cx="2377440" cy="502920"/>
+            <a:off x="3291840" y="4480559"/>
+            <a:ext cx="8046720" cy="512064"/>
           </a:xfrm>
           <a:prstGeom prst="rect">
             <a:avLst/>
@@ -25804,49 +24485,7 @@
               </a:spcAft>
             </a:pPr>
             <a:r>
-              <a:rPr sz="1000" b="1" i="0">
-                <a:solidFill>
-                  <a:srgbClr val="0033A0"/>
-                </a:solidFill>
-                <a:latin typeface="Segoe UI"/>
-              </a:rPr>
-              <a:t>WHAT IT TAUGHT ME</a:t>
-            </a:r>
-          </a:p>
-        </p:txBody>
-      </p:sp>
-      <p:sp>
-        <p:nvSpPr>
-          <p:cNvPr id="16" name="TextBox 15"/>
-          <p:cNvSpPr txBox="1"/>
-          <p:nvPr/>
-        </p:nvSpPr>
-        <p:spPr>
-          <a:xfrm>
-            <a:off x="3291840" y="4370832"/>
-            <a:ext cx="8046720" cy="502920"/>
-          </a:xfrm>
-          <a:prstGeom prst="rect">
-            <a:avLst/>
-          </a:prstGeom>
-          <a:noFill/>
-        </p:spPr>
-        <p:txBody>
-          <a:bodyPr wrap="square" lIns="0" rIns="0" tIns="0" bIns="0" anchor="ctr">
-            <a:spAutoFit/>
-          </a:bodyPr>
-          <a:lstStyle/>
-          <a:p>
-            <a:pPr algn="l">
-              <a:spcBef>
-                <a:spcPts val="0"/>
-              </a:spcBef>
-              <a:spcAft>
-                <a:spcPts val="0"/>
-              </a:spcAft>
-            </a:pPr>
-            <a:r>
-              <a:rPr sz="1500" b="0" i="0">
+              <a:rPr sz="1600" b="0" i="0">
                 <a:solidFill>
                   <a:srgbClr val="051C2C"/>
                 </a:solidFill>
@@ -25859,14 +24498,14 @@
       </p:sp>
       <p:sp>
         <p:nvSpPr>
-          <p:cNvPr id="17" name="Rectangle 16"/>
+          <p:cNvPr id="16" name="Rectangle 15"/>
           <p:cNvSpPr/>
           <p:nvPr/>
         </p:nvSpPr>
         <p:spPr>
           <a:xfrm>
-            <a:off x="457200" y="5175504"/>
-            <a:ext cx="11274552" cy="859536"/>
+            <a:off x="457200" y="5321807"/>
+            <a:ext cx="11274552" cy="914400"/>
           </a:xfrm>
           <a:prstGeom prst="rect">
             <a:avLst/>
@@ -25889,14 +24528,56 @@
       </p:sp>
       <p:sp>
         <p:nvSpPr>
+          <p:cNvPr id="17" name="TextBox 16"/>
+          <p:cNvSpPr txBox="1"/>
+          <p:nvPr/>
+        </p:nvSpPr>
+        <p:spPr>
+          <a:xfrm>
+            <a:off x="822960" y="5522975"/>
+            <a:ext cx="2377440" cy="512064"/>
+          </a:xfrm>
+          <a:prstGeom prst="rect">
+            <a:avLst/>
+          </a:prstGeom>
+          <a:noFill/>
+        </p:spPr>
+        <p:txBody>
+          <a:bodyPr wrap="square" lIns="0" rIns="0" tIns="0" bIns="0" anchor="ctr">
+            <a:spAutoFit/>
+          </a:bodyPr>
+          <a:lstStyle/>
+          <a:p>
+            <a:pPr algn="l">
+              <a:spcBef>
+                <a:spcPts val="0"/>
+              </a:spcBef>
+              <a:spcAft>
+                <a:spcPts val="0"/>
+              </a:spcAft>
+            </a:pPr>
+            <a:r>
+              <a:rPr sz="1000" b="1" i="0">
+                <a:solidFill>
+                  <a:srgbClr val="0033A0"/>
+                </a:solidFill>
+                <a:latin typeface="Segoe UI"/>
+              </a:rPr>
+              <a:t>STATUS</a:t>
+            </a:r>
+          </a:p>
+        </p:txBody>
+      </p:sp>
+      <p:sp>
+        <p:nvSpPr>
           <p:cNvPr id="18" name="TextBox 17"/>
           <p:cNvSpPr txBox="1"/>
           <p:nvPr/>
         </p:nvSpPr>
         <p:spPr>
           <a:xfrm>
-            <a:off x="822960" y="5358384"/>
-            <a:ext cx="2377440" cy="502920"/>
+            <a:off x="3291840" y="5522975"/>
+            <a:ext cx="8046720" cy="512064"/>
           </a:xfrm>
           <a:prstGeom prst="rect">
             <a:avLst/>
@@ -25918,97 +24599,13 @@
               </a:spcAft>
             </a:pPr>
             <a:r>
-              <a:rPr sz="1000" b="1" i="0">
-                <a:solidFill>
-                  <a:srgbClr val="0033A0"/>
+              <a:rPr sz="1600" b="0" i="0">
+                <a:solidFill>
+                  <a:srgbClr val="051C2C"/>
                 </a:solidFill>
                 <a:latin typeface="Segoe UI"/>
               </a:rPr>
-              <a:t>STATUS</a:t>
-            </a:r>
-          </a:p>
-        </p:txBody>
-      </p:sp>
-      <p:sp>
-        <p:nvSpPr>
-          <p:cNvPr id="19" name="TextBox 18"/>
-          <p:cNvSpPr txBox="1"/>
-          <p:nvPr/>
-        </p:nvSpPr>
-        <p:spPr>
-          <a:xfrm>
-            <a:off x="3291840" y="5358384"/>
-            <a:ext cx="8046720" cy="502920"/>
-          </a:xfrm>
-          <a:prstGeom prst="rect">
-            <a:avLst/>
-          </a:prstGeom>
-          <a:noFill/>
-        </p:spPr>
-        <p:txBody>
-          <a:bodyPr wrap="square" lIns="0" rIns="0" tIns="0" bIns="0" anchor="ctr">
-            <a:spAutoFit/>
-          </a:bodyPr>
-          <a:lstStyle/>
-          <a:p>
-            <a:pPr algn="l">
-              <a:spcBef>
-                <a:spcPts val="0"/>
-              </a:spcBef>
-              <a:spcAft>
-                <a:spcPts val="0"/>
-              </a:spcAft>
-            </a:pPr>
-            <a:r>
-              <a:rPr sz="1500" b="0" i="0">
-                <a:solidFill>
-                  <a:srgbClr val="051C2C"/>
-                </a:solidFill>
-                <a:latin typeface="Segoe UI"/>
-              </a:rPr>
-              <a:t>[ % complete · next milestone ]</a:t>
-            </a:r>
-          </a:p>
-        </p:txBody>
-      </p:sp>
-      <p:sp>
-        <p:nvSpPr>
-          <p:cNvPr id="20" name="TextBox 19"/>
-          <p:cNvSpPr txBox="1"/>
-          <p:nvPr/>
-        </p:nvSpPr>
-        <p:spPr>
-          <a:xfrm>
-            <a:off x="457200" y="6254496"/>
-            <a:ext cx="11274552" cy="274320"/>
-          </a:xfrm>
-          <a:prstGeom prst="rect">
-            <a:avLst/>
-          </a:prstGeom>
-          <a:noFill/>
-        </p:spPr>
-        <p:txBody>
-          <a:bodyPr wrap="square" lIns="0" rIns="0" tIns="0" bIns="0" anchor="t">
-            <a:spAutoFit/>
-          </a:bodyPr>
-          <a:lstStyle/>
-          <a:p>
-            <a:pPr algn="l">
-              <a:spcBef>
-                <a:spcPts val="0"/>
-              </a:spcBef>
-              <a:spcAft>
-                <a:spcPts val="0"/>
-              </a:spcAft>
-            </a:pPr>
-            <a:r>
-              <a:rPr sz="1250" b="0" i="0">
-                <a:solidFill>
-                  <a:srgbClr val="6E7C87"/>
-                </a:solidFill>
-                <a:latin typeface="Segoe UI"/>
-              </a:rPr>
-              <a:t>Worked directly with my engineering lead — this is the experience the matrix does not capture.</a:t>
+              <a:t>[ % complete, next milestone ]</a:t>
             </a:r>
           </a:p>
         </p:txBody>
@@ -26018,6 +24615,18 @@
   <p:clrMapOvr>
     <a:masterClrMapping/>
   </p:clrMapOvr>
+  <mc:AlternateContent xmlns:mc="http://schemas.openxmlformats.org/markup-compatibility/2006">
+    <mc:Choice xmlns:p159="http://schemas.microsoft.com/office/powerpoint/2015/09/main" Requires="p159">
+      <p:transition xmlns:p14="http://schemas.microsoft.com/office/powerpoint/2010/main" spd="slow" p14:dur="1250">
+        <p159:morph option="byObject"/>
+      </p:transition>
+    </mc:Choice>
+    <mc:Fallback>
+      <p:transition xmlns:p14="http://schemas.microsoft.com/office/powerpoint/2010/main" spd="slow">
+        <p:fade/>
+      </p:transition>
+    </mc:Fallback>
+  </mc:AlternateContent>
 </p:sld>
 </file>
 
@@ -26284,7 +24893,7 @@
         </p:nvSpPr>
         <p:spPr>
           <a:xfrm>
-            <a:off x="3310128" y="2048256"/>
+            <a:off x="3310128" y="2157984"/>
             <a:ext cx="1682495" cy="219456"/>
           </a:xfrm>
           <a:prstGeom prst="rect">
@@ -26326,7 +24935,7 @@
         </p:nvSpPr>
         <p:spPr>
           <a:xfrm>
-            <a:off x="4992624" y="2048256"/>
+            <a:off x="4992624" y="2157984"/>
             <a:ext cx="1682495" cy="219456"/>
           </a:xfrm>
           <a:prstGeom prst="rect">
@@ -26368,8 +24977,8 @@
         </p:nvSpPr>
         <p:spPr>
           <a:xfrm>
-            <a:off x="4992624" y="2304288"/>
-            <a:ext cx="7315" cy="3383280"/>
+            <a:off x="4992624" y="2414016"/>
+            <a:ext cx="7315" cy="3346704"/>
           </a:xfrm>
           <a:prstGeom prst="rect">
             <a:avLst/>
@@ -26398,7 +25007,7 @@
         </p:nvSpPr>
         <p:spPr>
           <a:xfrm>
-            <a:off x="6675120" y="2048256"/>
+            <a:off x="6675120" y="2157984"/>
             <a:ext cx="1682495" cy="219456"/>
           </a:xfrm>
           <a:prstGeom prst="rect">
@@ -26440,8 +25049,8 @@
         </p:nvSpPr>
         <p:spPr>
           <a:xfrm>
-            <a:off x="6675120" y="2304288"/>
-            <a:ext cx="7315" cy="3383280"/>
+            <a:off x="6675120" y="2414016"/>
+            <a:ext cx="7315" cy="3346704"/>
           </a:xfrm>
           <a:prstGeom prst="rect">
             <a:avLst/>
@@ -26470,7 +25079,7 @@
         </p:nvSpPr>
         <p:spPr>
           <a:xfrm>
-            <a:off x="8357616" y="2048256"/>
+            <a:off x="8357616" y="2157984"/>
             <a:ext cx="1682495" cy="219456"/>
           </a:xfrm>
           <a:prstGeom prst="rect">
@@ -26512,8 +25121,8 @@
         </p:nvSpPr>
         <p:spPr>
           <a:xfrm>
-            <a:off x="8357616" y="2304288"/>
-            <a:ext cx="7315" cy="3383280"/>
+            <a:off x="8357616" y="2414016"/>
+            <a:ext cx="7315" cy="3346704"/>
           </a:xfrm>
           <a:prstGeom prst="rect">
             <a:avLst/>
@@ -26542,7 +25151,7 @@
         </p:nvSpPr>
         <p:spPr>
           <a:xfrm>
-            <a:off x="10040112" y="2048256"/>
+            <a:off x="10040112" y="2157984"/>
             <a:ext cx="1682495" cy="219456"/>
           </a:xfrm>
           <a:prstGeom prst="rect">
@@ -26584,8 +25193,8 @@
         </p:nvSpPr>
         <p:spPr>
           <a:xfrm>
-            <a:off x="10040112" y="2304288"/>
-            <a:ext cx="7315" cy="3383280"/>
+            <a:off x="10040112" y="2414016"/>
+            <a:ext cx="7315" cy="3346704"/>
           </a:xfrm>
           <a:prstGeom prst="rect">
             <a:avLst/>
@@ -26614,8 +25223,8 @@
         </p:nvSpPr>
         <p:spPr>
           <a:xfrm>
-            <a:off x="457200" y="2523744"/>
-            <a:ext cx="2743200" cy="457200"/>
+            <a:off x="457200" y="2724912"/>
+            <a:ext cx="2743200" cy="365760"/>
           </a:xfrm>
           <a:prstGeom prst="rect">
             <a:avLst/>
@@ -26640,32 +25249,13 @@
               </a:spcAft>
             </a:pPr>
             <a:r>
-              <a:rPr sz="1150" b="1" i="0">
+              <a:rPr sz="1200" b="1" i="0">
                 <a:solidFill>
                   <a:srgbClr val="051C2C"/>
                 </a:solidFill>
                 <a:latin typeface="Segoe UI"/>
               </a:rPr>
-              <a:t>Level I — welding fundamentals</a:t>
-            </a:r>
-          </a:p>
-          <a:p>
-            <a:pPr>
-              <a:spcBef>
-                <a:spcPts val="200"/>
-              </a:spcBef>
-              <a:spcAft>
-                <a:spcPts val="0"/>
-              </a:spcAft>
-            </a:pPr>
-            <a:r>
-              <a:rPr sz="950" b="0" i="0">
-                <a:solidFill>
-                  <a:srgbClr val="6E7C87"/>
-                </a:solidFill>
-                <a:latin typeface="Segoe UI"/>
-              </a:rPr>
-              <a:t>9 skills · informal so far</a:t>
+              <a:t>Level I: welding fundamentals</a:t>
             </a:r>
           </a:p>
         </p:txBody>
@@ -26678,8 +25268,8 @@
         </p:nvSpPr>
         <p:spPr>
           <a:xfrm>
-            <a:off x="3310128" y="2505456"/>
-            <a:ext cx="3028492" cy="365760"/>
+            <a:off x="3310128" y="2651760"/>
+            <a:ext cx="3028492" cy="384048"/>
           </a:xfrm>
           <a:prstGeom prst="rect">
             <a:avLst/>
@@ -26708,8 +25298,8 @@
         </p:nvSpPr>
         <p:spPr>
           <a:xfrm>
-            <a:off x="6675120" y="2505456"/>
-            <a:ext cx="1682496" cy="365760"/>
+            <a:off x="6675120" y="2651760"/>
+            <a:ext cx="1682496" cy="384048"/>
           </a:xfrm>
           <a:prstGeom prst="rect">
             <a:avLst/>
@@ -26738,8 +25328,8 @@
         </p:nvSpPr>
         <p:spPr>
           <a:xfrm>
-            <a:off x="457200" y="3182112"/>
-            <a:ext cx="2743200" cy="457200"/>
+            <a:off x="457200" y="3383280"/>
+            <a:ext cx="2743200" cy="365760"/>
           </a:xfrm>
           <a:prstGeom prst="rect">
             <a:avLst/>
@@ -26764,32 +25354,13 @@
               </a:spcAft>
             </a:pPr>
             <a:r>
-              <a:rPr sz="1150" b="1" i="0">
+              <a:rPr sz="1200" b="1" i="0">
                 <a:solidFill>
                   <a:srgbClr val="051C2C"/>
                 </a:solidFill>
                 <a:latin typeface="Segoe UI"/>
               </a:rPr>
-              <a:t>Level L — execution in the cell</a:t>
-            </a:r>
-          </a:p>
-          <a:p>
-            <a:pPr>
-              <a:spcBef>
-                <a:spcPts val="200"/>
-              </a:spcBef>
-              <a:spcAft>
-                <a:spcPts val="0"/>
-              </a:spcAft>
-            </a:pPr>
-            <a:r>
-              <a:rPr sz="950" b="0" i="0">
-                <a:solidFill>
-                  <a:srgbClr val="6E7C87"/>
-                </a:solidFill>
-                <a:latin typeface="Segoe UI"/>
-              </a:rPr>
-              <a:t>5 skills</a:t>
+              <a:t>Level L: execution in the cell</a:t>
             </a:r>
           </a:p>
         </p:txBody>
@@ -26802,8 +25373,8 @@
         </p:nvSpPr>
         <p:spPr>
           <a:xfrm>
-            <a:off x="3310128" y="3163824"/>
-            <a:ext cx="3028492" cy="365760"/>
+            <a:off x="3310128" y="3310128"/>
+            <a:ext cx="3028492" cy="384048"/>
           </a:xfrm>
           <a:prstGeom prst="rect">
             <a:avLst/>
@@ -26832,8 +25403,8 @@
         </p:nvSpPr>
         <p:spPr>
           <a:xfrm>
-            <a:off x="6338620" y="3163824"/>
-            <a:ext cx="3701491" cy="365760"/>
+            <a:off x="6338620" y="3310128"/>
+            <a:ext cx="3701491" cy="384048"/>
           </a:xfrm>
           <a:prstGeom prst="rect">
             <a:avLst/>
@@ -26862,8 +25433,8 @@
         </p:nvSpPr>
         <p:spPr>
           <a:xfrm>
-            <a:off x="457200" y="3840479"/>
-            <a:ext cx="2743200" cy="457200"/>
+            <a:off x="457200" y="4041648"/>
+            <a:ext cx="2743200" cy="365760"/>
           </a:xfrm>
           <a:prstGeom prst="rect">
             <a:avLst/>
@@ -26888,32 +25459,13 @@
               </a:spcAft>
             </a:pPr>
             <a:r>
-              <a:rPr sz="1150" b="1" i="0">
+              <a:rPr sz="1200" b="1" i="0">
                 <a:solidFill>
                   <a:srgbClr val="051C2C"/>
                 </a:solidFill>
                 <a:latin typeface="Segoe UI"/>
               </a:rPr>
-              <a:t>Level U — robot programming</a:t>
-            </a:r>
-          </a:p>
-          <a:p>
-            <a:pPr>
-              <a:spcBef>
-                <a:spcPts val="200"/>
-              </a:spcBef>
-              <a:spcAft>
-                <a:spcPts val="0"/>
-              </a:spcAft>
-            </a:pPr>
-            <a:r>
-              <a:rPr sz="950" b="0" i="0">
-                <a:solidFill>
-                  <a:srgbClr val="6E7C87"/>
-                </a:solidFill>
-                <a:latin typeface="Segoe UI"/>
-              </a:rPr>
-              <a:t>3 skills</a:t>
+              <a:t>Level U: robot programming</a:t>
             </a:r>
           </a:p>
         </p:txBody>
@@ -26926,8 +25478,8 @@
         </p:nvSpPr>
         <p:spPr>
           <a:xfrm>
-            <a:off x="6675120" y="3822191"/>
-            <a:ext cx="4542739" cy="365760"/>
+            <a:off x="6675120" y="3968496"/>
+            <a:ext cx="4542739" cy="384048"/>
           </a:xfrm>
           <a:prstGeom prst="rect">
             <a:avLst/>
@@ -26956,8 +25508,8 @@
         </p:nvSpPr>
         <p:spPr>
           <a:xfrm>
-            <a:off x="457200" y="4498847"/>
-            <a:ext cx="2743200" cy="457200"/>
+            <a:off x="457200" y="4700016"/>
+            <a:ext cx="2743200" cy="365760"/>
           </a:xfrm>
           <a:prstGeom prst="rect">
             <a:avLst/>
@@ -26982,32 +25534,13 @@
               </a:spcAft>
             </a:pPr>
             <a:r>
-              <a:rPr sz="1150" b="1" i="0">
+              <a:rPr sz="1200" b="1" i="0">
                 <a:solidFill>
                   <a:srgbClr val="051C2C"/>
                 </a:solidFill>
                 <a:latin typeface="Segoe UI"/>
               </a:rPr>
-              <a:t>Level O — ANDON and improvement</a:t>
-            </a:r>
-          </a:p>
-          <a:p>
-            <a:pPr>
-              <a:spcBef>
-                <a:spcPts val="200"/>
-              </a:spcBef>
-              <a:spcAft>
-                <a:spcPts val="0"/>
-              </a:spcAft>
-            </a:pPr>
-            <a:r>
-              <a:rPr sz="950" b="0" i="0">
-                <a:solidFill>
-                  <a:srgbClr val="6E7C87"/>
-                </a:solidFill>
-                <a:latin typeface="Segoe UI"/>
-              </a:rPr>
-              <a:t>6 skills</a:t>
+              <a:t>Level O: ANDON and improvement</a:t>
             </a:r>
           </a:p>
         </p:txBody>
@@ -27020,8 +25553,8 @@
         </p:nvSpPr>
         <p:spPr>
           <a:xfrm>
-            <a:off x="3310128" y="4480559"/>
-            <a:ext cx="3028492" cy="365760"/>
+            <a:off x="3310128" y="4626864"/>
+            <a:ext cx="3028492" cy="384048"/>
           </a:xfrm>
           <a:prstGeom prst="rect">
             <a:avLst/>
@@ -27050,8 +25583,8 @@
         </p:nvSpPr>
         <p:spPr>
           <a:xfrm>
-            <a:off x="8357616" y="4480559"/>
-            <a:ext cx="2860243" cy="365760"/>
+            <a:off x="8357616" y="4626864"/>
+            <a:ext cx="2860243" cy="384048"/>
           </a:xfrm>
           <a:prstGeom prst="rect">
             <a:avLst/>
@@ -27080,8 +25613,8 @@
         </p:nvSpPr>
         <p:spPr>
           <a:xfrm>
-            <a:off x="457200" y="5157215"/>
-            <a:ext cx="2743200" cy="457200"/>
+            <a:off x="457200" y="5358383"/>
+            <a:ext cx="2743200" cy="365760"/>
           </a:xfrm>
           <a:prstGeom prst="rect">
             <a:avLst/>
@@ -27106,7 +25639,7 @@
               </a:spcAft>
             </a:pPr>
             <a:r>
-              <a:rPr sz="1150" b="1" i="0">
+              <a:rPr sz="1200" b="1" i="0">
                 <a:solidFill>
                   <a:srgbClr val="051C2C"/>
                 </a:solidFill>
@@ -27115,25 +25648,6 @@
               <a:t>Integration project</a:t>
             </a:r>
           </a:p>
-          <a:p>
-            <a:pPr>
-              <a:spcBef>
-                <a:spcPts val="200"/>
-              </a:spcBef>
-              <a:spcAft>
-                <a:spcPts val="0"/>
-              </a:spcAft>
-            </a:pPr>
-            <a:r>
-              <a:rPr sz="950" b="0" i="0">
-                <a:solidFill>
-                  <a:srgbClr val="6E7C87"/>
-                </a:solidFill>
-                <a:latin typeface="Segoe UI"/>
-              </a:rPr>
-              <a:t>off-matrix</a:t>
-            </a:r>
-          </a:p>
         </p:txBody>
       </p:sp>
       <p:sp>
@@ -27144,8 +25658,8 @@
         </p:nvSpPr>
         <p:spPr>
           <a:xfrm>
-            <a:off x="3310128" y="5138927"/>
-            <a:ext cx="3028492" cy="365760"/>
+            <a:off x="3310128" y="5285231"/>
+            <a:ext cx="3028492" cy="384048"/>
           </a:xfrm>
           <a:prstGeom prst="rect">
             <a:avLst/>
@@ -27174,8 +25688,8 @@
         </p:nvSpPr>
         <p:spPr>
           <a:xfrm>
-            <a:off x="6338620" y="5138927"/>
-            <a:ext cx="3701491" cy="365760"/>
+            <a:off x="6338620" y="5285231"/>
+            <a:ext cx="3701491" cy="384048"/>
           </a:xfrm>
           <a:prstGeom prst="rect">
             <a:avLst/>
@@ -27204,8 +25718,8 @@
         </p:nvSpPr>
         <p:spPr>
           <a:xfrm>
-            <a:off x="6324904" y="2304288"/>
-            <a:ext cx="27432" cy="3383280"/>
+            <a:off x="6324904" y="2414016"/>
+            <a:ext cx="27432" cy="3346704"/>
           </a:xfrm>
           <a:prstGeom prst="rect">
             <a:avLst/>
@@ -27234,7 +25748,7 @@
         </p:nvSpPr>
         <p:spPr>
           <a:xfrm>
-            <a:off x="5826556" y="1773936"/>
+            <a:off x="5826556" y="1883664"/>
             <a:ext cx="1024128" cy="219456"/>
           </a:xfrm>
           <a:prstGeom prst="rect">
@@ -27276,7 +25790,7 @@
         </p:nvSpPr>
         <p:spPr>
           <a:xfrm>
-            <a:off x="3310128" y="5815584"/>
+            <a:off x="3310128" y="5943600"/>
             <a:ext cx="182880" cy="182880"/>
           </a:xfrm>
           <a:prstGeom prst="rect">
@@ -27306,7 +25820,7 @@
         </p:nvSpPr>
         <p:spPr>
           <a:xfrm>
-            <a:off x="3584448" y="5788152"/>
+            <a:off x="3584448" y="5916168"/>
             <a:ext cx="1463040" cy="237744"/>
           </a:xfrm>
           <a:prstGeom prst="rect">
@@ -27348,7 +25862,7 @@
         </p:nvSpPr>
         <p:spPr>
           <a:xfrm>
-            <a:off x="4773168" y="5815584"/>
+            <a:off x="4773168" y="5943600"/>
             <a:ext cx="182880" cy="182880"/>
           </a:xfrm>
           <a:prstGeom prst="rect">
@@ -27378,7 +25892,7 @@
         </p:nvSpPr>
         <p:spPr>
           <a:xfrm>
-            <a:off x="5047488" y="5788152"/>
+            <a:off x="5047488" y="5916168"/>
             <a:ext cx="1463040" cy="237744"/>
           </a:xfrm>
           <a:prstGeom prst="rect">
@@ -27408,48 +25922,6 @@
                 <a:latin typeface="Segoe UI"/>
               </a:rPr>
               <a:t>Planned</a:t>
-            </a:r>
-          </a:p>
-        </p:txBody>
-      </p:sp>
-      <p:sp>
-        <p:nvSpPr>
-          <p:cNvPr id="37" name="TextBox 36"/>
-          <p:cNvSpPr txBox="1"/>
-          <p:nvPr/>
-        </p:nvSpPr>
-        <p:spPr>
-          <a:xfrm>
-            <a:off x="457200" y="6236208"/>
-            <a:ext cx="11274552" cy="274320"/>
-          </a:xfrm>
-          <a:prstGeom prst="rect">
-            <a:avLst/>
-          </a:prstGeom>
-          <a:noFill/>
-        </p:spPr>
-        <p:txBody>
-          <a:bodyPr wrap="square" lIns="0" rIns="0" tIns="0" bIns="0" anchor="t">
-            <a:spAutoFit/>
-          </a:bodyPr>
-          <a:lstStyle/>
-          <a:p>
-            <a:pPr algn="l">
-              <a:spcBef>
-                <a:spcPts val="0"/>
-              </a:spcBef>
-              <a:spcAft>
-                <a:spcPts val="0"/>
-              </a:spcAft>
-            </a:pPr>
-            <a:r>
-              <a:rPr sz="1250" b="0" i="0">
-                <a:solidFill>
-                  <a:srgbClr val="6E7C87"/>
-                </a:solidFill>
-                <a:latin typeface="Segoe UI"/>
-              </a:rPr>
-              <a:t>Level I needs a scheduled session. Level U needs supervised cell time. Both are calendar items, not budget items.</a:t>
             </a:r>
           </a:p>
         </p:txBody>
@@ -27459,6 +25931,18 @@
   <p:clrMapOvr>
     <a:masterClrMapping/>
   </p:clrMapOvr>
+  <mc:AlternateContent xmlns:mc="http://schemas.openxmlformats.org/markup-compatibility/2006">
+    <mc:Choice xmlns:p159="http://schemas.microsoft.com/office/powerpoint/2015/09/main" Requires="p159">
+      <p:transition xmlns:p14="http://schemas.microsoft.com/office/powerpoint/2010/main" spd="slow" p14:dur="1250">
+        <p159:morph option="byObject"/>
+      </p:transition>
+    </mc:Choice>
+    <mc:Fallback>
+      <p:transition xmlns:p14="http://schemas.microsoft.com/office/powerpoint/2010/main" spd="slow">
+        <p:fade/>
+      </p:transition>
+    </mc:Fallback>
+  </mc:AlternateContent>
 </p:sld>
 </file>
 
